--- a/meetings/july/28/presentation/progress-deck.pptx
+++ b/meetings/july/28/presentation/progress-deck.pptx
@@ -11,7 +11,6 @@
     <p:sldId id="259" r:id="rId6"/>
     <p:sldId id="260" r:id="rId7"/>
     <p:sldId id="261" r:id="rId8"/>
-    <p:sldId id="262" r:id="rId9"/>
   </p:sldIdLst>
   <p:sldSz cx="12192000" cy="6858000"/>
   <p:notesSz cx="7772400" cy="10058400"/>
@@ -19,8 +18,8 @@
 </file>
 
 <file path=ppt/slideLayouts/slideLayout1.xml><?xml version="1.0" encoding="utf-8"?>
-<p:sldLayout xmlns:a="http://schemas.openxmlformats.org/drawingml/2006/main" xmlns:p="http://schemas.openxmlformats.org/presentationml/2006/main" xmlns:r="http://schemas.openxmlformats.org/officeDocument/2006/relationships" xmlns:p14="http://schemas.microsoft.com/office/powerpoint/2010/main" xmlns:p15="http://schemas.microsoft.com/office/powerpoint/2012/main" xmlns:mc="http://schemas.openxmlformats.org/markup-compatibility/2006" type="title" preserve="1">
-  <p:cSld name="Title Slide">
+<p:sldLayout xmlns:a="http://schemas.openxmlformats.org/drawingml/2006/main" xmlns:p="http://schemas.openxmlformats.org/presentationml/2006/main" xmlns:r="http://schemas.openxmlformats.org/officeDocument/2006/relationships" xmlns:p14="http://schemas.microsoft.com/office/powerpoint/2010/main" xmlns:p15="http://schemas.microsoft.com/office/powerpoint/2012/main" xmlns:mc="http://schemas.openxmlformats.org/markup-compatibility/2006" type="blank" preserve="1">
+  <p:cSld name="Blank">
     <p:bg>
       <p:bgPr>
         <a:solidFill>
@@ -49,69 +48,13 @@
             <a:spLocks noGrp="1"/>
           </p:cNvSpPr>
           <p:nvPr>
-            <p:ph type="title"/>
-          </p:nvPr>
-        </p:nvSpPr>
-        <p:spPr>
-          <a:xfrm>
-            <a:off x="685800" y="2130480"/>
-            <a:ext cx="7772040" cy="1469520"/>
-          </a:xfrm>
-          <a:prstGeom prst="rect">
-            <a:avLst/>
-          </a:prstGeom>
-          <a:noFill/>
-          <a:ln w="0">
-            <a:noFill/>
-          </a:ln>
-        </p:spPr>
-        <p:txBody>
-          <a:bodyPr lIns="91440" rIns="91440" tIns="45720" bIns="45720" anchor="ctr">
-            <a:noAutofit/>
-          </a:bodyPr>
-          <a:p>
-            <a:pPr indent="0" algn="ctr" defTabSz="457200">
-              <a:lnSpc>
-                <a:spcPct val="100000"/>
-              </a:lnSpc>
-              <a:buNone/>
-            </a:pPr>
-            <a:r>
-              <a:rPr lang="en-US" sz="4400" b="0" u="none" strike="noStrike">
-                <a:solidFill>
-                  <a:schemeClr val="dk1"/>
-                </a:solidFill>
-                <a:effectLst/>
-                <a:uFillTx/>
-                <a:latin typeface="Calibri"/>
-              </a:rPr>
-              <a:t>Click to edit Master title style</a:t>
-            </a:r>
-            <a:endParaRPr lang="en-US" sz="4400" b="0" u="none" strike="noStrike">
-              <a:solidFill>
-                <a:schemeClr val="dk1"/>
-              </a:solidFill>
-              <a:effectLst/>
-              <a:uFillTx/>
-              <a:latin typeface="Calibri"/>
-            </a:endParaRPr>
-          </a:p>
-        </p:txBody>
-      </p:sp>
-      <p:sp>
-        <p:nvSpPr>
-          <p:cNvPr id="3" name="PlaceHolder 2"/>
-          <p:cNvSpPr>
-            <a:spLocks noGrp="1"/>
-          </p:cNvSpPr>
-          <p:nvPr>
             <p:ph type="dt" idx="1"/>
           </p:nvPr>
         </p:nvSpPr>
         <p:spPr>
           <a:xfrm>
             <a:off x="457200" y="6356520"/>
-            <a:ext cx="2133360" cy="364680"/>
+            <a:ext cx="2133000" cy="364320"/>
           </a:xfrm>
           <a:prstGeom prst="rect">
             <a:avLst/>
@@ -131,6 +74,9 @@
                 <a:spcPct val="100000"/>
               </a:lnSpc>
               <a:buNone/>
+              <a:tabLst>
+                <a:tab algn="l" pos="0"/>
+              </a:tabLst>
               <a:defRPr lang="en-US" sz="1200" b="0" u="none" strike="noStrike">
                 <a:solidFill>
                   <a:schemeClr val="dk1">
@@ -149,6 +95,9 @@
                 <a:spcPct val="100000"/>
               </a:lnSpc>
               <a:buNone/>
+              <a:tabLst>
+                <a:tab algn="l" pos="0"/>
+              </a:tabLst>
             </a:pPr>
             <a:r>
               <a:rPr lang="en-US" sz="1200" b="0" u="none" strike="noStrike">
@@ -176,7 +125,7 @@
       </p:sp>
       <p:sp>
         <p:nvSpPr>
-          <p:cNvPr id="4" name="PlaceHolder 3"/>
+          <p:cNvPr id="3" name="PlaceHolder 2"/>
           <p:cNvSpPr>
             <a:spLocks noGrp="1"/>
           </p:cNvSpPr>
@@ -187,7 +136,7 @@
         <p:spPr>
           <a:xfrm>
             <a:off x="3124080" y="6356520"/>
-            <a:ext cx="2895120" cy="364680"/>
+            <a:ext cx="2894760" cy="364320"/>
           </a:xfrm>
           <a:prstGeom prst="rect">
             <a:avLst/>
@@ -203,7 +152,13 @@
           </a:bodyPr>
           <a:lstStyle>
             <a:lvl1pPr indent="0" algn="ctr">
-              <a:buNone/>
+              <a:lnSpc>
+                <a:spcPct val="100000"/>
+              </a:lnSpc>
+              <a:buNone/>
+              <a:tabLst>
+                <a:tab algn="l" pos="0"/>
+              </a:tabLst>
               <a:defRPr lang="en-US" sz="1400" b="0" u="none" strike="noStrike">
                 <a:solidFill>
                   <a:srgbClr val="000000"/>
@@ -216,7 +171,13 @@
           </a:lstStyle>
           <a:p>
             <a:pPr indent="0" algn="ctr">
-              <a:buNone/>
+              <a:lnSpc>
+                <a:spcPct val="100000"/>
+              </a:lnSpc>
+              <a:buNone/>
+              <a:tabLst>
+                <a:tab algn="l" pos="0"/>
+              </a:tabLst>
             </a:pPr>
             <a:r>
               <a:rPr lang="en-US" sz="1400" b="0" u="none" strike="noStrike">
@@ -242,7 +203,7 @@
       </p:sp>
       <p:sp>
         <p:nvSpPr>
-          <p:cNvPr id="5" name="PlaceHolder 4"/>
+          <p:cNvPr id="4" name="PlaceHolder 3"/>
           <p:cNvSpPr>
             <a:spLocks noGrp="1"/>
           </p:cNvSpPr>
@@ -253,7 +214,7 @@
         <p:spPr>
           <a:xfrm>
             <a:off x="6553080" y="6356520"/>
-            <a:ext cx="2133360" cy="364680"/>
+            <a:ext cx="2133000" cy="364320"/>
           </a:xfrm>
           <a:prstGeom prst="rect">
             <a:avLst/>
@@ -273,6 +234,9 @@
                 <a:spcPct val="100000"/>
               </a:lnSpc>
               <a:buNone/>
+              <a:tabLst>
+                <a:tab algn="l" pos="0"/>
+              </a:tabLst>
               <a:defRPr lang="en-US" sz="1200" b="0" u="none" strike="noStrike">
                 <a:solidFill>
                   <a:schemeClr val="dk1">
@@ -291,8 +255,11 @@
                 <a:spcPct val="100000"/>
               </a:lnSpc>
               <a:buNone/>
-            </a:pPr>
-            <a:fld id="{96F63232-1B2B-4B6B-BF56-BB8453D90C70}" type="slidenum">
+              <a:tabLst>
+                <a:tab algn="l" pos="0"/>
+              </a:tabLst>
+            </a:pPr>
+            <a:fld id="{3086578F-1EB0-43C7-B492-EE7B3B00EC12}" type="slidenum">
               <a:rPr lang="en-US" sz="1200" b="0" u="none" strike="noStrike">
                 <a:solidFill>
                   <a:schemeClr val="dk1">
@@ -312,6 +279,339 @@
               <a:effectLst/>
               <a:uFillTx/>
               <a:latin typeface="Times New Roman"/>
+            </a:endParaRPr>
+          </a:p>
+        </p:txBody>
+      </p:sp>
+      <p:sp>
+        <p:nvSpPr>
+          <p:cNvPr id="5" name="PlaceHolder 4"/>
+          <p:cNvSpPr>
+            <a:spLocks noGrp="1"/>
+          </p:cNvSpPr>
+          <p:nvPr>
+            <p:ph type="title"/>
+          </p:nvPr>
+        </p:nvSpPr>
+        <p:spPr>
+          <a:xfrm>
+            <a:off x="609480" y="273600"/>
+            <a:ext cx="10971720" cy="1144440"/>
+          </a:xfrm>
+          <a:prstGeom prst="rect">
+            <a:avLst/>
+          </a:prstGeom>
+          <a:noFill/>
+          <a:ln w="0">
+            <a:noFill/>
+          </a:ln>
+        </p:spPr>
+        <p:txBody>
+          <a:bodyPr lIns="0" rIns="0" tIns="0" bIns="0" anchor="ctr">
+            <a:noAutofit/>
+          </a:bodyPr>
+          <a:p>
+            <a:pPr indent="0">
+              <a:lnSpc>
+                <a:spcPct val="100000"/>
+              </a:lnSpc>
+              <a:buNone/>
+              <a:tabLst>
+                <a:tab algn="l" pos="0"/>
+              </a:tabLst>
+            </a:pPr>
+            <a:r>
+              <a:rPr lang="en-US" sz="1800" b="0" u="none" strike="noStrike">
+                <a:solidFill>
+                  <a:schemeClr val="dk1"/>
+                </a:solidFill>
+                <a:effectLst/>
+                <a:uFillTx/>
+                <a:latin typeface="Calibri"/>
+              </a:rPr>
+              <a:t>Click to edit the title text format</a:t>
+            </a:r>
+            <a:endParaRPr lang="en-US" sz="1800" b="0" u="none" strike="noStrike">
+              <a:solidFill>
+                <a:srgbClr val="000000"/>
+              </a:solidFill>
+              <a:effectLst/>
+              <a:uFillTx/>
+              <a:latin typeface="Arial"/>
+            </a:endParaRPr>
+          </a:p>
+        </p:txBody>
+      </p:sp>
+      <p:sp>
+        <p:nvSpPr>
+          <p:cNvPr id="6" name="PlaceHolder 5"/>
+          <p:cNvSpPr>
+            <a:spLocks noGrp="1"/>
+          </p:cNvSpPr>
+          <p:nvPr>
+            <p:ph type="body"/>
+          </p:nvPr>
+        </p:nvSpPr>
+        <p:spPr>
+          <a:xfrm>
+            <a:off x="609480" y="1604520"/>
+            <a:ext cx="10971720" cy="3976920"/>
+          </a:xfrm>
+          <a:prstGeom prst="rect">
+            <a:avLst/>
+          </a:prstGeom>
+          <a:noFill/>
+          <a:ln w="0">
+            <a:noFill/>
+          </a:ln>
+        </p:spPr>
+        <p:txBody>
+          <a:bodyPr lIns="0" rIns="0" tIns="0" bIns="0" anchor="t">
+            <a:normAutofit/>
+          </a:bodyPr>
+          <a:p>
+            <a:pPr marL="432000" indent="-324000">
+              <a:lnSpc>
+                <a:spcPct val="100000"/>
+              </a:lnSpc>
+              <a:spcBef>
+                <a:spcPts val="1417"/>
+              </a:spcBef>
+              <a:buClr>
+                <a:srgbClr val="000000"/>
+              </a:buClr>
+              <a:buSzPct val="45000"/>
+              <a:buFont typeface="Wingdings" charset="2"/>
+              <a:buChar char=""/>
+            </a:pPr>
+            <a:r>
+              <a:rPr lang="en-US" sz="3200" b="0" u="none" strike="noStrike">
+                <a:solidFill>
+                  <a:schemeClr val="dk1"/>
+                </a:solidFill>
+                <a:effectLst/>
+                <a:uFillTx/>
+                <a:latin typeface="Calibri"/>
+              </a:rPr>
+              <a:t>Click to edit the outline text format</a:t>
+            </a:r>
+            <a:endParaRPr lang="en-US" sz="3200" b="0" u="none" strike="noStrike">
+              <a:solidFill>
+                <a:srgbClr val="000000"/>
+              </a:solidFill>
+              <a:effectLst/>
+              <a:uFillTx/>
+              <a:latin typeface="Arial"/>
+            </a:endParaRPr>
+          </a:p>
+          <a:p>
+            <a:pPr marL="864000" lvl="1" indent="-324000">
+              <a:lnSpc>
+                <a:spcPct val="100000"/>
+              </a:lnSpc>
+              <a:spcBef>
+                <a:spcPts val="1134"/>
+              </a:spcBef>
+              <a:buClr>
+                <a:srgbClr val="000000"/>
+              </a:buClr>
+              <a:buSzPct val="75000"/>
+              <a:buFont typeface="Symbol" charset="2"/>
+              <a:buChar char=""/>
+            </a:pPr>
+            <a:r>
+              <a:rPr lang="en-US" sz="2400" b="0" u="none" strike="noStrike">
+                <a:solidFill>
+                  <a:schemeClr val="dk1"/>
+                </a:solidFill>
+                <a:effectLst/>
+                <a:uFillTx/>
+                <a:latin typeface="Calibri"/>
+              </a:rPr>
+              <a:t>Second Outline Level</a:t>
+            </a:r>
+            <a:endParaRPr lang="en-US" sz="2400" b="0" u="none" strike="noStrike">
+              <a:solidFill>
+                <a:srgbClr val="000000"/>
+              </a:solidFill>
+              <a:effectLst/>
+              <a:uFillTx/>
+              <a:latin typeface="Arial"/>
+            </a:endParaRPr>
+          </a:p>
+          <a:p>
+            <a:pPr marL="1296000" lvl="2" indent="-288000">
+              <a:lnSpc>
+                <a:spcPct val="100000"/>
+              </a:lnSpc>
+              <a:spcBef>
+                <a:spcPts val="850"/>
+              </a:spcBef>
+              <a:buClr>
+                <a:srgbClr val="000000"/>
+              </a:buClr>
+              <a:buSzPct val="45000"/>
+              <a:buFont typeface="Wingdings" charset="2"/>
+              <a:buChar char=""/>
+            </a:pPr>
+            <a:r>
+              <a:rPr lang="en-US" sz="2000" b="0" u="none" strike="noStrike">
+                <a:solidFill>
+                  <a:schemeClr val="dk1"/>
+                </a:solidFill>
+                <a:effectLst/>
+                <a:uFillTx/>
+                <a:latin typeface="Calibri"/>
+              </a:rPr>
+              <a:t>Third Outline Level</a:t>
+            </a:r>
+            <a:endParaRPr lang="en-US" sz="2000" b="0" u="none" strike="noStrike">
+              <a:solidFill>
+                <a:srgbClr val="000000"/>
+              </a:solidFill>
+              <a:effectLst/>
+              <a:uFillTx/>
+              <a:latin typeface="Arial"/>
+            </a:endParaRPr>
+          </a:p>
+          <a:p>
+            <a:pPr marL="1728000" lvl="3" indent="-216000">
+              <a:lnSpc>
+                <a:spcPct val="100000"/>
+              </a:lnSpc>
+              <a:spcBef>
+                <a:spcPts val="567"/>
+              </a:spcBef>
+              <a:buClr>
+                <a:srgbClr val="000000"/>
+              </a:buClr>
+              <a:buSzPct val="75000"/>
+              <a:buFont typeface="Symbol" charset="2"/>
+              <a:buChar char=""/>
+            </a:pPr>
+            <a:r>
+              <a:rPr lang="en-US" sz="2000" b="0" u="none" strike="noStrike">
+                <a:solidFill>
+                  <a:schemeClr val="dk1"/>
+                </a:solidFill>
+                <a:effectLst/>
+                <a:uFillTx/>
+                <a:latin typeface="Calibri"/>
+              </a:rPr>
+              <a:t>Fourth Outline Level</a:t>
+            </a:r>
+            <a:endParaRPr lang="en-US" sz="2000" b="0" u="none" strike="noStrike">
+              <a:solidFill>
+                <a:srgbClr val="000000"/>
+              </a:solidFill>
+              <a:effectLst/>
+              <a:uFillTx/>
+              <a:latin typeface="Arial"/>
+            </a:endParaRPr>
+          </a:p>
+          <a:p>
+            <a:pPr marL="2160000" lvl="4" indent="-216000">
+              <a:lnSpc>
+                <a:spcPct val="100000"/>
+              </a:lnSpc>
+              <a:spcBef>
+                <a:spcPts val="283"/>
+              </a:spcBef>
+              <a:buClr>
+                <a:srgbClr val="000000"/>
+              </a:buClr>
+              <a:buSzPct val="45000"/>
+              <a:buFont typeface="Wingdings" charset="2"/>
+              <a:buChar char=""/>
+            </a:pPr>
+            <a:r>
+              <a:rPr lang="en-US" sz="2000" b="0" u="none" strike="noStrike">
+                <a:solidFill>
+                  <a:schemeClr val="dk1"/>
+                </a:solidFill>
+                <a:effectLst/>
+                <a:uFillTx/>
+                <a:latin typeface="Calibri"/>
+              </a:rPr>
+              <a:t>Fifth Outline Level</a:t>
+            </a:r>
+            <a:endParaRPr lang="en-US" sz="2000" b="0" u="none" strike="noStrike">
+              <a:solidFill>
+                <a:srgbClr val="000000"/>
+              </a:solidFill>
+              <a:effectLst/>
+              <a:uFillTx/>
+              <a:latin typeface="Arial"/>
+            </a:endParaRPr>
+          </a:p>
+          <a:p>
+            <a:pPr marL="2592000" lvl="5" indent="-216000">
+              <a:lnSpc>
+                <a:spcPct val="100000"/>
+              </a:lnSpc>
+              <a:spcBef>
+                <a:spcPts val="283"/>
+              </a:spcBef>
+              <a:buClr>
+                <a:srgbClr val="000000"/>
+              </a:buClr>
+              <a:buSzPct val="45000"/>
+              <a:buFont typeface="Wingdings" charset="2"/>
+              <a:buChar char=""/>
+            </a:pPr>
+            <a:r>
+              <a:rPr lang="en-US" sz="2000" b="0" u="none" strike="noStrike">
+                <a:solidFill>
+                  <a:schemeClr val="dk1"/>
+                </a:solidFill>
+                <a:effectLst/>
+                <a:uFillTx/>
+                <a:latin typeface="Calibri"/>
+              </a:rPr>
+              <a:t>Sixth Outline Level</a:t>
+            </a:r>
+            <a:endParaRPr lang="en-US" sz="2000" b="0" u="none" strike="noStrike">
+              <a:solidFill>
+                <a:srgbClr val="000000"/>
+              </a:solidFill>
+              <a:effectLst/>
+              <a:uFillTx/>
+              <a:latin typeface="Arial"/>
+            </a:endParaRPr>
+          </a:p>
+          <a:p>
+            <a:pPr marL="3024000" lvl="6" indent="-216000">
+              <a:lnSpc>
+                <a:spcPct val="100000"/>
+              </a:lnSpc>
+              <a:spcBef>
+                <a:spcPts val="283"/>
+              </a:spcBef>
+              <a:buClr>
+                <a:srgbClr val="000000"/>
+              </a:buClr>
+              <a:buSzPct val="45000"/>
+              <a:buFont typeface="Wingdings" charset="2"/>
+              <a:buChar char=""/>
+            </a:pPr>
+            <a:r>
+              <a:rPr lang="en-US" sz="2000" b="0" u="none" strike="noStrike">
+                <a:solidFill>
+                  <a:schemeClr val="dk1"/>
+                </a:solidFill>
+                <a:effectLst/>
+                <a:uFillTx/>
+                <a:latin typeface="Calibri"/>
+              </a:rPr>
+              <a:t>Seventh Outline Level</a:t>
+            </a:r>
+            <a:endParaRPr lang="en-US" sz="2000" b="0" u="none" strike="noStrike">
+              <a:solidFill>
+                <a:srgbClr val="000000"/>
+              </a:solidFill>
+              <a:effectLst/>
+              <a:uFillTx/>
+              <a:latin typeface="Arial"/>
             </a:endParaRPr>
           </a:p>
         </p:txBody>
@@ -323,7 +623,7 @@
 
 <file path=ppt/slideLayouts/slideLayout10.xml><?xml version="1.0" encoding="utf-8"?>
 <p:sldLayout xmlns:a="http://schemas.openxmlformats.org/drawingml/2006/main" xmlns:p="http://schemas.openxmlformats.org/presentationml/2006/main" xmlns:r="http://schemas.openxmlformats.org/officeDocument/2006/relationships" xmlns:p14="http://schemas.microsoft.com/office/powerpoint/2010/main" xmlns:p15="http://schemas.microsoft.com/office/powerpoint/2012/main" xmlns:mc="http://schemas.openxmlformats.org/markup-compatibility/2006" type="blank" preserve="1">
-  <p:cSld name="Content with Caption">
+  <p:cSld name="Comparison">
     <p:bg>
       <p:bgPr>
         <a:solidFill>
@@ -357,8 +657,8 @@
         </p:nvSpPr>
         <p:spPr>
           <a:xfrm>
-            <a:off x="457200" y="272880"/>
-            <a:ext cx="3007800" cy="1161720"/>
+            <a:off x="457200" y="274680"/>
+            <a:ext cx="8228880" cy="1142280"/>
           </a:xfrm>
           <a:prstGeom prst="rect">
             <a:avLst/>
@@ -369,18 +669,21 @@
           </a:ln>
         </p:spPr>
         <p:txBody>
-          <a:bodyPr lIns="91440" rIns="91440" tIns="45720" bIns="45720" anchor="b">
+          <a:bodyPr lIns="91440" rIns="91440" tIns="45720" bIns="45720" anchor="ctr">
             <a:noAutofit/>
           </a:bodyPr>
           <a:p>
-            <a:pPr indent="0" defTabSz="457200">
-              <a:lnSpc>
-                <a:spcPct val="100000"/>
-              </a:lnSpc>
-              <a:buNone/>
-            </a:pPr>
-            <a:r>
-              <a:rPr lang="en-US" sz="2000" b="1" u="none" strike="noStrike">
+            <a:pPr indent="0" algn="ctr" defTabSz="457200">
+              <a:lnSpc>
+                <a:spcPct val="100000"/>
+              </a:lnSpc>
+              <a:buNone/>
+              <a:tabLst>
+                <a:tab algn="l" pos="0"/>
+              </a:tabLst>
+            </a:pPr>
+            <a:r>
+              <a:rPr lang="en-US" sz="4400" b="0" u="none" strike="noStrike">
                 <a:solidFill>
                   <a:schemeClr val="dk1"/>
                 </a:solidFill>
@@ -390,13 +693,13 @@
               </a:rPr>
               <a:t>Click to edit Master title style</a:t>
             </a:r>
-            <a:endParaRPr lang="en-US" sz="2000" b="0" u="none" strike="noStrike">
-              <a:solidFill>
-                <a:schemeClr val="dk1"/>
-              </a:solidFill>
-              <a:effectLst/>
-              <a:uFillTx/>
-              <a:latin typeface="Calibri"/>
+            <a:endParaRPr lang="en-US" sz="4400" b="0" u="none" strike="noStrike">
+              <a:solidFill>
+                <a:srgbClr val="000000"/>
+              </a:solidFill>
+              <a:effectLst/>
+              <a:uFillTx/>
+              <a:latin typeface="Arial"/>
             </a:endParaRPr>
           </a:p>
         </p:txBody>
@@ -413,8 +716,8 @@
         </p:nvSpPr>
         <p:spPr>
           <a:xfrm>
-            <a:off x="3575160" y="272880"/>
-            <a:ext cx="5111280" cy="5852880"/>
+            <a:off x="457200" y="1535040"/>
+            <a:ext cx="4039560" cy="639000"/>
           </a:xfrm>
           <a:prstGeom prst="rect">
             <a:avLst/>
@@ -425,93 +728,24 @@
           </a:ln>
         </p:spPr>
         <p:txBody>
-          <a:bodyPr lIns="91440" rIns="91440" tIns="45720" bIns="45720" anchor="t">
+          <a:bodyPr lIns="91440" rIns="91440" tIns="45720" bIns="45720" anchor="b">
             <a:noAutofit/>
           </a:bodyPr>
           <a:p>
-            <a:pPr marL="343080" indent="-343080" defTabSz="457200">
-              <a:lnSpc>
-                <a:spcPct val="100000"/>
-              </a:lnSpc>
-              <a:spcBef>
-                <a:spcPts val="641"/>
-              </a:spcBef>
-              <a:buClr>
-                <a:srgbClr val="000000"/>
-              </a:buClr>
-              <a:buFont typeface="Arial"/>
-              <a:buChar char="•"/>
-            </a:pPr>
-            <a:r>
-              <a:rPr lang="en-US" sz="3200" b="0" u="none" strike="noStrike">
-                <a:solidFill>
-                  <a:schemeClr val="dk1"/>
-                </a:solidFill>
-                <a:effectLst/>
-                <a:uFillTx/>
-                <a:latin typeface="Calibri"/>
-              </a:rPr>
-              <a:t>Click to edit Master text styles</a:t>
-            </a:r>
-            <a:endParaRPr lang="en-US" sz="3200" b="0" u="none" strike="noStrike">
-              <a:solidFill>
-                <a:schemeClr val="dk1"/>
-              </a:solidFill>
-              <a:effectLst/>
-              <a:uFillTx/>
-              <a:latin typeface="Calibri"/>
-            </a:endParaRPr>
-          </a:p>
-          <a:p>
-            <a:pPr marL="743040" lvl="1" indent="-285840" defTabSz="457200">
-              <a:lnSpc>
-                <a:spcPct val="100000"/>
-              </a:lnSpc>
-              <a:spcBef>
-                <a:spcPts val="561"/>
-              </a:spcBef>
-              <a:buClr>
-                <a:srgbClr val="000000"/>
-              </a:buClr>
-              <a:buFont typeface="Arial"/>
-              <a:buChar char="–"/>
-            </a:pPr>
-            <a:r>
-              <a:rPr lang="en-US" sz="2800" b="0" u="none" strike="noStrike">
-                <a:solidFill>
-                  <a:schemeClr val="dk1"/>
-                </a:solidFill>
-                <a:effectLst/>
-                <a:uFillTx/>
-                <a:latin typeface="Calibri"/>
-              </a:rPr>
-              <a:t>Second level</a:t>
-            </a:r>
-            <a:endParaRPr lang="en-US" sz="2800" b="0" u="none" strike="noStrike">
-              <a:solidFill>
-                <a:schemeClr val="dk1"/>
-              </a:solidFill>
-              <a:effectLst/>
-              <a:uFillTx/>
-              <a:latin typeface="Calibri"/>
-            </a:endParaRPr>
-          </a:p>
-          <a:p>
-            <a:pPr marL="1143000" lvl="2" indent="-228600" defTabSz="457200">
+            <a:pPr indent="0" defTabSz="457200">
               <a:lnSpc>
                 <a:spcPct val="100000"/>
               </a:lnSpc>
               <a:spcBef>
                 <a:spcPts val="479"/>
               </a:spcBef>
-              <a:buClr>
-                <a:srgbClr val="000000"/>
-              </a:buClr>
-              <a:buFont typeface="Arial"/>
-              <a:buChar char="•"/>
-            </a:pPr>
-            <a:r>
-              <a:rPr lang="en-US" sz="2400" b="0" u="none" strike="noStrike">
+              <a:buNone/>
+              <a:tabLst>
+                <a:tab algn="l" pos="0"/>
+              </a:tabLst>
+            </a:pPr>
+            <a:r>
+              <a:rPr lang="en-US" sz="2400" b="1" u="none" strike="noStrike">
                 <a:solidFill>
                   <a:schemeClr val="dk1"/>
                 </a:solidFill>
@@ -519,83 +753,15 @@
                 <a:uFillTx/>
                 <a:latin typeface="Calibri"/>
               </a:rPr>
-              <a:t>Third level</a:t>
+              <a:t>Click to edit Master text styles</a:t>
             </a:r>
             <a:endParaRPr lang="en-US" sz="2400" b="0" u="none" strike="noStrike">
               <a:solidFill>
-                <a:schemeClr val="dk1"/>
-              </a:solidFill>
-              <a:effectLst/>
-              <a:uFillTx/>
-              <a:latin typeface="Calibri"/>
-            </a:endParaRPr>
-          </a:p>
-          <a:p>
-            <a:pPr marL="1600200" lvl="3" indent="-228600" defTabSz="457200">
-              <a:lnSpc>
-                <a:spcPct val="100000"/>
-              </a:lnSpc>
-              <a:spcBef>
-                <a:spcPts val="400"/>
-              </a:spcBef>
-              <a:buClr>
-                <a:srgbClr val="000000"/>
-              </a:buClr>
-              <a:buFont typeface="Arial"/>
-              <a:buChar char="–"/>
-            </a:pPr>
-            <a:r>
-              <a:rPr lang="en-US" sz="2000" b="0" u="none" strike="noStrike">
-                <a:solidFill>
-                  <a:schemeClr val="dk1"/>
-                </a:solidFill>
-                <a:effectLst/>
-                <a:uFillTx/>
-                <a:latin typeface="Calibri"/>
-              </a:rPr>
-              <a:t>Fourth level</a:t>
-            </a:r>
-            <a:endParaRPr lang="en-US" sz="2000" b="0" u="none" strike="noStrike">
-              <a:solidFill>
-                <a:schemeClr val="dk1"/>
-              </a:solidFill>
-              <a:effectLst/>
-              <a:uFillTx/>
-              <a:latin typeface="Calibri"/>
-            </a:endParaRPr>
-          </a:p>
-          <a:p>
-            <a:pPr marL="2057400" lvl="4" indent="-228600" defTabSz="457200">
-              <a:lnSpc>
-                <a:spcPct val="100000"/>
-              </a:lnSpc>
-              <a:spcBef>
-                <a:spcPts val="400"/>
-              </a:spcBef>
-              <a:buClr>
-                <a:srgbClr val="000000"/>
-              </a:buClr>
-              <a:buFont typeface="Arial"/>
-              <a:buChar char="»"/>
-            </a:pPr>
-            <a:r>
-              <a:rPr lang="en-US" sz="2000" b="0" u="none" strike="noStrike">
-                <a:solidFill>
-                  <a:schemeClr val="dk1"/>
-                </a:solidFill>
-                <a:effectLst/>
-                <a:uFillTx/>
-                <a:latin typeface="Calibri"/>
-              </a:rPr>
-              <a:t>Fifth level</a:t>
-            </a:r>
-            <a:endParaRPr lang="en-US" sz="2000" b="0" u="none" strike="noStrike">
-              <a:solidFill>
-                <a:schemeClr val="dk1"/>
-              </a:solidFill>
-              <a:effectLst/>
-              <a:uFillTx/>
-              <a:latin typeface="Calibri"/>
+                <a:srgbClr val="000000"/>
+              </a:solidFill>
+              <a:effectLst/>
+              <a:uFillTx/>
+              <a:latin typeface="Arial"/>
             </a:endParaRPr>
           </a:p>
         </p:txBody>
@@ -612,8 +778,8 @@
         </p:nvSpPr>
         <p:spPr>
           <a:xfrm>
-            <a:off x="457200" y="1434960"/>
-            <a:ext cx="3007800" cy="4690800"/>
+            <a:off x="457200" y="2174760"/>
+            <a:ext cx="4039560" cy="3950640"/>
           </a:xfrm>
           <a:prstGeom prst="rect">
             <a:avLst/>
@@ -628,20 +794,21 @@
             <a:noAutofit/>
           </a:bodyPr>
           <a:p>
-            <a:pPr indent="0" defTabSz="457200">
+            <a:pPr marL="343080" indent="-343080" defTabSz="457200">
               <a:lnSpc>
                 <a:spcPct val="100000"/>
               </a:lnSpc>
               <a:spcBef>
-                <a:spcPts val="281"/>
+                <a:spcPts val="479"/>
               </a:spcBef>
-              <a:buNone/>
-              <a:tabLst>
-                <a:tab algn="l" pos="0"/>
-              </a:tabLst>
-            </a:pPr>
-            <a:r>
-              <a:rPr lang="en-US" sz="1400" b="0" u="none" strike="noStrike">
+              <a:buClr>
+                <a:srgbClr val="000000"/>
+              </a:buClr>
+              <a:buFont typeface="Arial"/>
+              <a:buChar char="•"/>
+            </a:pPr>
+            <a:r>
+              <a:rPr lang="en-US" sz="2400" b="0" u="none" strike="noStrike">
                 <a:solidFill>
                   <a:schemeClr val="dk1"/>
                 </a:solidFill>
@@ -651,13 +818,149 @@
               </a:rPr>
               <a:t>Click to edit Master text styles</a:t>
             </a:r>
-            <a:endParaRPr lang="en-US" sz="1400" b="0" u="none" strike="noStrike">
-              <a:solidFill>
-                <a:schemeClr val="dk1"/>
-              </a:solidFill>
-              <a:effectLst/>
-              <a:uFillTx/>
-              <a:latin typeface="Calibri"/>
+            <a:endParaRPr lang="en-US" sz="2400" b="0" u="none" strike="noStrike">
+              <a:solidFill>
+                <a:srgbClr val="000000"/>
+              </a:solidFill>
+              <a:effectLst/>
+              <a:uFillTx/>
+              <a:latin typeface="Arial"/>
+            </a:endParaRPr>
+          </a:p>
+          <a:p>
+            <a:pPr marL="743040" lvl="1" indent="-285840" defTabSz="457200">
+              <a:lnSpc>
+                <a:spcPct val="100000"/>
+              </a:lnSpc>
+              <a:spcBef>
+                <a:spcPts val="400"/>
+              </a:spcBef>
+              <a:buClr>
+                <a:srgbClr val="000000"/>
+              </a:buClr>
+              <a:buFont typeface="Arial"/>
+              <a:buChar char="–"/>
+            </a:pPr>
+            <a:r>
+              <a:rPr lang="en-US" sz="2000" b="0" u="none" strike="noStrike">
+                <a:solidFill>
+                  <a:schemeClr val="dk1"/>
+                </a:solidFill>
+                <a:effectLst/>
+                <a:uFillTx/>
+                <a:latin typeface="Calibri"/>
+              </a:rPr>
+              <a:t>Second level</a:t>
+            </a:r>
+            <a:endParaRPr lang="en-US" sz="2000" b="0" u="none" strike="noStrike">
+              <a:solidFill>
+                <a:srgbClr val="000000"/>
+              </a:solidFill>
+              <a:effectLst/>
+              <a:uFillTx/>
+              <a:latin typeface="Arial"/>
+            </a:endParaRPr>
+          </a:p>
+          <a:p>
+            <a:pPr marL="1143000" lvl="2" indent="-228600" defTabSz="457200">
+              <a:lnSpc>
+                <a:spcPct val="100000"/>
+              </a:lnSpc>
+              <a:spcBef>
+                <a:spcPts val="360"/>
+              </a:spcBef>
+              <a:buClr>
+                <a:srgbClr val="000000"/>
+              </a:buClr>
+              <a:buFont typeface="Arial"/>
+              <a:buChar char="•"/>
+            </a:pPr>
+            <a:r>
+              <a:rPr lang="en-US" sz="1800" b="0" u="none" strike="noStrike">
+                <a:solidFill>
+                  <a:schemeClr val="dk1"/>
+                </a:solidFill>
+                <a:effectLst/>
+                <a:uFillTx/>
+                <a:latin typeface="Calibri"/>
+              </a:rPr>
+              <a:t>Third level</a:t>
+            </a:r>
+            <a:endParaRPr lang="en-US" sz="1800" b="0" u="none" strike="noStrike">
+              <a:solidFill>
+                <a:srgbClr val="000000"/>
+              </a:solidFill>
+              <a:effectLst/>
+              <a:uFillTx/>
+              <a:latin typeface="Arial"/>
+            </a:endParaRPr>
+          </a:p>
+          <a:p>
+            <a:pPr marL="1600200" lvl="3" indent="-228600" defTabSz="457200">
+              <a:lnSpc>
+                <a:spcPct val="100000"/>
+              </a:lnSpc>
+              <a:spcBef>
+                <a:spcPts val="320"/>
+              </a:spcBef>
+              <a:buClr>
+                <a:srgbClr val="000000"/>
+              </a:buClr>
+              <a:buFont typeface="Arial"/>
+              <a:buChar char="–"/>
+            </a:pPr>
+            <a:r>
+              <a:rPr lang="en-US" sz="1600" b="0" u="none" strike="noStrike">
+                <a:solidFill>
+                  <a:schemeClr val="dk1"/>
+                </a:solidFill>
+                <a:effectLst/>
+                <a:uFillTx/>
+                <a:latin typeface="Calibri"/>
+              </a:rPr>
+              <a:t>Fourth level</a:t>
+            </a:r>
+            <a:endParaRPr lang="en-US" sz="1600" b="0" u="none" strike="noStrike">
+              <a:solidFill>
+                <a:srgbClr val="000000"/>
+              </a:solidFill>
+              <a:effectLst/>
+              <a:uFillTx/>
+              <a:latin typeface="Arial"/>
+            </a:endParaRPr>
+          </a:p>
+          <a:p>
+            <a:pPr marL="2057400" lvl="4" indent="-228600" defTabSz="457200">
+              <a:lnSpc>
+                <a:spcPct val="100000"/>
+              </a:lnSpc>
+              <a:spcBef>
+                <a:spcPts val="320"/>
+              </a:spcBef>
+              <a:buClr>
+                <a:srgbClr val="000000"/>
+              </a:buClr>
+              <a:buFont typeface="Arial"/>
+              <a:buChar char="»"/>
+            </a:pPr>
+            <a:r>
+              <a:rPr lang="en-US" sz="1600" b="0" u="none" strike="noStrike">
+                <a:solidFill>
+                  <a:schemeClr val="dk1"/>
+                </a:solidFill>
+                <a:effectLst/>
+                <a:uFillTx/>
+                <a:latin typeface="Calibri"/>
+              </a:rPr>
+              <a:t>Fifth level</a:t>
+            </a:r>
+            <a:endParaRPr lang="en-US" sz="1600" b="0" u="none" strike="noStrike">
+              <a:solidFill>
+                <a:srgbClr val="000000"/>
+              </a:solidFill>
+              <a:effectLst/>
+              <a:uFillTx/>
+              <a:latin typeface="Arial"/>
             </a:endParaRPr>
           </a:p>
         </p:txBody>
@@ -665,6 +968,267 @@
       <p:sp>
         <p:nvSpPr>
           <p:cNvPr id="52" name="PlaceHolder 4"/>
+          <p:cNvSpPr>
+            <a:spLocks noGrp="1"/>
+          </p:cNvSpPr>
+          <p:nvPr>
+            <p:ph type="body"/>
+          </p:nvPr>
+        </p:nvSpPr>
+        <p:spPr>
+          <a:xfrm>
+            <a:off x="4645080" y="1535040"/>
+            <a:ext cx="4041000" cy="639000"/>
+          </a:xfrm>
+          <a:prstGeom prst="rect">
+            <a:avLst/>
+          </a:prstGeom>
+          <a:noFill/>
+          <a:ln w="0">
+            <a:noFill/>
+          </a:ln>
+        </p:spPr>
+        <p:txBody>
+          <a:bodyPr lIns="91440" rIns="91440" tIns="45720" bIns="45720" anchor="b">
+            <a:noAutofit/>
+          </a:bodyPr>
+          <a:p>
+            <a:pPr indent="0" defTabSz="457200">
+              <a:lnSpc>
+                <a:spcPct val="100000"/>
+              </a:lnSpc>
+              <a:spcBef>
+                <a:spcPts val="479"/>
+              </a:spcBef>
+              <a:buNone/>
+              <a:tabLst>
+                <a:tab algn="l" pos="0"/>
+              </a:tabLst>
+            </a:pPr>
+            <a:r>
+              <a:rPr lang="en-US" sz="2400" b="1" u="none" strike="noStrike">
+                <a:solidFill>
+                  <a:schemeClr val="dk1"/>
+                </a:solidFill>
+                <a:effectLst/>
+                <a:uFillTx/>
+                <a:latin typeface="Calibri"/>
+              </a:rPr>
+              <a:t>Click to edit Master text styles</a:t>
+            </a:r>
+            <a:endParaRPr lang="en-US" sz="2400" b="0" u="none" strike="noStrike">
+              <a:solidFill>
+                <a:srgbClr val="000000"/>
+              </a:solidFill>
+              <a:effectLst/>
+              <a:uFillTx/>
+              <a:latin typeface="Arial"/>
+            </a:endParaRPr>
+          </a:p>
+        </p:txBody>
+      </p:sp>
+      <p:sp>
+        <p:nvSpPr>
+          <p:cNvPr id="53" name="PlaceHolder 5"/>
+          <p:cNvSpPr>
+            <a:spLocks noGrp="1"/>
+          </p:cNvSpPr>
+          <p:nvPr>
+            <p:ph type="body"/>
+          </p:nvPr>
+        </p:nvSpPr>
+        <p:spPr>
+          <a:xfrm>
+            <a:off x="4645080" y="2174760"/>
+            <a:ext cx="4041000" cy="3950640"/>
+          </a:xfrm>
+          <a:prstGeom prst="rect">
+            <a:avLst/>
+          </a:prstGeom>
+          <a:noFill/>
+          <a:ln w="0">
+            <a:noFill/>
+          </a:ln>
+        </p:spPr>
+        <p:txBody>
+          <a:bodyPr lIns="91440" rIns="91440" tIns="45720" bIns="45720" anchor="t">
+            <a:noAutofit/>
+          </a:bodyPr>
+          <a:p>
+            <a:pPr marL="343080" indent="-343080" defTabSz="457200">
+              <a:lnSpc>
+                <a:spcPct val="100000"/>
+              </a:lnSpc>
+              <a:spcBef>
+                <a:spcPts val="479"/>
+              </a:spcBef>
+              <a:buClr>
+                <a:srgbClr val="000000"/>
+              </a:buClr>
+              <a:buFont typeface="Arial"/>
+              <a:buChar char="•"/>
+            </a:pPr>
+            <a:r>
+              <a:rPr lang="en-US" sz="2400" b="0" u="none" strike="noStrike">
+                <a:solidFill>
+                  <a:schemeClr val="dk1"/>
+                </a:solidFill>
+                <a:effectLst/>
+                <a:uFillTx/>
+                <a:latin typeface="Calibri"/>
+              </a:rPr>
+              <a:t>Click to edit Master text styles</a:t>
+            </a:r>
+            <a:endParaRPr lang="en-US" sz="2400" b="0" u="none" strike="noStrike">
+              <a:solidFill>
+                <a:srgbClr val="000000"/>
+              </a:solidFill>
+              <a:effectLst/>
+              <a:uFillTx/>
+              <a:latin typeface="Arial"/>
+            </a:endParaRPr>
+          </a:p>
+          <a:p>
+            <a:pPr marL="743040" lvl="1" indent="-285840" defTabSz="457200">
+              <a:lnSpc>
+                <a:spcPct val="100000"/>
+              </a:lnSpc>
+              <a:spcBef>
+                <a:spcPts val="400"/>
+              </a:spcBef>
+              <a:buClr>
+                <a:srgbClr val="000000"/>
+              </a:buClr>
+              <a:buFont typeface="Arial"/>
+              <a:buChar char="–"/>
+            </a:pPr>
+            <a:r>
+              <a:rPr lang="en-US" sz="2000" b="0" u="none" strike="noStrike">
+                <a:solidFill>
+                  <a:schemeClr val="dk1"/>
+                </a:solidFill>
+                <a:effectLst/>
+                <a:uFillTx/>
+                <a:latin typeface="Calibri"/>
+              </a:rPr>
+              <a:t>Second level</a:t>
+            </a:r>
+            <a:endParaRPr lang="en-US" sz="2000" b="0" u="none" strike="noStrike">
+              <a:solidFill>
+                <a:srgbClr val="000000"/>
+              </a:solidFill>
+              <a:effectLst/>
+              <a:uFillTx/>
+              <a:latin typeface="Arial"/>
+            </a:endParaRPr>
+          </a:p>
+          <a:p>
+            <a:pPr marL="1143000" lvl="2" indent="-228600" defTabSz="457200">
+              <a:lnSpc>
+                <a:spcPct val="100000"/>
+              </a:lnSpc>
+              <a:spcBef>
+                <a:spcPts val="360"/>
+              </a:spcBef>
+              <a:buClr>
+                <a:srgbClr val="000000"/>
+              </a:buClr>
+              <a:buFont typeface="Arial"/>
+              <a:buChar char="•"/>
+            </a:pPr>
+            <a:r>
+              <a:rPr lang="en-US" sz="1800" b="0" u="none" strike="noStrike">
+                <a:solidFill>
+                  <a:schemeClr val="dk1"/>
+                </a:solidFill>
+                <a:effectLst/>
+                <a:uFillTx/>
+                <a:latin typeface="Calibri"/>
+              </a:rPr>
+              <a:t>Third level</a:t>
+            </a:r>
+            <a:endParaRPr lang="en-US" sz="1800" b="0" u="none" strike="noStrike">
+              <a:solidFill>
+                <a:srgbClr val="000000"/>
+              </a:solidFill>
+              <a:effectLst/>
+              <a:uFillTx/>
+              <a:latin typeface="Arial"/>
+            </a:endParaRPr>
+          </a:p>
+          <a:p>
+            <a:pPr marL="1600200" lvl="3" indent="-228600" defTabSz="457200">
+              <a:lnSpc>
+                <a:spcPct val="100000"/>
+              </a:lnSpc>
+              <a:spcBef>
+                <a:spcPts val="320"/>
+              </a:spcBef>
+              <a:buClr>
+                <a:srgbClr val="000000"/>
+              </a:buClr>
+              <a:buFont typeface="Arial"/>
+              <a:buChar char="–"/>
+            </a:pPr>
+            <a:r>
+              <a:rPr lang="en-US" sz="1600" b="0" u="none" strike="noStrike">
+                <a:solidFill>
+                  <a:schemeClr val="dk1"/>
+                </a:solidFill>
+                <a:effectLst/>
+                <a:uFillTx/>
+                <a:latin typeface="Calibri"/>
+              </a:rPr>
+              <a:t>Fourth level</a:t>
+            </a:r>
+            <a:endParaRPr lang="en-US" sz="1600" b="0" u="none" strike="noStrike">
+              <a:solidFill>
+                <a:srgbClr val="000000"/>
+              </a:solidFill>
+              <a:effectLst/>
+              <a:uFillTx/>
+              <a:latin typeface="Arial"/>
+            </a:endParaRPr>
+          </a:p>
+          <a:p>
+            <a:pPr marL="2057400" lvl="4" indent="-228600" defTabSz="457200">
+              <a:lnSpc>
+                <a:spcPct val="100000"/>
+              </a:lnSpc>
+              <a:spcBef>
+                <a:spcPts val="320"/>
+              </a:spcBef>
+              <a:buClr>
+                <a:srgbClr val="000000"/>
+              </a:buClr>
+              <a:buFont typeface="Arial"/>
+              <a:buChar char="»"/>
+            </a:pPr>
+            <a:r>
+              <a:rPr lang="en-US" sz="1600" b="0" u="none" strike="noStrike">
+                <a:solidFill>
+                  <a:schemeClr val="dk1"/>
+                </a:solidFill>
+                <a:effectLst/>
+                <a:uFillTx/>
+                <a:latin typeface="Calibri"/>
+              </a:rPr>
+              <a:t>Fifth level</a:t>
+            </a:r>
+            <a:endParaRPr lang="en-US" sz="1600" b="0" u="none" strike="noStrike">
+              <a:solidFill>
+                <a:srgbClr val="000000"/>
+              </a:solidFill>
+              <a:effectLst/>
+              <a:uFillTx/>
+              <a:latin typeface="Arial"/>
+            </a:endParaRPr>
+          </a:p>
+        </p:txBody>
+      </p:sp>
+      <p:sp>
+        <p:nvSpPr>
+          <p:cNvPr id="54" name="PlaceHolder 6"/>
           <p:cNvSpPr>
             <a:spLocks noGrp="1"/>
           </p:cNvSpPr>
@@ -675,7 +1239,7 @@
         <p:spPr>
           <a:xfrm>
             <a:off x="457200" y="6356520"/>
-            <a:ext cx="2133360" cy="364680"/>
+            <a:ext cx="2133000" cy="364320"/>
           </a:xfrm>
           <a:prstGeom prst="rect">
             <a:avLst/>
@@ -695,6 +1259,9 @@
                 <a:spcPct val="100000"/>
               </a:lnSpc>
               <a:buNone/>
+              <a:tabLst>
+                <a:tab algn="l" pos="0"/>
+              </a:tabLst>
               <a:defRPr lang="en-US" sz="1200" b="0" u="none" strike="noStrike">
                 <a:solidFill>
                   <a:schemeClr val="dk1">
@@ -713,6 +1280,9 @@
                 <a:spcPct val="100000"/>
               </a:lnSpc>
               <a:buNone/>
+              <a:tabLst>
+                <a:tab algn="l" pos="0"/>
+              </a:tabLst>
             </a:pPr>
             <a:r>
               <a:rPr lang="en-US" sz="1200" b="0" u="none" strike="noStrike">
@@ -740,7 +1310,7 @@
       </p:sp>
       <p:sp>
         <p:nvSpPr>
-          <p:cNvPr id="53" name="PlaceHolder 5"/>
+          <p:cNvPr id="55" name="PlaceHolder 7"/>
           <p:cNvSpPr>
             <a:spLocks noGrp="1"/>
           </p:cNvSpPr>
@@ -751,7 +1321,7 @@
         <p:spPr>
           <a:xfrm>
             <a:off x="3124080" y="6356520"/>
-            <a:ext cx="2895120" cy="364680"/>
+            <a:ext cx="2894760" cy="364320"/>
           </a:xfrm>
           <a:prstGeom prst="rect">
             <a:avLst/>
@@ -767,7 +1337,13 @@
           </a:bodyPr>
           <a:lstStyle>
             <a:lvl1pPr indent="0" algn="ctr">
-              <a:buNone/>
+              <a:lnSpc>
+                <a:spcPct val="100000"/>
+              </a:lnSpc>
+              <a:buNone/>
+              <a:tabLst>
+                <a:tab algn="l" pos="0"/>
+              </a:tabLst>
               <a:defRPr lang="en-US" sz="1400" b="0" u="none" strike="noStrike">
                 <a:solidFill>
                   <a:srgbClr val="000000"/>
@@ -780,7 +1356,13 @@
           </a:lstStyle>
           <a:p>
             <a:pPr indent="0" algn="ctr">
-              <a:buNone/>
+              <a:lnSpc>
+                <a:spcPct val="100000"/>
+              </a:lnSpc>
+              <a:buNone/>
+              <a:tabLst>
+                <a:tab algn="l" pos="0"/>
+              </a:tabLst>
             </a:pPr>
             <a:r>
               <a:rPr lang="en-US" sz="1400" b="0" u="none" strike="noStrike">
@@ -806,7 +1388,7 @@
       </p:sp>
       <p:sp>
         <p:nvSpPr>
-          <p:cNvPr id="54" name="PlaceHolder 6"/>
+          <p:cNvPr id="56" name="PlaceHolder 8"/>
           <p:cNvSpPr>
             <a:spLocks noGrp="1"/>
           </p:cNvSpPr>
@@ -817,7 +1399,7 @@
         <p:spPr>
           <a:xfrm>
             <a:off x="6553080" y="6356520"/>
-            <a:ext cx="2133360" cy="364680"/>
+            <a:ext cx="2133000" cy="364320"/>
           </a:xfrm>
           <a:prstGeom prst="rect">
             <a:avLst/>
@@ -837,6 +1419,9 @@
                 <a:spcPct val="100000"/>
               </a:lnSpc>
               <a:buNone/>
+              <a:tabLst>
+                <a:tab algn="l" pos="0"/>
+              </a:tabLst>
               <a:defRPr lang="en-US" sz="1200" b="0" u="none" strike="noStrike">
                 <a:solidFill>
                   <a:schemeClr val="dk1">
@@ -855,8 +1440,11 @@
                 <a:spcPct val="100000"/>
               </a:lnSpc>
               <a:buNone/>
-            </a:pPr>
-            <a:fld id="{309B1CBE-BBCA-4133-8FC2-4FEA771BFC9D}" type="slidenum">
+              <a:tabLst>
+                <a:tab algn="l" pos="0"/>
+              </a:tabLst>
+            </a:pPr>
+            <a:fld id="{5E64F2F1-0673-4C84-A126-1DB8CD4194E5}" type="slidenum">
               <a:rPr lang="en-US" sz="1200" b="0" u="none" strike="noStrike">
                 <a:solidFill>
                   <a:schemeClr val="dk1">
@@ -886,6 +1474,927 @@
 </file>
 
 <file path=ppt/slideLayouts/slideLayout11.xml><?xml version="1.0" encoding="utf-8"?>
+<p:sldLayout xmlns:a="http://schemas.openxmlformats.org/drawingml/2006/main" xmlns:p="http://schemas.openxmlformats.org/presentationml/2006/main" xmlns:r="http://schemas.openxmlformats.org/officeDocument/2006/relationships" xmlns:p14="http://schemas.microsoft.com/office/powerpoint/2010/main" xmlns:p15="http://schemas.microsoft.com/office/powerpoint/2012/main" xmlns:mc="http://schemas.openxmlformats.org/markup-compatibility/2006" type="titleOnly" preserve="1">
+  <p:cSld name="Title Only">
+    <p:bg>
+      <p:bgPr>
+        <a:solidFill>
+          <a:srgbClr val="ffffff"/>
+        </a:solidFill>
+      </p:bgPr>
+    </p:bg>
+    <p:spTree>
+      <p:nvGrpSpPr>
+        <p:cNvPr id="1" name=""/>
+        <p:cNvGrpSpPr/>
+        <p:nvPr/>
+      </p:nvGrpSpPr>
+      <p:grpSpPr>
+        <a:xfrm>
+          <a:off x="0" y="0"/>
+          <a:ext cx="0" cy="0"/>
+          <a:chOff x="0" y="0"/>
+          <a:chExt cx="0" cy="0"/>
+        </a:xfrm>
+      </p:grpSpPr>
+      <p:sp>
+        <p:nvSpPr>
+          <p:cNvPr id="57" name="PlaceHolder 1"/>
+          <p:cNvSpPr>
+            <a:spLocks noGrp="1"/>
+          </p:cNvSpPr>
+          <p:nvPr>
+            <p:ph type="title"/>
+          </p:nvPr>
+        </p:nvSpPr>
+        <p:spPr>
+          <a:xfrm>
+            <a:off x="457200" y="274680"/>
+            <a:ext cx="8228880" cy="1142280"/>
+          </a:xfrm>
+          <a:prstGeom prst="rect">
+            <a:avLst/>
+          </a:prstGeom>
+          <a:noFill/>
+          <a:ln w="0">
+            <a:noFill/>
+          </a:ln>
+        </p:spPr>
+        <p:txBody>
+          <a:bodyPr lIns="91440" rIns="91440" tIns="45720" bIns="45720" anchor="ctr">
+            <a:noAutofit/>
+          </a:bodyPr>
+          <a:p>
+            <a:pPr indent="0" algn="ctr" defTabSz="457200">
+              <a:lnSpc>
+                <a:spcPct val="100000"/>
+              </a:lnSpc>
+              <a:buNone/>
+              <a:tabLst>
+                <a:tab algn="l" pos="0"/>
+              </a:tabLst>
+            </a:pPr>
+            <a:r>
+              <a:rPr lang="en-US" sz="4400" b="0" u="none" strike="noStrike">
+                <a:solidFill>
+                  <a:schemeClr val="dk1"/>
+                </a:solidFill>
+                <a:effectLst/>
+                <a:uFillTx/>
+                <a:latin typeface="Calibri"/>
+              </a:rPr>
+              <a:t>Click to edit Master title style</a:t>
+            </a:r>
+            <a:endParaRPr lang="en-US" sz="4400" b="0" u="none" strike="noStrike">
+              <a:solidFill>
+                <a:srgbClr val="000000"/>
+              </a:solidFill>
+              <a:effectLst/>
+              <a:uFillTx/>
+              <a:latin typeface="Arial"/>
+            </a:endParaRPr>
+          </a:p>
+        </p:txBody>
+      </p:sp>
+      <p:sp>
+        <p:nvSpPr>
+          <p:cNvPr id="58" name="PlaceHolder 2"/>
+          <p:cNvSpPr>
+            <a:spLocks noGrp="1"/>
+          </p:cNvSpPr>
+          <p:nvPr>
+            <p:ph type="dt" idx="31"/>
+          </p:nvPr>
+        </p:nvSpPr>
+        <p:spPr>
+          <a:xfrm>
+            <a:off x="457200" y="6356520"/>
+            <a:ext cx="2133000" cy="364320"/>
+          </a:xfrm>
+          <a:prstGeom prst="rect">
+            <a:avLst/>
+          </a:prstGeom>
+          <a:noFill/>
+          <a:ln w="0">
+            <a:noFill/>
+          </a:ln>
+        </p:spPr>
+        <p:txBody>
+          <a:bodyPr lIns="91440" rIns="91440" tIns="45720" bIns="45720" anchor="ctr">
+            <a:noAutofit/>
+          </a:bodyPr>
+          <a:lstStyle>
+            <a:lvl1pPr indent="0" defTabSz="457200">
+              <a:lnSpc>
+                <a:spcPct val="100000"/>
+              </a:lnSpc>
+              <a:buNone/>
+              <a:tabLst>
+                <a:tab algn="l" pos="0"/>
+              </a:tabLst>
+              <a:defRPr lang="en-US" sz="1200" b="0" u="none" strike="noStrike">
+                <a:solidFill>
+                  <a:schemeClr val="dk1">
+                    <a:tint val="75000"/>
+                  </a:schemeClr>
+                </a:solidFill>
+                <a:effectLst/>
+                <a:uFillTx/>
+                <a:latin typeface="Calibri"/>
+              </a:defRPr>
+            </a:lvl1pPr>
+          </a:lstStyle>
+          <a:p>
+            <a:pPr indent="0" defTabSz="457200">
+              <a:lnSpc>
+                <a:spcPct val="100000"/>
+              </a:lnSpc>
+              <a:buNone/>
+              <a:tabLst>
+                <a:tab algn="l" pos="0"/>
+              </a:tabLst>
+            </a:pPr>
+            <a:r>
+              <a:rPr lang="en-US" sz="1200" b="0" u="none" strike="noStrike">
+                <a:solidFill>
+                  <a:schemeClr val="dk1">
+                    <a:tint val="75000"/>
+                  </a:schemeClr>
+                </a:solidFill>
+                <a:effectLst/>
+                <a:uFillTx/>
+                <a:latin typeface="Calibri"/>
+              </a:rPr>
+              <a:t>&lt;date/time&gt;</a:t>
+            </a:r>
+            <a:endParaRPr lang="en-US" sz="1200" b="0" u="none" strike="noStrike">
+              <a:solidFill>
+                <a:srgbClr val="000000"/>
+              </a:solidFill>
+              <a:effectLst/>
+              <a:uFillTx/>
+              <a:latin typeface="Times New Roman"/>
+            </a:endParaRPr>
+          </a:p>
+        </p:txBody>
+      </p:sp>
+      <p:sp>
+        <p:nvSpPr>
+          <p:cNvPr id="59" name="PlaceHolder 3"/>
+          <p:cNvSpPr>
+            <a:spLocks noGrp="1"/>
+          </p:cNvSpPr>
+          <p:nvPr>
+            <p:ph type="ftr" idx="32"/>
+          </p:nvPr>
+        </p:nvSpPr>
+        <p:spPr>
+          <a:xfrm>
+            <a:off x="3124080" y="6356520"/>
+            <a:ext cx="2894760" cy="364320"/>
+          </a:xfrm>
+          <a:prstGeom prst="rect">
+            <a:avLst/>
+          </a:prstGeom>
+          <a:noFill/>
+          <a:ln w="0">
+            <a:noFill/>
+          </a:ln>
+        </p:spPr>
+        <p:txBody>
+          <a:bodyPr lIns="91440" rIns="91440" tIns="45720" bIns="45720" anchor="ctr">
+            <a:noAutofit/>
+          </a:bodyPr>
+          <a:lstStyle>
+            <a:lvl1pPr indent="0" algn="ctr">
+              <a:lnSpc>
+                <a:spcPct val="100000"/>
+              </a:lnSpc>
+              <a:buNone/>
+              <a:tabLst>
+                <a:tab algn="l" pos="0"/>
+              </a:tabLst>
+              <a:defRPr lang="en-US" sz="1400" b="0" u="none" strike="noStrike">
+                <a:solidFill>
+                  <a:srgbClr val="000000"/>
+                </a:solidFill>
+                <a:effectLst/>
+                <a:uFillTx/>
+                <a:latin typeface="Times New Roman"/>
+              </a:defRPr>
+            </a:lvl1pPr>
+          </a:lstStyle>
+          <a:p>
+            <a:pPr indent="0" algn="ctr">
+              <a:lnSpc>
+                <a:spcPct val="100000"/>
+              </a:lnSpc>
+              <a:buNone/>
+              <a:tabLst>
+                <a:tab algn="l" pos="0"/>
+              </a:tabLst>
+            </a:pPr>
+            <a:r>
+              <a:rPr lang="en-US" sz="1400" b="0" u="none" strike="noStrike">
+                <a:solidFill>
+                  <a:srgbClr val="000000"/>
+                </a:solidFill>
+                <a:effectLst/>
+                <a:uFillTx/>
+                <a:latin typeface="Times New Roman"/>
+              </a:rPr>
+              <a:t>&lt;footer&gt;</a:t>
+            </a:r>
+            <a:endParaRPr lang="en-US" sz="1400" b="0" u="none" strike="noStrike">
+              <a:solidFill>
+                <a:srgbClr val="000000"/>
+              </a:solidFill>
+              <a:effectLst/>
+              <a:uFillTx/>
+              <a:latin typeface="Times New Roman"/>
+            </a:endParaRPr>
+          </a:p>
+        </p:txBody>
+      </p:sp>
+      <p:sp>
+        <p:nvSpPr>
+          <p:cNvPr id="60" name="PlaceHolder 4"/>
+          <p:cNvSpPr>
+            <a:spLocks noGrp="1"/>
+          </p:cNvSpPr>
+          <p:nvPr>
+            <p:ph type="sldNum" idx="33"/>
+          </p:nvPr>
+        </p:nvSpPr>
+        <p:spPr>
+          <a:xfrm>
+            <a:off x="6553080" y="6356520"/>
+            <a:ext cx="2133000" cy="364320"/>
+          </a:xfrm>
+          <a:prstGeom prst="rect">
+            <a:avLst/>
+          </a:prstGeom>
+          <a:noFill/>
+          <a:ln w="0">
+            <a:noFill/>
+          </a:ln>
+        </p:spPr>
+        <p:txBody>
+          <a:bodyPr lIns="91440" rIns="91440" tIns="45720" bIns="45720" anchor="ctr">
+            <a:noAutofit/>
+          </a:bodyPr>
+          <a:lstStyle>
+            <a:lvl1pPr indent="0" algn="r" defTabSz="457200">
+              <a:lnSpc>
+                <a:spcPct val="100000"/>
+              </a:lnSpc>
+              <a:buNone/>
+              <a:tabLst>
+                <a:tab algn="l" pos="0"/>
+              </a:tabLst>
+              <a:defRPr lang="en-US" sz="1200" b="0" u="none" strike="noStrike">
+                <a:solidFill>
+                  <a:schemeClr val="dk1">
+                    <a:tint val="75000"/>
+                  </a:schemeClr>
+                </a:solidFill>
+                <a:effectLst/>
+                <a:uFillTx/>
+                <a:latin typeface="Calibri"/>
+              </a:defRPr>
+            </a:lvl1pPr>
+          </a:lstStyle>
+          <a:p>
+            <a:pPr indent="0" algn="r" defTabSz="457200">
+              <a:lnSpc>
+                <a:spcPct val="100000"/>
+              </a:lnSpc>
+              <a:buNone/>
+              <a:tabLst>
+                <a:tab algn="l" pos="0"/>
+              </a:tabLst>
+            </a:pPr>
+            <a:fld id="{E8CE9C0A-3583-4904-809C-3E5E16A8450D}" type="slidenum">
+              <a:rPr lang="en-US" sz="1200" b="0" u="none" strike="noStrike">
+                <a:solidFill>
+                  <a:schemeClr val="dk1">
+                    <a:tint val="75000"/>
+                  </a:schemeClr>
+                </a:solidFill>
+                <a:effectLst/>
+                <a:uFillTx/>
+                <a:latin typeface="Calibri"/>
+              </a:rPr>
+              <a:t>&lt;number&gt;</a:t>
+            </a:fld>
+            <a:endParaRPr lang="en-US" sz="1200" b="0" u="none" strike="noStrike">
+              <a:solidFill>
+                <a:srgbClr val="000000"/>
+              </a:solidFill>
+              <a:effectLst/>
+              <a:uFillTx/>
+              <a:latin typeface="Times New Roman"/>
+            </a:endParaRPr>
+          </a:p>
+        </p:txBody>
+      </p:sp>
+    </p:spTree>
+  </p:cSld>
+</p:sldLayout>
+</file>
+
+<file path=ppt/slideLayouts/slideLayout2.xml><?xml version="1.0" encoding="utf-8"?>
+<p:sldLayout xmlns:a="http://schemas.openxmlformats.org/drawingml/2006/main" xmlns:p="http://schemas.openxmlformats.org/presentationml/2006/main" xmlns:r="http://schemas.openxmlformats.org/officeDocument/2006/relationships" xmlns:p14="http://schemas.microsoft.com/office/powerpoint/2010/main" xmlns:p15="http://schemas.microsoft.com/office/powerpoint/2012/main" xmlns:mc="http://schemas.openxmlformats.org/markup-compatibility/2006" type="blank" preserve="1">
+  <p:cSld name="Content with Caption">
+    <p:bg>
+      <p:bgPr>
+        <a:solidFill>
+          <a:srgbClr val="ffffff"/>
+        </a:solidFill>
+      </p:bgPr>
+    </p:bg>
+    <p:spTree>
+      <p:nvGrpSpPr>
+        <p:cNvPr id="1" name=""/>
+        <p:cNvGrpSpPr/>
+        <p:nvPr/>
+      </p:nvGrpSpPr>
+      <p:grpSpPr>
+        <a:xfrm>
+          <a:off x="0" y="0"/>
+          <a:ext cx="0" cy="0"/>
+          <a:chOff x="0" y="0"/>
+          <a:chExt cx="0" cy="0"/>
+        </a:xfrm>
+      </p:grpSpPr>
+      <p:sp>
+        <p:nvSpPr>
+          <p:cNvPr id="7" name="PlaceHolder 1"/>
+          <p:cNvSpPr>
+            <a:spLocks noGrp="1"/>
+          </p:cNvSpPr>
+          <p:nvPr>
+            <p:ph type="title"/>
+          </p:nvPr>
+        </p:nvSpPr>
+        <p:spPr>
+          <a:xfrm>
+            <a:off x="457200" y="272880"/>
+            <a:ext cx="3007440" cy="1161360"/>
+          </a:xfrm>
+          <a:prstGeom prst="rect">
+            <a:avLst/>
+          </a:prstGeom>
+          <a:noFill/>
+          <a:ln w="0">
+            <a:noFill/>
+          </a:ln>
+        </p:spPr>
+        <p:txBody>
+          <a:bodyPr lIns="91440" rIns="91440" tIns="45720" bIns="45720" anchor="b">
+            <a:noAutofit/>
+          </a:bodyPr>
+          <a:p>
+            <a:pPr indent="0" defTabSz="457200">
+              <a:lnSpc>
+                <a:spcPct val="100000"/>
+              </a:lnSpc>
+              <a:buNone/>
+              <a:tabLst>
+                <a:tab algn="l" pos="0"/>
+              </a:tabLst>
+            </a:pPr>
+            <a:r>
+              <a:rPr lang="en-US" sz="2000" b="1" u="none" strike="noStrike">
+                <a:solidFill>
+                  <a:schemeClr val="dk1"/>
+                </a:solidFill>
+                <a:effectLst/>
+                <a:uFillTx/>
+                <a:latin typeface="Calibri"/>
+              </a:rPr>
+              <a:t>Click to edit Master title style</a:t>
+            </a:r>
+            <a:endParaRPr lang="en-US" sz="2000" b="0" u="none" strike="noStrike">
+              <a:solidFill>
+                <a:srgbClr val="000000"/>
+              </a:solidFill>
+              <a:effectLst/>
+              <a:uFillTx/>
+              <a:latin typeface="Arial"/>
+            </a:endParaRPr>
+          </a:p>
+        </p:txBody>
+      </p:sp>
+      <p:sp>
+        <p:nvSpPr>
+          <p:cNvPr id="8" name="PlaceHolder 2"/>
+          <p:cNvSpPr>
+            <a:spLocks noGrp="1"/>
+          </p:cNvSpPr>
+          <p:nvPr>
+            <p:ph type="body"/>
+          </p:nvPr>
+        </p:nvSpPr>
+        <p:spPr>
+          <a:xfrm>
+            <a:off x="3575160" y="272880"/>
+            <a:ext cx="5110920" cy="5852520"/>
+          </a:xfrm>
+          <a:prstGeom prst="rect">
+            <a:avLst/>
+          </a:prstGeom>
+          <a:noFill/>
+          <a:ln w="0">
+            <a:noFill/>
+          </a:ln>
+        </p:spPr>
+        <p:txBody>
+          <a:bodyPr lIns="91440" rIns="91440" tIns="45720" bIns="45720" anchor="t">
+            <a:noAutofit/>
+          </a:bodyPr>
+          <a:p>
+            <a:pPr marL="343080" indent="-343080" defTabSz="457200">
+              <a:lnSpc>
+                <a:spcPct val="100000"/>
+              </a:lnSpc>
+              <a:spcBef>
+                <a:spcPts val="641"/>
+              </a:spcBef>
+              <a:buClr>
+                <a:srgbClr val="000000"/>
+              </a:buClr>
+              <a:buFont typeface="Arial"/>
+              <a:buChar char="•"/>
+            </a:pPr>
+            <a:r>
+              <a:rPr lang="en-US" sz="3200" b="0" u="none" strike="noStrike">
+                <a:solidFill>
+                  <a:schemeClr val="dk1"/>
+                </a:solidFill>
+                <a:effectLst/>
+                <a:uFillTx/>
+                <a:latin typeface="Calibri"/>
+              </a:rPr>
+              <a:t>Click to edit Master text styles</a:t>
+            </a:r>
+            <a:endParaRPr lang="en-US" sz="3200" b="0" u="none" strike="noStrike">
+              <a:solidFill>
+                <a:srgbClr val="000000"/>
+              </a:solidFill>
+              <a:effectLst/>
+              <a:uFillTx/>
+              <a:latin typeface="Arial"/>
+            </a:endParaRPr>
+          </a:p>
+          <a:p>
+            <a:pPr marL="743040" lvl="1" indent="-285840" defTabSz="457200">
+              <a:lnSpc>
+                <a:spcPct val="100000"/>
+              </a:lnSpc>
+              <a:spcBef>
+                <a:spcPts val="561"/>
+              </a:spcBef>
+              <a:buClr>
+                <a:srgbClr val="000000"/>
+              </a:buClr>
+              <a:buFont typeface="Arial"/>
+              <a:buChar char="–"/>
+            </a:pPr>
+            <a:r>
+              <a:rPr lang="en-US" sz="2800" b="0" u="none" strike="noStrike">
+                <a:solidFill>
+                  <a:schemeClr val="dk1"/>
+                </a:solidFill>
+                <a:effectLst/>
+                <a:uFillTx/>
+                <a:latin typeface="Calibri"/>
+              </a:rPr>
+              <a:t>Second level</a:t>
+            </a:r>
+            <a:endParaRPr lang="en-US" sz="2800" b="0" u="none" strike="noStrike">
+              <a:solidFill>
+                <a:srgbClr val="000000"/>
+              </a:solidFill>
+              <a:effectLst/>
+              <a:uFillTx/>
+              <a:latin typeface="Arial"/>
+            </a:endParaRPr>
+          </a:p>
+          <a:p>
+            <a:pPr marL="1143000" lvl="2" indent="-228600" defTabSz="457200">
+              <a:lnSpc>
+                <a:spcPct val="100000"/>
+              </a:lnSpc>
+              <a:spcBef>
+                <a:spcPts val="479"/>
+              </a:spcBef>
+              <a:buClr>
+                <a:srgbClr val="000000"/>
+              </a:buClr>
+              <a:buFont typeface="Arial"/>
+              <a:buChar char="•"/>
+            </a:pPr>
+            <a:r>
+              <a:rPr lang="en-US" sz="2400" b="0" u="none" strike="noStrike">
+                <a:solidFill>
+                  <a:schemeClr val="dk1"/>
+                </a:solidFill>
+                <a:effectLst/>
+                <a:uFillTx/>
+                <a:latin typeface="Calibri"/>
+              </a:rPr>
+              <a:t>Third level</a:t>
+            </a:r>
+            <a:endParaRPr lang="en-US" sz="2400" b="0" u="none" strike="noStrike">
+              <a:solidFill>
+                <a:srgbClr val="000000"/>
+              </a:solidFill>
+              <a:effectLst/>
+              <a:uFillTx/>
+              <a:latin typeface="Arial"/>
+            </a:endParaRPr>
+          </a:p>
+          <a:p>
+            <a:pPr marL="1600200" lvl="3" indent="-228600" defTabSz="457200">
+              <a:lnSpc>
+                <a:spcPct val="100000"/>
+              </a:lnSpc>
+              <a:spcBef>
+                <a:spcPts val="400"/>
+              </a:spcBef>
+              <a:buClr>
+                <a:srgbClr val="000000"/>
+              </a:buClr>
+              <a:buFont typeface="Arial"/>
+              <a:buChar char="–"/>
+            </a:pPr>
+            <a:r>
+              <a:rPr lang="en-US" sz="2000" b="0" u="none" strike="noStrike">
+                <a:solidFill>
+                  <a:schemeClr val="dk1"/>
+                </a:solidFill>
+                <a:effectLst/>
+                <a:uFillTx/>
+                <a:latin typeface="Calibri"/>
+              </a:rPr>
+              <a:t>Fourth level</a:t>
+            </a:r>
+            <a:endParaRPr lang="en-US" sz="2000" b="0" u="none" strike="noStrike">
+              <a:solidFill>
+                <a:srgbClr val="000000"/>
+              </a:solidFill>
+              <a:effectLst/>
+              <a:uFillTx/>
+              <a:latin typeface="Arial"/>
+            </a:endParaRPr>
+          </a:p>
+          <a:p>
+            <a:pPr marL="2057400" lvl="4" indent="-228600" defTabSz="457200">
+              <a:lnSpc>
+                <a:spcPct val="100000"/>
+              </a:lnSpc>
+              <a:spcBef>
+                <a:spcPts val="400"/>
+              </a:spcBef>
+              <a:buClr>
+                <a:srgbClr val="000000"/>
+              </a:buClr>
+              <a:buFont typeface="Arial"/>
+              <a:buChar char="»"/>
+            </a:pPr>
+            <a:r>
+              <a:rPr lang="en-US" sz="2000" b="0" u="none" strike="noStrike">
+                <a:solidFill>
+                  <a:schemeClr val="dk1"/>
+                </a:solidFill>
+                <a:effectLst/>
+                <a:uFillTx/>
+                <a:latin typeface="Calibri"/>
+              </a:rPr>
+              <a:t>Fifth level</a:t>
+            </a:r>
+            <a:endParaRPr lang="en-US" sz="2000" b="0" u="none" strike="noStrike">
+              <a:solidFill>
+                <a:srgbClr val="000000"/>
+              </a:solidFill>
+              <a:effectLst/>
+              <a:uFillTx/>
+              <a:latin typeface="Arial"/>
+            </a:endParaRPr>
+          </a:p>
+        </p:txBody>
+      </p:sp>
+      <p:sp>
+        <p:nvSpPr>
+          <p:cNvPr id="9" name="PlaceHolder 3"/>
+          <p:cNvSpPr>
+            <a:spLocks noGrp="1"/>
+          </p:cNvSpPr>
+          <p:nvPr>
+            <p:ph type="body"/>
+          </p:nvPr>
+        </p:nvSpPr>
+        <p:spPr>
+          <a:xfrm>
+            <a:off x="457200" y="1434960"/>
+            <a:ext cx="3007440" cy="4690440"/>
+          </a:xfrm>
+          <a:prstGeom prst="rect">
+            <a:avLst/>
+          </a:prstGeom>
+          <a:noFill/>
+          <a:ln w="0">
+            <a:noFill/>
+          </a:ln>
+        </p:spPr>
+        <p:txBody>
+          <a:bodyPr lIns="91440" rIns="91440" tIns="45720" bIns="45720" anchor="t">
+            <a:noAutofit/>
+          </a:bodyPr>
+          <a:p>
+            <a:pPr indent="0" defTabSz="457200">
+              <a:lnSpc>
+                <a:spcPct val="100000"/>
+              </a:lnSpc>
+              <a:spcBef>
+                <a:spcPts val="281"/>
+              </a:spcBef>
+              <a:buNone/>
+              <a:tabLst>
+                <a:tab algn="l" pos="0"/>
+              </a:tabLst>
+            </a:pPr>
+            <a:r>
+              <a:rPr lang="en-US" sz="1400" b="0" u="none" strike="noStrike">
+                <a:solidFill>
+                  <a:schemeClr val="dk1"/>
+                </a:solidFill>
+                <a:effectLst/>
+                <a:uFillTx/>
+                <a:latin typeface="Calibri"/>
+              </a:rPr>
+              <a:t>Click to edit Master text styles</a:t>
+            </a:r>
+            <a:endParaRPr lang="en-US" sz="1400" b="0" u="none" strike="noStrike">
+              <a:solidFill>
+                <a:srgbClr val="000000"/>
+              </a:solidFill>
+              <a:effectLst/>
+              <a:uFillTx/>
+              <a:latin typeface="Arial"/>
+            </a:endParaRPr>
+          </a:p>
+        </p:txBody>
+      </p:sp>
+      <p:sp>
+        <p:nvSpPr>
+          <p:cNvPr id="10" name="PlaceHolder 4"/>
+          <p:cNvSpPr>
+            <a:spLocks noGrp="1"/>
+          </p:cNvSpPr>
+          <p:nvPr>
+            <p:ph type="dt" idx="4"/>
+          </p:nvPr>
+        </p:nvSpPr>
+        <p:spPr>
+          <a:xfrm>
+            <a:off x="457200" y="6356520"/>
+            <a:ext cx="2133000" cy="364320"/>
+          </a:xfrm>
+          <a:prstGeom prst="rect">
+            <a:avLst/>
+          </a:prstGeom>
+          <a:noFill/>
+          <a:ln w="0">
+            <a:noFill/>
+          </a:ln>
+        </p:spPr>
+        <p:txBody>
+          <a:bodyPr lIns="91440" rIns="91440" tIns="45720" bIns="45720" anchor="ctr">
+            <a:noAutofit/>
+          </a:bodyPr>
+          <a:lstStyle>
+            <a:lvl1pPr indent="0" defTabSz="457200">
+              <a:lnSpc>
+                <a:spcPct val="100000"/>
+              </a:lnSpc>
+              <a:buNone/>
+              <a:tabLst>
+                <a:tab algn="l" pos="0"/>
+              </a:tabLst>
+              <a:defRPr lang="en-US" sz="1200" b="0" u="none" strike="noStrike">
+                <a:solidFill>
+                  <a:schemeClr val="dk1">
+                    <a:tint val="75000"/>
+                  </a:schemeClr>
+                </a:solidFill>
+                <a:effectLst/>
+                <a:uFillTx/>
+                <a:latin typeface="Calibri"/>
+              </a:defRPr>
+            </a:lvl1pPr>
+          </a:lstStyle>
+          <a:p>
+            <a:pPr indent="0" defTabSz="457200">
+              <a:lnSpc>
+                <a:spcPct val="100000"/>
+              </a:lnSpc>
+              <a:buNone/>
+              <a:tabLst>
+                <a:tab algn="l" pos="0"/>
+              </a:tabLst>
+            </a:pPr>
+            <a:r>
+              <a:rPr lang="en-US" sz="1200" b="0" u="none" strike="noStrike">
+                <a:solidFill>
+                  <a:schemeClr val="dk1">
+                    <a:tint val="75000"/>
+                  </a:schemeClr>
+                </a:solidFill>
+                <a:effectLst/>
+                <a:uFillTx/>
+                <a:latin typeface="Calibri"/>
+              </a:rPr>
+              <a:t>&lt;date/time&gt;</a:t>
+            </a:r>
+            <a:endParaRPr lang="en-US" sz="1200" b="0" u="none" strike="noStrike">
+              <a:solidFill>
+                <a:srgbClr val="000000"/>
+              </a:solidFill>
+              <a:effectLst/>
+              <a:uFillTx/>
+              <a:latin typeface="Times New Roman"/>
+            </a:endParaRPr>
+          </a:p>
+        </p:txBody>
+      </p:sp>
+      <p:sp>
+        <p:nvSpPr>
+          <p:cNvPr id="11" name="PlaceHolder 5"/>
+          <p:cNvSpPr>
+            <a:spLocks noGrp="1"/>
+          </p:cNvSpPr>
+          <p:nvPr>
+            <p:ph type="ftr" idx="5"/>
+          </p:nvPr>
+        </p:nvSpPr>
+        <p:spPr>
+          <a:xfrm>
+            <a:off x="3124080" y="6356520"/>
+            <a:ext cx="2894760" cy="364320"/>
+          </a:xfrm>
+          <a:prstGeom prst="rect">
+            <a:avLst/>
+          </a:prstGeom>
+          <a:noFill/>
+          <a:ln w="0">
+            <a:noFill/>
+          </a:ln>
+        </p:spPr>
+        <p:txBody>
+          <a:bodyPr lIns="91440" rIns="91440" tIns="45720" bIns="45720" anchor="ctr">
+            <a:noAutofit/>
+          </a:bodyPr>
+          <a:lstStyle>
+            <a:lvl1pPr indent="0" algn="ctr">
+              <a:lnSpc>
+                <a:spcPct val="100000"/>
+              </a:lnSpc>
+              <a:buNone/>
+              <a:tabLst>
+                <a:tab algn="l" pos="0"/>
+              </a:tabLst>
+              <a:defRPr lang="en-US" sz="1400" b="0" u="none" strike="noStrike">
+                <a:solidFill>
+                  <a:srgbClr val="000000"/>
+                </a:solidFill>
+                <a:effectLst/>
+                <a:uFillTx/>
+                <a:latin typeface="Times New Roman"/>
+              </a:defRPr>
+            </a:lvl1pPr>
+          </a:lstStyle>
+          <a:p>
+            <a:pPr indent="0" algn="ctr">
+              <a:lnSpc>
+                <a:spcPct val="100000"/>
+              </a:lnSpc>
+              <a:buNone/>
+              <a:tabLst>
+                <a:tab algn="l" pos="0"/>
+              </a:tabLst>
+            </a:pPr>
+            <a:r>
+              <a:rPr lang="en-US" sz="1400" b="0" u="none" strike="noStrike">
+                <a:solidFill>
+                  <a:srgbClr val="000000"/>
+                </a:solidFill>
+                <a:effectLst/>
+                <a:uFillTx/>
+                <a:latin typeface="Times New Roman"/>
+              </a:rPr>
+              <a:t>&lt;footer&gt;</a:t>
+            </a:r>
+            <a:endParaRPr lang="en-US" sz="1400" b="0" u="none" strike="noStrike">
+              <a:solidFill>
+                <a:srgbClr val="000000"/>
+              </a:solidFill>
+              <a:effectLst/>
+              <a:uFillTx/>
+              <a:latin typeface="Times New Roman"/>
+            </a:endParaRPr>
+          </a:p>
+        </p:txBody>
+      </p:sp>
+      <p:sp>
+        <p:nvSpPr>
+          <p:cNvPr id="12" name="PlaceHolder 6"/>
+          <p:cNvSpPr>
+            <a:spLocks noGrp="1"/>
+          </p:cNvSpPr>
+          <p:nvPr>
+            <p:ph type="sldNum" idx="6"/>
+          </p:nvPr>
+        </p:nvSpPr>
+        <p:spPr>
+          <a:xfrm>
+            <a:off x="6553080" y="6356520"/>
+            <a:ext cx="2133000" cy="364320"/>
+          </a:xfrm>
+          <a:prstGeom prst="rect">
+            <a:avLst/>
+          </a:prstGeom>
+          <a:noFill/>
+          <a:ln w="0">
+            <a:noFill/>
+          </a:ln>
+        </p:spPr>
+        <p:txBody>
+          <a:bodyPr lIns="91440" rIns="91440" tIns="45720" bIns="45720" anchor="ctr">
+            <a:noAutofit/>
+          </a:bodyPr>
+          <a:lstStyle>
+            <a:lvl1pPr indent="0" algn="r" defTabSz="457200">
+              <a:lnSpc>
+                <a:spcPct val="100000"/>
+              </a:lnSpc>
+              <a:buNone/>
+              <a:tabLst>
+                <a:tab algn="l" pos="0"/>
+              </a:tabLst>
+              <a:defRPr lang="en-US" sz="1200" b="0" u="none" strike="noStrike">
+                <a:solidFill>
+                  <a:schemeClr val="dk1">
+                    <a:tint val="75000"/>
+                  </a:schemeClr>
+                </a:solidFill>
+                <a:effectLst/>
+                <a:uFillTx/>
+                <a:latin typeface="Calibri"/>
+              </a:defRPr>
+            </a:lvl1pPr>
+          </a:lstStyle>
+          <a:p>
+            <a:pPr indent="0" algn="r" defTabSz="457200">
+              <a:lnSpc>
+                <a:spcPct val="100000"/>
+              </a:lnSpc>
+              <a:buNone/>
+              <a:tabLst>
+                <a:tab algn="l" pos="0"/>
+              </a:tabLst>
+            </a:pPr>
+            <a:fld id="{17824E32-5D00-460B-8FBC-ECADFA78077D}" type="slidenum">
+              <a:rPr lang="en-US" sz="1200" b="0" u="none" strike="noStrike">
+                <a:solidFill>
+                  <a:schemeClr val="dk1">
+                    <a:tint val="75000"/>
+                  </a:schemeClr>
+                </a:solidFill>
+                <a:effectLst/>
+                <a:uFillTx/>
+                <a:latin typeface="Calibri"/>
+              </a:rPr>
+              <a:t>&lt;number&gt;</a:t>
+            </a:fld>
+            <a:endParaRPr lang="en-US" sz="1200" b="0" u="none" strike="noStrike">
+              <a:solidFill>
+                <a:srgbClr val="000000"/>
+              </a:solidFill>
+              <a:effectLst/>
+              <a:uFillTx/>
+              <a:latin typeface="Times New Roman"/>
+            </a:endParaRPr>
+          </a:p>
+        </p:txBody>
+      </p:sp>
+    </p:spTree>
+  </p:cSld>
+</p:sldLayout>
+</file>
+
+<file path=ppt/slideLayouts/slideLayout3.xml><?xml version="1.0" encoding="utf-8"?>
 <p:sldLayout xmlns:a="http://schemas.openxmlformats.org/drawingml/2006/main" xmlns:p="http://schemas.openxmlformats.org/presentationml/2006/main" xmlns:r="http://schemas.openxmlformats.org/officeDocument/2006/relationships" xmlns:p14="http://schemas.microsoft.com/office/powerpoint/2010/main" xmlns:p15="http://schemas.microsoft.com/office/powerpoint/2012/main" xmlns:mc="http://schemas.openxmlformats.org/markup-compatibility/2006" type="blank" preserve="1">
   <p:cSld name="Picture with Caption">
     <p:bg>
@@ -911,7 +2420,7 @@
       </p:grpSpPr>
       <p:sp>
         <p:nvSpPr>
-          <p:cNvPr id="55" name="PlaceHolder 1"/>
+          <p:cNvPr id="13" name="PlaceHolder 1"/>
           <p:cNvSpPr>
             <a:spLocks noGrp="1"/>
           </p:cNvSpPr>
@@ -922,7 +2431,7 @@
         <p:spPr>
           <a:xfrm>
             <a:off x="1792440" y="4800600"/>
-            <a:ext cx="5486040" cy="566280"/>
+            <a:ext cx="5485680" cy="565920"/>
           </a:xfrm>
           <a:prstGeom prst="rect">
             <a:avLst/>
@@ -942,6 +2451,9 @@
                 <a:spcPct val="100000"/>
               </a:lnSpc>
               <a:buNone/>
+              <a:tabLst>
+                <a:tab algn="l" pos="0"/>
+              </a:tabLst>
             </a:pPr>
             <a:r>
               <a:rPr lang="en-US" sz="2000" b="1" u="none" strike="noStrike">
@@ -956,18 +2468,18 @@
             </a:r>
             <a:endParaRPr lang="en-US" sz="2000" b="0" u="none" strike="noStrike">
               <a:solidFill>
-                <a:schemeClr val="dk1"/>
-              </a:solidFill>
-              <a:effectLst/>
-              <a:uFillTx/>
-              <a:latin typeface="Calibri"/>
+                <a:srgbClr val="000000"/>
+              </a:solidFill>
+              <a:effectLst/>
+              <a:uFillTx/>
+              <a:latin typeface="Arial"/>
             </a:endParaRPr>
           </a:p>
         </p:txBody>
       </p:sp>
       <p:sp>
         <p:nvSpPr>
-          <p:cNvPr id="56" name="PlaceHolder 2"/>
+          <p:cNvPr id="14" name="PlaceHolder 2"/>
           <p:cNvSpPr>
             <a:spLocks noGrp="1"/>
           </p:cNvSpPr>
@@ -978,7 +2490,7 @@
         <p:spPr>
           <a:xfrm>
             <a:off x="1792440" y="612720"/>
-            <a:ext cx="5486040" cy="4114440"/>
+            <a:ext cx="5485680" cy="4114080"/>
           </a:xfrm>
           <a:prstGeom prst="rect">
             <a:avLst/>
@@ -994,6 +2506,9 @@
           </a:bodyPr>
           <a:p>
             <a:pPr marL="432000" indent="-324000">
+              <a:lnSpc>
+                <a:spcPct val="100000"/>
+              </a:lnSpc>
               <a:spcBef>
                 <a:spcPts val="1417"/>
               </a:spcBef>
@@ -1017,15 +2532,18 @@
             </a:r>
             <a:endParaRPr lang="en-US" sz="3200" b="0" u="none" strike="noStrike">
               <a:solidFill>
-                <a:schemeClr val="dk1"/>
-              </a:solidFill>
-              <a:effectLst/>
-              <a:uFillTx/>
-              <a:latin typeface="Calibri"/>
+                <a:srgbClr val="000000"/>
+              </a:solidFill>
+              <a:effectLst/>
+              <a:uFillTx/>
+              <a:latin typeface="Arial"/>
             </a:endParaRPr>
           </a:p>
           <a:p>
             <a:pPr marL="864000" lvl="1" indent="-324000">
+              <a:lnSpc>
+                <a:spcPct val="100000"/>
+              </a:lnSpc>
               <a:spcBef>
                 <a:spcPts val="1134"/>
               </a:spcBef>
@@ -1049,15 +2567,18 @@
             </a:r>
             <a:endParaRPr lang="en-US" sz="3200" b="0" u="none" strike="noStrike">
               <a:solidFill>
-                <a:schemeClr val="dk1"/>
-              </a:solidFill>
-              <a:effectLst/>
-              <a:uFillTx/>
-              <a:latin typeface="Calibri"/>
+                <a:srgbClr val="000000"/>
+              </a:solidFill>
+              <a:effectLst/>
+              <a:uFillTx/>
+              <a:latin typeface="Arial"/>
             </a:endParaRPr>
           </a:p>
           <a:p>
             <a:pPr marL="1296000" lvl="2" indent="-288000">
+              <a:lnSpc>
+                <a:spcPct val="100000"/>
+              </a:lnSpc>
               <a:spcBef>
                 <a:spcPts val="850"/>
               </a:spcBef>
@@ -1081,15 +2602,18 @@
             </a:r>
             <a:endParaRPr lang="en-US" sz="3200" b="0" u="none" strike="noStrike">
               <a:solidFill>
-                <a:schemeClr val="dk1"/>
-              </a:solidFill>
-              <a:effectLst/>
-              <a:uFillTx/>
-              <a:latin typeface="Calibri"/>
+                <a:srgbClr val="000000"/>
+              </a:solidFill>
+              <a:effectLst/>
+              <a:uFillTx/>
+              <a:latin typeface="Arial"/>
             </a:endParaRPr>
           </a:p>
           <a:p>
             <a:pPr marL="1728000" lvl="3" indent="-216000">
+              <a:lnSpc>
+                <a:spcPct val="100000"/>
+              </a:lnSpc>
               <a:spcBef>
                 <a:spcPts val="567"/>
               </a:spcBef>
@@ -1113,15 +2637,18 @@
             </a:r>
             <a:endParaRPr lang="en-US" sz="3200" b="0" u="none" strike="noStrike">
               <a:solidFill>
-                <a:schemeClr val="dk1"/>
-              </a:solidFill>
-              <a:effectLst/>
-              <a:uFillTx/>
-              <a:latin typeface="Calibri"/>
+                <a:srgbClr val="000000"/>
+              </a:solidFill>
+              <a:effectLst/>
+              <a:uFillTx/>
+              <a:latin typeface="Arial"/>
             </a:endParaRPr>
           </a:p>
           <a:p>
             <a:pPr marL="2160000" lvl="4" indent="-216000">
+              <a:lnSpc>
+                <a:spcPct val="100000"/>
+              </a:lnSpc>
               <a:spcBef>
                 <a:spcPts val="283"/>
               </a:spcBef>
@@ -1145,15 +2672,18 @@
             </a:r>
             <a:endParaRPr lang="en-US" sz="3200" b="0" u="none" strike="noStrike">
               <a:solidFill>
-                <a:schemeClr val="dk1"/>
-              </a:solidFill>
-              <a:effectLst/>
-              <a:uFillTx/>
-              <a:latin typeface="Calibri"/>
+                <a:srgbClr val="000000"/>
+              </a:solidFill>
+              <a:effectLst/>
+              <a:uFillTx/>
+              <a:latin typeface="Arial"/>
             </a:endParaRPr>
           </a:p>
           <a:p>
             <a:pPr marL="2592000" lvl="5" indent="-216000">
+              <a:lnSpc>
+                <a:spcPct val="100000"/>
+              </a:lnSpc>
               <a:spcBef>
                 <a:spcPts val="283"/>
               </a:spcBef>
@@ -1177,15 +2707,18 @@
             </a:r>
             <a:endParaRPr lang="en-US" sz="3200" b="0" u="none" strike="noStrike">
               <a:solidFill>
-                <a:schemeClr val="dk1"/>
-              </a:solidFill>
-              <a:effectLst/>
-              <a:uFillTx/>
-              <a:latin typeface="Calibri"/>
+                <a:srgbClr val="000000"/>
+              </a:solidFill>
+              <a:effectLst/>
+              <a:uFillTx/>
+              <a:latin typeface="Arial"/>
             </a:endParaRPr>
           </a:p>
           <a:p>
             <a:pPr marL="3024000" lvl="6" indent="-216000">
+              <a:lnSpc>
+                <a:spcPct val="100000"/>
+              </a:lnSpc>
               <a:spcBef>
                 <a:spcPts val="283"/>
               </a:spcBef>
@@ -1209,18 +2742,18 @@
             </a:r>
             <a:endParaRPr lang="en-US" sz="3200" b="0" u="none" strike="noStrike">
               <a:solidFill>
-                <a:schemeClr val="dk1"/>
-              </a:solidFill>
-              <a:effectLst/>
-              <a:uFillTx/>
-              <a:latin typeface="Calibri"/>
+                <a:srgbClr val="000000"/>
+              </a:solidFill>
+              <a:effectLst/>
+              <a:uFillTx/>
+              <a:latin typeface="Arial"/>
             </a:endParaRPr>
           </a:p>
         </p:txBody>
       </p:sp>
       <p:sp>
         <p:nvSpPr>
-          <p:cNvPr id="57" name="PlaceHolder 3"/>
+          <p:cNvPr id="15" name="PlaceHolder 3"/>
           <p:cNvSpPr>
             <a:spLocks noGrp="1"/>
           </p:cNvSpPr>
@@ -1231,7 +2764,7 @@
         <p:spPr>
           <a:xfrm>
             <a:off x="1792440" y="5367240"/>
-            <a:ext cx="5486040" cy="804600"/>
+            <a:ext cx="5485680" cy="804240"/>
           </a:xfrm>
           <a:prstGeom prst="rect">
             <a:avLst/>
@@ -1271,29 +2804,29 @@
             </a:r>
             <a:endParaRPr lang="en-US" sz="1400" b="0" u="none" strike="noStrike">
               <a:solidFill>
-                <a:schemeClr val="dk1"/>
-              </a:solidFill>
-              <a:effectLst/>
-              <a:uFillTx/>
-              <a:latin typeface="Calibri"/>
+                <a:srgbClr val="000000"/>
+              </a:solidFill>
+              <a:effectLst/>
+              <a:uFillTx/>
+              <a:latin typeface="Arial"/>
             </a:endParaRPr>
           </a:p>
         </p:txBody>
       </p:sp>
       <p:sp>
         <p:nvSpPr>
-          <p:cNvPr id="58" name="PlaceHolder 4"/>
+          <p:cNvPr id="16" name="PlaceHolder 4"/>
           <p:cNvSpPr>
             <a:spLocks noGrp="1"/>
           </p:cNvSpPr>
           <p:nvPr>
-            <p:ph type="dt" idx="31"/>
+            <p:ph type="dt" idx="7"/>
           </p:nvPr>
         </p:nvSpPr>
         <p:spPr>
           <a:xfrm>
             <a:off x="457200" y="6356520"/>
-            <a:ext cx="2133360" cy="364680"/>
+            <a:ext cx="2133000" cy="364320"/>
           </a:xfrm>
           <a:prstGeom prst="rect">
             <a:avLst/>
@@ -1313,6 +2846,9 @@
                 <a:spcPct val="100000"/>
               </a:lnSpc>
               <a:buNone/>
+              <a:tabLst>
+                <a:tab algn="l" pos="0"/>
+              </a:tabLst>
               <a:defRPr lang="en-US" sz="1200" b="0" u="none" strike="noStrike">
                 <a:solidFill>
                   <a:schemeClr val="dk1">
@@ -1331,6 +2867,9 @@
                 <a:spcPct val="100000"/>
               </a:lnSpc>
               <a:buNone/>
+              <a:tabLst>
+                <a:tab algn="l" pos="0"/>
+              </a:tabLst>
             </a:pPr>
             <a:r>
               <a:rPr lang="en-US" sz="1200" b="0" u="none" strike="noStrike">
@@ -1358,18 +2897,18 @@
       </p:sp>
       <p:sp>
         <p:nvSpPr>
-          <p:cNvPr id="59" name="PlaceHolder 5"/>
+          <p:cNvPr id="17" name="PlaceHolder 5"/>
           <p:cNvSpPr>
             <a:spLocks noGrp="1"/>
           </p:cNvSpPr>
           <p:nvPr>
-            <p:ph type="ftr" idx="32"/>
+            <p:ph type="ftr" idx="8"/>
           </p:nvPr>
         </p:nvSpPr>
         <p:spPr>
           <a:xfrm>
             <a:off x="3124080" y="6356520"/>
-            <a:ext cx="2895120" cy="364680"/>
+            <a:ext cx="2894760" cy="364320"/>
           </a:xfrm>
           <a:prstGeom prst="rect">
             <a:avLst/>
@@ -1385,7 +2924,13 @@
           </a:bodyPr>
           <a:lstStyle>
             <a:lvl1pPr indent="0" algn="ctr">
-              <a:buNone/>
+              <a:lnSpc>
+                <a:spcPct val="100000"/>
+              </a:lnSpc>
+              <a:buNone/>
+              <a:tabLst>
+                <a:tab algn="l" pos="0"/>
+              </a:tabLst>
               <a:defRPr lang="en-US" sz="1400" b="0" u="none" strike="noStrike">
                 <a:solidFill>
                   <a:srgbClr val="000000"/>
@@ -1398,7 +2943,13 @@
           </a:lstStyle>
           <a:p>
             <a:pPr indent="0" algn="ctr">
-              <a:buNone/>
+              <a:lnSpc>
+                <a:spcPct val="100000"/>
+              </a:lnSpc>
+              <a:buNone/>
+              <a:tabLst>
+                <a:tab algn="l" pos="0"/>
+              </a:tabLst>
             </a:pPr>
             <a:r>
               <a:rPr lang="en-US" sz="1400" b="0" u="none" strike="noStrike">
@@ -1424,18 +2975,18 @@
       </p:sp>
       <p:sp>
         <p:nvSpPr>
-          <p:cNvPr id="60" name="PlaceHolder 6"/>
+          <p:cNvPr id="18" name="PlaceHolder 6"/>
           <p:cNvSpPr>
             <a:spLocks noGrp="1"/>
           </p:cNvSpPr>
           <p:nvPr>
-            <p:ph type="sldNum" idx="33"/>
+            <p:ph type="sldNum" idx="9"/>
           </p:nvPr>
         </p:nvSpPr>
         <p:spPr>
           <a:xfrm>
             <a:off x="6553080" y="6356520"/>
-            <a:ext cx="2133360" cy="364680"/>
+            <a:ext cx="2133000" cy="364320"/>
           </a:xfrm>
           <a:prstGeom prst="rect">
             <a:avLst/>
@@ -1455,6 +3006,9 @@
                 <a:spcPct val="100000"/>
               </a:lnSpc>
               <a:buNone/>
+              <a:tabLst>
+                <a:tab algn="l" pos="0"/>
+              </a:tabLst>
               <a:defRPr lang="en-US" sz="1200" b="0" u="none" strike="noStrike">
                 <a:solidFill>
                   <a:schemeClr val="dk1">
@@ -1473,8 +3027,11 @@
                 <a:spcPct val="100000"/>
               </a:lnSpc>
               <a:buNone/>
-            </a:pPr>
-            <a:fld id="{C9D7468D-11CB-4448-BC1B-49380BB1FE0A}" type="slidenum">
+              <a:tabLst>
+                <a:tab algn="l" pos="0"/>
+              </a:tabLst>
+            </a:pPr>
+            <a:fld id="{8331963C-8494-4BE0-B1E0-A6A1C2F01F8E}" type="slidenum">
               <a:rPr lang="en-US" sz="1200" b="0" u="none" strike="noStrike">
                 <a:solidFill>
                   <a:schemeClr val="dk1">
@@ -1503,7 +3060,337 @@
 </p:sldLayout>
 </file>
 
-<file path=ppt/slideLayouts/slideLayout2.xml><?xml version="1.0" encoding="utf-8"?>
+<file path=ppt/slideLayouts/slideLayout4.xml><?xml version="1.0" encoding="utf-8"?>
+<p:sldLayout xmlns:a="http://schemas.openxmlformats.org/drawingml/2006/main" xmlns:p="http://schemas.openxmlformats.org/presentationml/2006/main" xmlns:r="http://schemas.openxmlformats.org/officeDocument/2006/relationships" xmlns:p14="http://schemas.microsoft.com/office/powerpoint/2010/main" xmlns:p15="http://schemas.microsoft.com/office/powerpoint/2012/main" xmlns:mc="http://schemas.openxmlformats.org/markup-compatibility/2006" type="title" preserve="1">
+  <p:cSld name="Title Slide">
+    <p:bg>
+      <p:bgPr>
+        <a:solidFill>
+          <a:srgbClr val="ffffff"/>
+        </a:solidFill>
+      </p:bgPr>
+    </p:bg>
+    <p:spTree>
+      <p:nvGrpSpPr>
+        <p:cNvPr id="1" name=""/>
+        <p:cNvGrpSpPr/>
+        <p:nvPr/>
+      </p:nvGrpSpPr>
+      <p:grpSpPr>
+        <a:xfrm>
+          <a:off x="0" y="0"/>
+          <a:ext cx="0" cy="0"/>
+          <a:chOff x="0" y="0"/>
+          <a:chExt cx="0" cy="0"/>
+        </a:xfrm>
+      </p:grpSpPr>
+      <p:sp>
+        <p:nvSpPr>
+          <p:cNvPr id="19" name="PlaceHolder 1"/>
+          <p:cNvSpPr>
+            <a:spLocks noGrp="1"/>
+          </p:cNvSpPr>
+          <p:nvPr>
+            <p:ph type="title"/>
+          </p:nvPr>
+        </p:nvSpPr>
+        <p:spPr>
+          <a:xfrm>
+            <a:off x="685800" y="2130480"/>
+            <a:ext cx="7771680" cy="1469160"/>
+          </a:xfrm>
+          <a:prstGeom prst="rect">
+            <a:avLst/>
+          </a:prstGeom>
+          <a:noFill/>
+          <a:ln w="0">
+            <a:noFill/>
+          </a:ln>
+        </p:spPr>
+        <p:txBody>
+          <a:bodyPr lIns="91440" rIns="91440" tIns="45720" bIns="45720" anchor="ctr">
+            <a:noAutofit/>
+          </a:bodyPr>
+          <a:p>
+            <a:pPr indent="0" algn="ctr" defTabSz="457200">
+              <a:lnSpc>
+                <a:spcPct val="100000"/>
+              </a:lnSpc>
+              <a:buNone/>
+              <a:tabLst>
+                <a:tab algn="l" pos="0"/>
+              </a:tabLst>
+            </a:pPr>
+            <a:r>
+              <a:rPr lang="en-US" sz="4400" b="0" u="none" strike="noStrike">
+                <a:solidFill>
+                  <a:schemeClr val="dk1"/>
+                </a:solidFill>
+                <a:effectLst/>
+                <a:uFillTx/>
+                <a:latin typeface="Calibri"/>
+              </a:rPr>
+              <a:t>Click to edit Master title style</a:t>
+            </a:r>
+            <a:endParaRPr lang="en-US" sz="4400" b="0" u="none" strike="noStrike">
+              <a:solidFill>
+                <a:srgbClr val="000000"/>
+              </a:solidFill>
+              <a:effectLst/>
+              <a:uFillTx/>
+              <a:latin typeface="Arial"/>
+            </a:endParaRPr>
+          </a:p>
+        </p:txBody>
+      </p:sp>
+      <p:sp>
+        <p:nvSpPr>
+          <p:cNvPr id="20" name="PlaceHolder 2"/>
+          <p:cNvSpPr>
+            <a:spLocks noGrp="1"/>
+          </p:cNvSpPr>
+          <p:nvPr>
+            <p:ph type="dt" idx="10"/>
+          </p:nvPr>
+        </p:nvSpPr>
+        <p:spPr>
+          <a:xfrm>
+            <a:off x="457200" y="6356520"/>
+            <a:ext cx="2133000" cy="364320"/>
+          </a:xfrm>
+          <a:prstGeom prst="rect">
+            <a:avLst/>
+          </a:prstGeom>
+          <a:noFill/>
+          <a:ln w="0">
+            <a:noFill/>
+          </a:ln>
+        </p:spPr>
+        <p:txBody>
+          <a:bodyPr lIns="91440" rIns="91440" tIns="45720" bIns="45720" anchor="ctr">
+            <a:noAutofit/>
+          </a:bodyPr>
+          <a:lstStyle>
+            <a:lvl1pPr indent="0" defTabSz="457200">
+              <a:lnSpc>
+                <a:spcPct val="100000"/>
+              </a:lnSpc>
+              <a:buNone/>
+              <a:tabLst>
+                <a:tab algn="l" pos="0"/>
+              </a:tabLst>
+              <a:defRPr lang="en-US" sz="1200" b="0" u="none" strike="noStrike">
+                <a:solidFill>
+                  <a:schemeClr val="dk1">
+                    <a:tint val="75000"/>
+                  </a:schemeClr>
+                </a:solidFill>
+                <a:effectLst/>
+                <a:uFillTx/>
+                <a:latin typeface="Calibri"/>
+              </a:defRPr>
+            </a:lvl1pPr>
+          </a:lstStyle>
+          <a:p>
+            <a:pPr indent="0" defTabSz="457200">
+              <a:lnSpc>
+                <a:spcPct val="100000"/>
+              </a:lnSpc>
+              <a:buNone/>
+              <a:tabLst>
+                <a:tab algn="l" pos="0"/>
+              </a:tabLst>
+            </a:pPr>
+            <a:r>
+              <a:rPr lang="en-US" sz="1200" b="0" u="none" strike="noStrike">
+                <a:solidFill>
+                  <a:schemeClr val="dk1">
+                    <a:tint val="75000"/>
+                  </a:schemeClr>
+                </a:solidFill>
+                <a:effectLst/>
+                <a:uFillTx/>
+                <a:latin typeface="Calibri"/>
+              </a:rPr>
+              <a:t>&lt;date/time&gt;</a:t>
+            </a:r>
+            <a:endParaRPr lang="en-US" sz="1200" b="0" u="none" strike="noStrike">
+              <a:solidFill>
+                <a:srgbClr val="000000"/>
+              </a:solidFill>
+              <a:effectLst/>
+              <a:uFillTx/>
+              <a:latin typeface="Times New Roman"/>
+            </a:endParaRPr>
+          </a:p>
+        </p:txBody>
+      </p:sp>
+      <p:sp>
+        <p:nvSpPr>
+          <p:cNvPr id="21" name="PlaceHolder 3"/>
+          <p:cNvSpPr>
+            <a:spLocks noGrp="1"/>
+          </p:cNvSpPr>
+          <p:nvPr>
+            <p:ph type="ftr" idx="11"/>
+          </p:nvPr>
+        </p:nvSpPr>
+        <p:spPr>
+          <a:xfrm>
+            <a:off x="3124080" y="6356520"/>
+            <a:ext cx="2894760" cy="364320"/>
+          </a:xfrm>
+          <a:prstGeom prst="rect">
+            <a:avLst/>
+          </a:prstGeom>
+          <a:noFill/>
+          <a:ln w="0">
+            <a:noFill/>
+          </a:ln>
+        </p:spPr>
+        <p:txBody>
+          <a:bodyPr lIns="91440" rIns="91440" tIns="45720" bIns="45720" anchor="ctr">
+            <a:noAutofit/>
+          </a:bodyPr>
+          <a:lstStyle>
+            <a:lvl1pPr indent="0" algn="ctr">
+              <a:lnSpc>
+                <a:spcPct val="100000"/>
+              </a:lnSpc>
+              <a:buNone/>
+              <a:tabLst>
+                <a:tab algn="l" pos="0"/>
+              </a:tabLst>
+              <a:defRPr lang="en-US" sz="1400" b="0" u="none" strike="noStrike">
+                <a:solidFill>
+                  <a:srgbClr val="000000"/>
+                </a:solidFill>
+                <a:effectLst/>
+                <a:uFillTx/>
+                <a:latin typeface="Times New Roman"/>
+              </a:defRPr>
+            </a:lvl1pPr>
+          </a:lstStyle>
+          <a:p>
+            <a:pPr indent="0" algn="ctr">
+              <a:lnSpc>
+                <a:spcPct val="100000"/>
+              </a:lnSpc>
+              <a:buNone/>
+              <a:tabLst>
+                <a:tab algn="l" pos="0"/>
+              </a:tabLst>
+            </a:pPr>
+            <a:r>
+              <a:rPr lang="en-US" sz="1400" b="0" u="none" strike="noStrike">
+                <a:solidFill>
+                  <a:srgbClr val="000000"/>
+                </a:solidFill>
+                <a:effectLst/>
+                <a:uFillTx/>
+                <a:latin typeface="Times New Roman"/>
+              </a:rPr>
+              <a:t>&lt;footer&gt;</a:t>
+            </a:r>
+            <a:endParaRPr lang="en-US" sz="1400" b="0" u="none" strike="noStrike">
+              <a:solidFill>
+                <a:srgbClr val="000000"/>
+              </a:solidFill>
+              <a:effectLst/>
+              <a:uFillTx/>
+              <a:latin typeface="Times New Roman"/>
+            </a:endParaRPr>
+          </a:p>
+        </p:txBody>
+      </p:sp>
+      <p:sp>
+        <p:nvSpPr>
+          <p:cNvPr id="22" name="PlaceHolder 4"/>
+          <p:cNvSpPr>
+            <a:spLocks noGrp="1"/>
+          </p:cNvSpPr>
+          <p:nvPr>
+            <p:ph type="sldNum" idx="12"/>
+          </p:nvPr>
+        </p:nvSpPr>
+        <p:spPr>
+          <a:xfrm>
+            <a:off x="6553080" y="6356520"/>
+            <a:ext cx="2133000" cy="364320"/>
+          </a:xfrm>
+          <a:prstGeom prst="rect">
+            <a:avLst/>
+          </a:prstGeom>
+          <a:noFill/>
+          <a:ln w="0">
+            <a:noFill/>
+          </a:ln>
+        </p:spPr>
+        <p:txBody>
+          <a:bodyPr lIns="91440" rIns="91440" tIns="45720" bIns="45720" anchor="ctr">
+            <a:noAutofit/>
+          </a:bodyPr>
+          <a:lstStyle>
+            <a:lvl1pPr indent="0" algn="r" defTabSz="457200">
+              <a:lnSpc>
+                <a:spcPct val="100000"/>
+              </a:lnSpc>
+              <a:buNone/>
+              <a:tabLst>
+                <a:tab algn="l" pos="0"/>
+              </a:tabLst>
+              <a:defRPr lang="en-US" sz="1200" b="0" u="none" strike="noStrike">
+                <a:solidFill>
+                  <a:schemeClr val="dk1">
+                    <a:tint val="75000"/>
+                  </a:schemeClr>
+                </a:solidFill>
+                <a:effectLst/>
+                <a:uFillTx/>
+                <a:latin typeface="Calibri"/>
+              </a:defRPr>
+            </a:lvl1pPr>
+          </a:lstStyle>
+          <a:p>
+            <a:pPr indent="0" algn="r" defTabSz="457200">
+              <a:lnSpc>
+                <a:spcPct val="100000"/>
+              </a:lnSpc>
+              <a:buNone/>
+              <a:tabLst>
+                <a:tab algn="l" pos="0"/>
+              </a:tabLst>
+            </a:pPr>
+            <a:fld id="{CC8B584E-0475-4858-A963-A4C59A7F59DE}" type="slidenum">
+              <a:rPr lang="en-US" sz="1200" b="0" u="none" strike="noStrike">
+                <a:solidFill>
+                  <a:schemeClr val="dk1">
+                    <a:tint val="75000"/>
+                  </a:schemeClr>
+                </a:solidFill>
+                <a:effectLst/>
+                <a:uFillTx/>
+                <a:latin typeface="Calibri"/>
+              </a:rPr>
+              <a:t>&lt;number&gt;</a:t>
+            </a:fld>
+            <a:endParaRPr lang="en-US" sz="1200" b="0" u="none" strike="noStrike">
+              <a:solidFill>
+                <a:srgbClr val="000000"/>
+              </a:solidFill>
+              <a:effectLst/>
+              <a:uFillTx/>
+              <a:latin typeface="Times New Roman"/>
+            </a:endParaRPr>
+          </a:p>
+        </p:txBody>
+      </p:sp>
+    </p:spTree>
+  </p:cSld>
+</p:sldLayout>
+</file>
+
+<file path=ppt/slideLayouts/slideLayout5.xml><?xml version="1.0" encoding="utf-8"?>
 <p:sldLayout xmlns:a="http://schemas.openxmlformats.org/drawingml/2006/main" xmlns:p="http://schemas.openxmlformats.org/presentationml/2006/main" xmlns:r="http://schemas.openxmlformats.org/officeDocument/2006/relationships" xmlns:p14="http://schemas.microsoft.com/office/powerpoint/2010/main" xmlns:p15="http://schemas.microsoft.com/office/powerpoint/2012/main" xmlns:mc="http://schemas.openxmlformats.org/markup-compatibility/2006" type="vertTx" preserve="1">
   <p:cSld name="Title and Vertical Text">
     <p:bg>
@@ -1529,7 +3416,7 @@
       </p:grpSpPr>
       <p:sp>
         <p:nvSpPr>
-          <p:cNvPr id="6" name="PlaceHolder 1"/>
+          <p:cNvPr id="23" name="PlaceHolder 1"/>
           <p:cNvSpPr>
             <a:spLocks noGrp="1"/>
           </p:cNvSpPr>
@@ -1540,7 +3427,7 @@
         <p:spPr>
           <a:xfrm>
             <a:off x="457200" y="274680"/>
-            <a:ext cx="8229240" cy="1142640"/>
+            <a:ext cx="8228880" cy="1142280"/>
           </a:xfrm>
           <a:prstGeom prst="rect">
             <a:avLst/>
@@ -1560,6 +3447,9 @@
                 <a:spcPct val="100000"/>
               </a:lnSpc>
               <a:buNone/>
+              <a:tabLst>
+                <a:tab algn="l" pos="0"/>
+              </a:tabLst>
             </a:pPr>
             <a:r>
               <a:rPr lang="en-US" sz="4400" b="0" u="none" strike="noStrike">
@@ -1574,18 +3464,18 @@
             </a:r>
             <a:endParaRPr lang="en-US" sz="4400" b="0" u="none" strike="noStrike">
               <a:solidFill>
-                <a:schemeClr val="dk1"/>
-              </a:solidFill>
-              <a:effectLst/>
-              <a:uFillTx/>
-              <a:latin typeface="Calibri"/>
+                <a:srgbClr val="000000"/>
+              </a:solidFill>
+              <a:effectLst/>
+              <a:uFillTx/>
+              <a:latin typeface="Arial"/>
             </a:endParaRPr>
           </a:p>
         </p:txBody>
       </p:sp>
       <p:sp>
         <p:nvSpPr>
-          <p:cNvPr id="7" name="PlaceHolder 2"/>
+          <p:cNvPr id="24" name="PlaceHolder 2"/>
           <p:cNvSpPr>
             <a:spLocks noGrp="1"/>
           </p:cNvSpPr>
@@ -1596,7 +3486,7 @@
         <p:spPr>
           <a:xfrm>
             <a:off x="457200" y="1600200"/>
-            <a:ext cx="8229240" cy="4525560"/>
+            <a:ext cx="8228880" cy="4525200"/>
           </a:xfrm>
           <a:prstGeom prst="rect">
             <a:avLst/>
@@ -1637,11 +3527,11 @@
             </a:r>
             <a:endParaRPr lang="en-US" sz="3200" b="0" u="none" strike="noStrike">
               <a:solidFill>
-                <a:schemeClr val="dk1"/>
-              </a:solidFill>
-              <a:effectLst/>
-              <a:uFillTx/>
-              <a:latin typeface="Calibri"/>
+                <a:srgbClr val="000000"/>
+              </a:solidFill>
+              <a:effectLst/>
+              <a:uFillTx/>
+              <a:latin typeface="Arial"/>
             </a:endParaRPr>
           </a:p>
           <a:p>
@@ -1671,11 +3561,11 @@
             </a:r>
             <a:endParaRPr lang="en-US" sz="2800" b="0" u="none" strike="noStrike">
               <a:solidFill>
-                <a:schemeClr val="dk1"/>
-              </a:solidFill>
-              <a:effectLst/>
-              <a:uFillTx/>
-              <a:latin typeface="Calibri"/>
+                <a:srgbClr val="000000"/>
+              </a:solidFill>
+              <a:effectLst/>
+              <a:uFillTx/>
+              <a:latin typeface="Arial"/>
             </a:endParaRPr>
           </a:p>
           <a:p>
@@ -1705,11 +3595,11 @@
             </a:r>
             <a:endParaRPr lang="en-US" sz="2400" b="0" u="none" strike="noStrike">
               <a:solidFill>
-                <a:schemeClr val="dk1"/>
-              </a:solidFill>
-              <a:effectLst/>
-              <a:uFillTx/>
-              <a:latin typeface="Calibri"/>
+                <a:srgbClr val="000000"/>
+              </a:solidFill>
+              <a:effectLst/>
+              <a:uFillTx/>
+              <a:latin typeface="Arial"/>
             </a:endParaRPr>
           </a:p>
           <a:p>
@@ -1739,11 +3629,11 @@
             </a:r>
             <a:endParaRPr lang="en-US" sz="2000" b="0" u="none" strike="noStrike">
               <a:solidFill>
-                <a:schemeClr val="dk1"/>
-              </a:solidFill>
-              <a:effectLst/>
-              <a:uFillTx/>
-              <a:latin typeface="Calibri"/>
+                <a:srgbClr val="000000"/>
+              </a:solidFill>
+              <a:effectLst/>
+              <a:uFillTx/>
+              <a:latin typeface="Arial"/>
             </a:endParaRPr>
           </a:p>
           <a:p>
@@ -1773,29 +3663,29 @@
             </a:r>
             <a:endParaRPr lang="en-US" sz="2000" b="0" u="none" strike="noStrike">
               <a:solidFill>
-                <a:schemeClr val="dk1"/>
-              </a:solidFill>
-              <a:effectLst/>
-              <a:uFillTx/>
-              <a:latin typeface="Calibri"/>
+                <a:srgbClr val="000000"/>
+              </a:solidFill>
+              <a:effectLst/>
+              <a:uFillTx/>
+              <a:latin typeface="Arial"/>
             </a:endParaRPr>
           </a:p>
         </p:txBody>
       </p:sp>
       <p:sp>
         <p:nvSpPr>
-          <p:cNvPr id="8" name="PlaceHolder 3"/>
+          <p:cNvPr id="25" name="PlaceHolder 3"/>
           <p:cNvSpPr>
             <a:spLocks noGrp="1"/>
           </p:cNvSpPr>
           <p:nvPr>
-            <p:ph type="dt" idx="4"/>
+            <p:ph type="dt" idx="13"/>
           </p:nvPr>
         </p:nvSpPr>
         <p:spPr>
           <a:xfrm>
             <a:off x="457200" y="6356520"/>
-            <a:ext cx="2133360" cy="364680"/>
+            <a:ext cx="2133000" cy="364320"/>
           </a:xfrm>
           <a:prstGeom prst="rect">
             <a:avLst/>
@@ -1815,6 +3705,9 @@
                 <a:spcPct val="100000"/>
               </a:lnSpc>
               <a:buNone/>
+              <a:tabLst>
+                <a:tab algn="l" pos="0"/>
+              </a:tabLst>
               <a:defRPr lang="en-US" sz="1200" b="0" u="none" strike="noStrike">
                 <a:solidFill>
                   <a:schemeClr val="dk1">
@@ -1833,6 +3726,9 @@
                 <a:spcPct val="100000"/>
               </a:lnSpc>
               <a:buNone/>
+              <a:tabLst>
+                <a:tab algn="l" pos="0"/>
+              </a:tabLst>
             </a:pPr>
             <a:r>
               <a:rPr lang="en-US" sz="1200" b="0" u="none" strike="noStrike">
@@ -1860,18 +3756,18 @@
       </p:sp>
       <p:sp>
         <p:nvSpPr>
-          <p:cNvPr id="9" name="PlaceHolder 4"/>
+          <p:cNvPr id="26" name="PlaceHolder 4"/>
           <p:cNvSpPr>
             <a:spLocks noGrp="1"/>
           </p:cNvSpPr>
           <p:nvPr>
-            <p:ph type="ftr" idx="5"/>
+            <p:ph type="ftr" idx="14"/>
           </p:nvPr>
         </p:nvSpPr>
         <p:spPr>
           <a:xfrm>
             <a:off x="3124080" y="6356520"/>
-            <a:ext cx="2895120" cy="364680"/>
+            <a:ext cx="2894760" cy="364320"/>
           </a:xfrm>
           <a:prstGeom prst="rect">
             <a:avLst/>
@@ -1887,7 +3783,13 @@
           </a:bodyPr>
           <a:lstStyle>
             <a:lvl1pPr indent="0" algn="ctr">
-              <a:buNone/>
+              <a:lnSpc>
+                <a:spcPct val="100000"/>
+              </a:lnSpc>
+              <a:buNone/>
+              <a:tabLst>
+                <a:tab algn="l" pos="0"/>
+              </a:tabLst>
               <a:defRPr lang="en-US" sz="1400" b="0" u="none" strike="noStrike">
                 <a:solidFill>
                   <a:srgbClr val="000000"/>
@@ -1900,7 +3802,13 @@
           </a:lstStyle>
           <a:p>
             <a:pPr indent="0" algn="ctr">
-              <a:buNone/>
+              <a:lnSpc>
+                <a:spcPct val="100000"/>
+              </a:lnSpc>
+              <a:buNone/>
+              <a:tabLst>
+                <a:tab algn="l" pos="0"/>
+              </a:tabLst>
             </a:pPr>
             <a:r>
               <a:rPr lang="en-US" sz="1400" b="0" u="none" strike="noStrike">
@@ -1926,18 +3834,18 @@
       </p:sp>
       <p:sp>
         <p:nvSpPr>
-          <p:cNvPr id="10" name="PlaceHolder 5"/>
+          <p:cNvPr id="27" name="PlaceHolder 5"/>
           <p:cNvSpPr>
             <a:spLocks noGrp="1"/>
           </p:cNvSpPr>
           <p:nvPr>
-            <p:ph type="sldNum" idx="6"/>
+            <p:ph type="sldNum" idx="15"/>
           </p:nvPr>
         </p:nvSpPr>
         <p:spPr>
           <a:xfrm>
             <a:off x="6553080" y="6356520"/>
-            <a:ext cx="2133360" cy="364680"/>
+            <a:ext cx="2133000" cy="364320"/>
           </a:xfrm>
           <a:prstGeom prst="rect">
             <a:avLst/>
@@ -1957,6 +3865,9 @@
                 <a:spcPct val="100000"/>
               </a:lnSpc>
               <a:buNone/>
+              <a:tabLst>
+                <a:tab algn="l" pos="0"/>
+              </a:tabLst>
               <a:defRPr lang="en-US" sz="1200" b="0" u="none" strike="noStrike">
                 <a:solidFill>
                   <a:schemeClr val="dk1">
@@ -1975,8 +3886,11 @@
                 <a:spcPct val="100000"/>
               </a:lnSpc>
               <a:buNone/>
-            </a:pPr>
-            <a:fld id="{72EBF4A4-E30D-4D70-8632-736DD4B91873}" type="slidenum">
+              <a:tabLst>
+                <a:tab algn="l" pos="0"/>
+              </a:tabLst>
+            </a:pPr>
+            <a:fld id="{EB7C228A-328E-492F-9515-4E6B3750AFB3}" type="slidenum">
               <a:rPr lang="en-US" sz="1200" b="0" u="none" strike="noStrike">
                 <a:solidFill>
                   <a:schemeClr val="dk1">
@@ -2005,7 +3919,7 @@
 </p:sldLayout>
 </file>
 
-<file path=ppt/slideLayouts/slideLayout3.xml><?xml version="1.0" encoding="utf-8"?>
+<file path=ppt/slideLayouts/slideLayout6.xml><?xml version="1.0" encoding="utf-8"?>
 <p:sldLayout xmlns:a="http://schemas.openxmlformats.org/drawingml/2006/main" xmlns:p="http://schemas.openxmlformats.org/presentationml/2006/main" xmlns:r="http://schemas.openxmlformats.org/officeDocument/2006/relationships" xmlns:p14="http://schemas.microsoft.com/office/powerpoint/2010/main" xmlns:p15="http://schemas.microsoft.com/office/powerpoint/2012/main" xmlns:mc="http://schemas.openxmlformats.org/markup-compatibility/2006" type="vertTitleAndTx" preserve="1">
   <p:cSld name="Vertical Title and Text">
     <p:bg>
@@ -2031,7 +3945,7 @@
       </p:grpSpPr>
       <p:sp>
         <p:nvSpPr>
-          <p:cNvPr id="11" name="PlaceHolder 1"/>
+          <p:cNvPr id="28" name="PlaceHolder 1"/>
           <p:cNvSpPr>
             <a:spLocks noGrp="1"/>
           </p:cNvSpPr>
@@ -2042,7 +3956,7 @@
         <p:spPr>
           <a:xfrm>
             <a:off x="6629400" y="274680"/>
-            <a:ext cx="2057040" cy="5851080"/>
+            <a:ext cx="2056680" cy="5850720"/>
           </a:xfrm>
           <a:prstGeom prst="rect">
             <a:avLst/>
@@ -2062,6 +3976,9 @@
                 <a:spcPct val="100000"/>
               </a:lnSpc>
               <a:buNone/>
+              <a:tabLst>
+                <a:tab algn="l" pos="0"/>
+              </a:tabLst>
             </a:pPr>
             <a:r>
               <a:rPr lang="en-US" sz="4400" b="0" u="none" strike="noStrike">
@@ -2076,18 +3993,18 @@
             </a:r>
             <a:endParaRPr lang="en-US" sz="4400" b="0" u="none" strike="noStrike">
               <a:solidFill>
-                <a:schemeClr val="dk1"/>
-              </a:solidFill>
-              <a:effectLst/>
-              <a:uFillTx/>
-              <a:latin typeface="Calibri"/>
+                <a:srgbClr val="000000"/>
+              </a:solidFill>
+              <a:effectLst/>
+              <a:uFillTx/>
+              <a:latin typeface="Arial"/>
             </a:endParaRPr>
           </a:p>
         </p:txBody>
       </p:sp>
       <p:sp>
         <p:nvSpPr>
-          <p:cNvPr id="12" name="PlaceHolder 2"/>
+          <p:cNvPr id="29" name="PlaceHolder 2"/>
           <p:cNvSpPr>
             <a:spLocks noGrp="1"/>
           </p:cNvSpPr>
@@ -2098,7 +4015,7 @@
         <p:spPr>
           <a:xfrm>
             <a:off x="457200" y="274680"/>
-            <a:ext cx="6019560" cy="5851080"/>
+            <a:ext cx="6019200" cy="5850720"/>
           </a:xfrm>
           <a:prstGeom prst="rect">
             <a:avLst/>
@@ -2139,11 +4056,11 @@
             </a:r>
             <a:endParaRPr lang="en-US" sz="3200" b="0" u="none" strike="noStrike">
               <a:solidFill>
-                <a:schemeClr val="dk1"/>
-              </a:solidFill>
-              <a:effectLst/>
-              <a:uFillTx/>
-              <a:latin typeface="Calibri"/>
+                <a:srgbClr val="000000"/>
+              </a:solidFill>
+              <a:effectLst/>
+              <a:uFillTx/>
+              <a:latin typeface="Arial"/>
             </a:endParaRPr>
           </a:p>
           <a:p>
@@ -2173,11 +4090,11 @@
             </a:r>
             <a:endParaRPr lang="en-US" sz="2800" b="0" u="none" strike="noStrike">
               <a:solidFill>
-                <a:schemeClr val="dk1"/>
-              </a:solidFill>
-              <a:effectLst/>
-              <a:uFillTx/>
-              <a:latin typeface="Calibri"/>
+                <a:srgbClr val="000000"/>
+              </a:solidFill>
+              <a:effectLst/>
+              <a:uFillTx/>
+              <a:latin typeface="Arial"/>
             </a:endParaRPr>
           </a:p>
           <a:p>
@@ -2207,11 +4124,11 @@
             </a:r>
             <a:endParaRPr lang="en-US" sz="2400" b="0" u="none" strike="noStrike">
               <a:solidFill>
-                <a:schemeClr val="dk1"/>
-              </a:solidFill>
-              <a:effectLst/>
-              <a:uFillTx/>
-              <a:latin typeface="Calibri"/>
+                <a:srgbClr val="000000"/>
+              </a:solidFill>
+              <a:effectLst/>
+              <a:uFillTx/>
+              <a:latin typeface="Arial"/>
             </a:endParaRPr>
           </a:p>
           <a:p>
@@ -2241,11 +4158,11 @@
             </a:r>
             <a:endParaRPr lang="en-US" sz="2000" b="0" u="none" strike="noStrike">
               <a:solidFill>
-                <a:schemeClr val="dk1"/>
-              </a:solidFill>
-              <a:effectLst/>
-              <a:uFillTx/>
-              <a:latin typeface="Calibri"/>
+                <a:srgbClr val="000000"/>
+              </a:solidFill>
+              <a:effectLst/>
+              <a:uFillTx/>
+              <a:latin typeface="Arial"/>
             </a:endParaRPr>
           </a:p>
           <a:p>
@@ -2275,29 +4192,29 @@
             </a:r>
             <a:endParaRPr lang="en-US" sz="2000" b="0" u="none" strike="noStrike">
               <a:solidFill>
-                <a:schemeClr val="dk1"/>
-              </a:solidFill>
-              <a:effectLst/>
-              <a:uFillTx/>
-              <a:latin typeface="Calibri"/>
+                <a:srgbClr val="000000"/>
+              </a:solidFill>
+              <a:effectLst/>
+              <a:uFillTx/>
+              <a:latin typeface="Arial"/>
             </a:endParaRPr>
           </a:p>
         </p:txBody>
       </p:sp>
       <p:sp>
         <p:nvSpPr>
-          <p:cNvPr id="13" name="PlaceHolder 3"/>
+          <p:cNvPr id="30" name="PlaceHolder 3"/>
           <p:cNvSpPr>
             <a:spLocks noGrp="1"/>
           </p:cNvSpPr>
           <p:nvPr>
-            <p:ph type="dt" idx="7"/>
+            <p:ph type="dt" idx="16"/>
           </p:nvPr>
         </p:nvSpPr>
         <p:spPr>
           <a:xfrm>
             <a:off x="457200" y="6356520"/>
-            <a:ext cx="2133360" cy="364680"/>
+            <a:ext cx="2133000" cy="364320"/>
           </a:xfrm>
           <a:prstGeom prst="rect">
             <a:avLst/>
@@ -2317,6 +4234,9 @@
                 <a:spcPct val="100000"/>
               </a:lnSpc>
               <a:buNone/>
+              <a:tabLst>
+                <a:tab algn="l" pos="0"/>
+              </a:tabLst>
               <a:defRPr lang="en-US" sz="1200" b="0" u="none" strike="noStrike">
                 <a:solidFill>
                   <a:schemeClr val="dk1">
@@ -2335,6 +4255,9 @@
                 <a:spcPct val="100000"/>
               </a:lnSpc>
               <a:buNone/>
+              <a:tabLst>
+                <a:tab algn="l" pos="0"/>
+              </a:tabLst>
             </a:pPr>
             <a:r>
               <a:rPr lang="en-US" sz="1200" b="0" u="none" strike="noStrike">
@@ -2362,18 +4285,18 @@
       </p:sp>
       <p:sp>
         <p:nvSpPr>
-          <p:cNvPr id="14" name="PlaceHolder 4"/>
+          <p:cNvPr id="31" name="PlaceHolder 4"/>
           <p:cNvSpPr>
             <a:spLocks noGrp="1"/>
           </p:cNvSpPr>
           <p:nvPr>
-            <p:ph type="ftr" idx="8"/>
+            <p:ph type="ftr" idx="17"/>
           </p:nvPr>
         </p:nvSpPr>
         <p:spPr>
           <a:xfrm>
             <a:off x="3124080" y="6356520"/>
-            <a:ext cx="2895120" cy="364680"/>
+            <a:ext cx="2894760" cy="364320"/>
           </a:xfrm>
           <a:prstGeom prst="rect">
             <a:avLst/>
@@ -2389,7 +4312,13 @@
           </a:bodyPr>
           <a:lstStyle>
             <a:lvl1pPr indent="0" algn="ctr">
-              <a:buNone/>
+              <a:lnSpc>
+                <a:spcPct val="100000"/>
+              </a:lnSpc>
+              <a:buNone/>
+              <a:tabLst>
+                <a:tab algn="l" pos="0"/>
+              </a:tabLst>
               <a:defRPr lang="en-US" sz="1400" b="0" u="none" strike="noStrike">
                 <a:solidFill>
                   <a:srgbClr val="000000"/>
@@ -2402,7 +4331,13 @@
           </a:lstStyle>
           <a:p>
             <a:pPr indent="0" algn="ctr">
-              <a:buNone/>
+              <a:lnSpc>
+                <a:spcPct val="100000"/>
+              </a:lnSpc>
+              <a:buNone/>
+              <a:tabLst>
+                <a:tab algn="l" pos="0"/>
+              </a:tabLst>
             </a:pPr>
             <a:r>
               <a:rPr lang="en-US" sz="1400" b="0" u="none" strike="noStrike">
@@ -2428,18 +4363,18 @@
       </p:sp>
       <p:sp>
         <p:nvSpPr>
-          <p:cNvPr id="15" name="PlaceHolder 5"/>
+          <p:cNvPr id="32" name="PlaceHolder 5"/>
           <p:cNvSpPr>
             <a:spLocks noGrp="1"/>
           </p:cNvSpPr>
           <p:nvPr>
-            <p:ph type="sldNum" idx="9"/>
+            <p:ph type="sldNum" idx="18"/>
           </p:nvPr>
         </p:nvSpPr>
         <p:spPr>
           <a:xfrm>
             <a:off x="6553080" y="6356520"/>
-            <a:ext cx="2133360" cy="364680"/>
+            <a:ext cx="2133000" cy="364320"/>
           </a:xfrm>
           <a:prstGeom prst="rect">
             <a:avLst/>
@@ -2459,6 +4394,9 @@
                 <a:spcPct val="100000"/>
               </a:lnSpc>
               <a:buNone/>
+              <a:tabLst>
+                <a:tab algn="l" pos="0"/>
+              </a:tabLst>
               <a:defRPr lang="en-US" sz="1200" b="0" u="none" strike="noStrike">
                 <a:solidFill>
                   <a:schemeClr val="dk1">
@@ -2477,8 +4415,11 @@
                 <a:spcPct val="100000"/>
               </a:lnSpc>
               <a:buNone/>
-            </a:pPr>
-            <a:fld id="{92D8AA92-B8D1-4F7C-BF2F-DE20766110C6}" type="slidenum">
+              <a:tabLst>
+                <a:tab algn="l" pos="0"/>
+              </a:tabLst>
+            </a:pPr>
+            <a:fld id="{B391C3FA-59C7-4E54-BE3D-A9593AD145BF}" type="slidenum">
               <a:rPr lang="en-US" sz="1200" b="0" u="none" strike="noStrike">
                 <a:solidFill>
                   <a:schemeClr val="dk1">
@@ -2507,7 +4448,7 @@
 </p:sldLayout>
 </file>
 
-<file path=ppt/slideLayouts/slideLayout4.xml><?xml version="1.0" encoding="utf-8"?>
+<file path=ppt/slideLayouts/slideLayout7.xml><?xml version="1.0" encoding="utf-8"?>
 <p:sldLayout xmlns:a="http://schemas.openxmlformats.org/drawingml/2006/main" xmlns:p="http://schemas.openxmlformats.org/presentationml/2006/main" xmlns:r="http://schemas.openxmlformats.org/officeDocument/2006/relationships" xmlns:p14="http://schemas.microsoft.com/office/powerpoint/2010/main" xmlns:p15="http://schemas.microsoft.com/office/powerpoint/2012/main" xmlns:mc="http://schemas.openxmlformats.org/markup-compatibility/2006" type="obj" preserve="1">
   <p:cSld name="Title and Content">
     <p:bg>
@@ -2533,7 +4474,7 @@
       </p:grpSpPr>
       <p:sp>
         <p:nvSpPr>
-          <p:cNvPr id="16" name="PlaceHolder 1"/>
+          <p:cNvPr id="33" name="PlaceHolder 1"/>
           <p:cNvSpPr>
             <a:spLocks noGrp="1"/>
           </p:cNvSpPr>
@@ -2544,7 +4485,7 @@
         <p:spPr>
           <a:xfrm>
             <a:off x="457200" y="274680"/>
-            <a:ext cx="8229240" cy="1142640"/>
+            <a:ext cx="8228880" cy="1142280"/>
           </a:xfrm>
           <a:prstGeom prst="rect">
             <a:avLst/>
@@ -2564,6 +4505,9 @@
                 <a:spcPct val="100000"/>
               </a:lnSpc>
               <a:buNone/>
+              <a:tabLst>
+                <a:tab algn="l" pos="0"/>
+              </a:tabLst>
             </a:pPr>
             <a:r>
               <a:rPr lang="en-US" sz="4400" b="0" u="none" strike="noStrike">
@@ -2578,18 +4522,18 @@
             </a:r>
             <a:endParaRPr lang="en-US" sz="4400" b="0" u="none" strike="noStrike">
               <a:solidFill>
-                <a:schemeClr val="dk1"/>
-              </a:solidFill>
-              <a:effectLst/>
-              <a:uFillTx/>
-              <a:latin typeface="Calibri"/>
+                <a:srgbClr val="000000"/>
+              </a:solidFill>
+              <a:effectLst/>
+              <a:uFillTx/>
+              <a:latin typeface="Arial"/>
             </a:endParaRPr>
           </a:p>
         </p:txBody>
       </p:sp>
       <p:sp>
         <p:nvSpPr>
-          <p:cNvPr id="17" name="PlaceHolder 2"/>
+          <p:cNvPr id="34" name="PlaceHolder 2"/>
           <p:cNvSpPr>
             <a:spLocks noGrp="1"/>
           </p:cNvSpPr>
@@ -2600,7 +4544,7 @@
         <p:spPr>
           <a:xfrm>
             <a:off x="457200" y="1600200"/>
-            <a:ext cx="8229240" cy="4525560"/>
+            <a:ext cx="8228880" cy="4525200"/>
           </a:xfrm>
           <a:prstGeom prst="rect">
             <a:avLst/>
@@ -2641,11 +4585,11 @@
             </a:r>
             <a:endParaRPr lang="en-US" sz="3200" b="0" u="none" strike="noStrike">
               <a:solidFill>
-                <a:schemeClr val="dk1"/>
-              </a:solidFill>
-              <a:effectLst/>
-              <a:uFillTx/>
-              <a:latin typeface="Calibri"/>
+                <a:srgbClr val="000000"/>
+              </a:solidFill>
+              <a:effectLst/>
+              <a:uFillTx/>
+              <a:latin typeface="Arial"/>
             </a:endParaRPr>
           </a:p>
           <a:p>
@@ -2675,11 +4619,11 @@
             </a:r>
             <a:endParaRPr lang="en-US" sz="2800" b="0" u="none" strike="noStrike">
               <a:solidFill>
-                <a:schemeClr val="dk1"/>
-              </a:solidFill>
-              <a:effectLst/>
-              <a:uFillTx/>
-              <a:latin typeface="Calibri"/>
+                <a:srgbClr val="000000"/>
+              </a:solidFill>
+              <a:effectLst/>
+              <a:uFillTx/>
+              <a:latin typeface="Arial"/>
             </a:endParaRPr>
           </a:p>
           <a:p>
@@ -2709,11 +4653,11 @@
             </a:r>
             <a:endParaRPr lang="en-US" sz="2400" b="0" u="none" strike="noStrike">
               <a:solidFill>
-                <a:schemeClr val="dk1"/>
-              </a:solidFill>
-              <a:effectLst/>
-              <a:uFillTx/>
-              <a:latin typeface="Calibri"/>
+                <a:srgbClr val="000000"/>
+              </a:solidFill>
+              <a:effectLst/>
+              <a:uFillTx/>
+              <a:latin typeface="Arial"/>
             </a:endParaRPr>
           </a:p>
           <a:p>
@@ -2743,11 +4687,11 @@
             </a:r>
             <a:endParaRPr lang="en-US" sz="2000" b="0" u="none" strike="noStrike">
               <a:solidFill>
-                <a:schemeClr val="dk1"/>
-              </a:solidFill>
-              <a:effectLst/>
-              <a:uFillTx/>
-              <a:latin typeface="Calibri"/>
+                <a:srgbClr val="000000"/>
+              </a:solidFill>
+              <a:effectLst/>
+              <a:uFillTx/>
+              <a:latin typeface="Arial"/>
             </a:endParaRPr>
           </a:p>
           <a:p>
@@ -2777,29 +4721,29 @@
             </a:r>
             <a:endParaRPr lang="en-US" sz="2000" b="0" u="none" strike="noStrike">
               <a:solidFill>
-                <a:schemeClr val="dk1"/>
-              </a:solidFill>
-              <a:effectLst/>
-              <a:uFillTx/>
-              <a:latin typeface="Calibri"/>
+                <a:srgbClr val="000000"/>
+              </a:solidFill>
+              <a:effectLst/>
+              <a:uFillTx/>
+              <a:latin typeface="Arial"/>
             </a:endParaRPr>
           </a:p>
         </p:txBody>
       </p:sp>
       <p:sp>
         <p:nvSpPr>
-          <p:cNvPr id="18" name="PlaceHolder 3"/>
+          <p:cNvPr id="35" name="PlaceHolder 3"/>
           <p:cNvSpPr>
             <a:spLocks noGrp="1"/>
           </p:cNvSpPr>
           <p:nvPr>
-            <p:ph type="dt" idx="10"/>
+            <p:ph type="dt" idx="19"/>
           </p:nvPr>
         </p:nvSpPr>
         <p:spPr>
           <a:xfrm>
             <a:off x="457200" y="6356520"/>
-            <a:ext cx="2133360" cy="364680"/>
+            <a:ext cx="2133000" cy="364320"/>
           </a:xfrm>
           <a:prstGeom prst="rect">
             <a:avLst/>
@@ -2819,6 +4763,9 @@
                 <a:spcPct val="100000"/>
               </a:lnSpc>
               <a:buNone/>
+              <a:tabLst>
+                <a:tab algn="l" pos="0"/>
+              </a:tabLst>
               <a:defRPr lang="en-US" sz="1200" b="0" u="none" strike="noStrike">
                 <a:solidFill>
                   <a:schemeClr val="dk1">
@@ -2837,6 +4784,9 @@
                 <a:spcPct val="100000"/>
               </a:lnSpc>
               <a:buNone/>
+              <a:tabLst>
+                <a:tab algn="l" pos="0"/>
+              </a:tabLst>
             </a:pPr>
             <a:r>
               <a:rPr lang="en-US" sz="1200" b="0" u="none" strike="noStrike">
@@ -2864,18 +4814,18 @@
       </p:sp>
       <p:sp>
         <p:nvSpPr>
-          <p:cNvPr id="19" name="PlaceHolder 4"/>
+          <p:cNvPr id="36" name="PlaceHolder 4"/>
           <p:cNvSpPr>
             <a:spLocks noGrp="1"/>
           </p:cNvSpPr>
           <p:nvPr>
-            <p:ph type="ftr" idx="11"/>
+            <p:ph type="ftr" idx="20"/>
           </p:nvPr>
         </p:nvSpPr>
         <p:spPr>
           <a:xfrm>
             <a:off x="3124080" y="6356520"/>
-            <a:ext cx="2895120" cy="364680"/>
+            <a:ext cx="2894760" cy="364320"/>
           </a:xfrm>
           <a:prstGeom prst="rect">
             <a:avLst/>
@@ -2891,7 +4841,13 @@
           </a:bodyPr>
           <a:lstStyle>
             <a:lvl1pPr indent="0" algn="ctr">
-              <a:buNone/>
+              <a:lnSpc>
+                <a:spcPct val="100000"/>
+              </a:lnSpc>
+              <a:buNone/>
+              <a:tabLst>
+                <a:tab algn="l" pos="0"/>
+              </a:tabLst>
               <a:defRPr lang="en-US" sz="1400" b="0" u="none" strike="noStrike">
                 <a:solidFill>
                   <a:srgbClr val="000000"/>
@@ -2904,7 +4860,13 @@
           </a:lstStyle>
           <a:p>
             <a:pPr indent="0" algn="ctr">
-              <a:buNone/>
+              <a:lnSpc>
+                <a:spcPct val="100000"/>
+              </a:lnSpc>
+              <a:buNone/>
+              <a:tabLst>
+                <a:tab algn="l" pos="0"/>
+              </a:tabLst>
             </a:pPr>
             <a:r>
               <a:rPr lang="en-US" sz="1400" b="0" u="none" strike="noStrike">
@@ -2930,18 +4892,18 @@
       </p:sp>
       <p:sp>
         <p:nvSpPr>
-          <p:cNvPr id="20" name="PlaceHolder 5"/>
+          <p:cNvPr id="37" name="PlaceHolder 5"/>
           <p:cNvSpPr>
             <a:spLocks noGrp="1"/>
           </p:cNvSpPr>
           <p:nvPr>
-            <p:ph type="sldNum" idx="12"/>
+            <p:ph type="sldNum" idx="21"/>
           </p:nvPr>
         </p:nvSpPr>
         <p:spPr>
           <a:xfrm>
             <a:off x="6553080" y="6356520"/>
-            <a:ext cx="2133360" cy="364680"/>
+            <a:ext cx="2133000" cy="364320"/>
           </a:xfrm>
           <a:prstGeom prst="rect">
             <a:avLst/>
@@ -2961,6 +4923,9 @@
                 <a:spcPct val="100000"/>
               </a:lnSpc>
               <a:buNone/>
+              <a:tabLst>
+                <a:tab algn="l" pos="0"/>
+              </a:tabLst>
               <a:defRPr lang="en-US" sz="1200" b="0" u="none" strike="noStrike">
                 <a:solidFill>
                   <a:schemeClr val="dk1">
@@ -2979,8 +4944,11 @@
                 <a:spcPct val="100000"/>
               </a:lnSpc>
               <a:buNone/>
-            </a:pPr>
-            <a:fld id="{8DB1956E-50C4-4ABD-98CD-888818AB3212}" type="slidenum">
+              <a:tabLst>
+                <a:tab algn="l" pos="0"/>
+              </a:tabLst>
+            </a:pPr>
+            <a:fld id="{AA74030E-831A-4A01-AC67-418EA6B127E9}" type="slidenum">
               <a:rPr lang="en-US" sz="1200" b="0" u="none" strike="noStrike">
                 <a:solidFill>
                   <a:schemeClr val="dk1">
@@ -3009,7 +4977,7 @@
 </p:sldLayout>
 </file>
 
-<file path=ppt/slideLayouts/slideLayout5.xml><?xml version="1.0" encoding="utf-8"?>
+<file path=ppt/slideLayouts/slideLayout8.xml><?xml version="1.0" encoding="utf-8"?>
 <p:sldLayout xmlns:a="http://schemas.openxmlformats.org/drawingml/2006/main" xmlns:p="http://schemas.openxmlformats.org/presentationml/2006/main" xmlns:r="http://schemas.openxmlformats.org/officeDocument/2006/relationships" xmlns:p14="http://schemas.microsoft.com/office/powerpoint/2010/main" xmlns:p15="http://schemas.microsoft.com/office/powerpoint/2012/main" xmlns:mc="http://schemas.openxmlformats.org/markup-compatibility/2006" type="blank" preserve="1">
   <p:cSld name="Section Header">
     <p:bg>
@@ -3035,7 +5003,7 @@
       </p:grpSpPr>
       <p:sp>
         <p:nvSpPr>
-          <p:cNvPr id="21" name="PlaceHolder 1"/>
+          <p:cNvPr id="38" name="PlaceHolder 1"/>
           <p:cNvSpPr>
             <a:spLocks noGrp="1"/>
           </p:cNvSpPr>
@@ -3046,7 +5014,7 @@
         <p:spPr>
           <a:xfrm>
             <a:off x="722160" y="4406760"/>
-            <a:ext cx="7772040" cy="1361880"/>
+            <a:ext cx="7771680" cy="1361520"/>
           </a:xfrm>
           <a:prstGeom prst="rect">
             <a:avLst/>
@@ -3066,6 +5034,9 @@
                 <a:spcPct val="100000"/>
               </a:lnSpc>
               <a:buNone/>
+              <a:tabLst>
+                <a:tab algn="l" pos="0"/>
+              </a:tabLst>
             </a:pPr>
             <a:r>
               <a:rPr lang="en-US" sz="4000" b="1" u="none" strike="noStrike" cap="all">
@@ -3080,18 +5051,18 @@
             </a:r>
             <a:endParaRPr lang="en-US" sz="4000" b="0" u="none" strike="noStrike">
               <a:solidFill>
-                <a:schemeClr val="dk1"/>
-              </a:solidFill>
-              <a:effectLst/>
-              <a:uFillTx/>
-              <a:latin typeface="Calibri"/>
+                <a:srgbClr val="000000"/>
+              </a:solidFill>
+              <a:effectLst/>
+              <a:uFillTx/>
+              <a:latin typeface="Arial"/>
             </a:endParaRPr>
           </a:p>
         </p:txBody>
       </p:sp>
       <p:sp>
         <p:nvSpPr>
-          <p:cNvPr id="22" name="PlaceHolder 2"/>
+          <p:cNvPr id="39" name="PlaceHolder 2"/>
           <p:cNvSpPr>
             <a:spLocks noGrp="1"/>
           </p:cNvSpPr>
@@ -3102,7 +5073,7 @@
         <p:spPr>
           <a:xfrm>
             <a:off x="722160" y="2906640"/>
-            <a:ext cx="7772040" cy="1499760"/>
+            <a:ext cx="7771680" cy="1499400"/>
           </a:xfrm>
           <a:prstGeom prst="rect">
             <a:avLst/>
@@ -3144,29 +5115,29 @@
             </a:r>
             <a:endParaRPr lang="en-US" sz="2000" b="0" u="none" strike="noStrike">
               <a:solidFill>
-                <a:schemeClr val="dk1"/>
-              </a:solidFill>
-              <a:effectLst/>
-              <a:uFillTx/>
-              <a:latin typeface="Calibri"/>
+                <a:srgbClr val="000000"/>
+              </a:solidFill>
+              <a:effectLst/>
+              <a:uFillTx/>
+              <a:latin typeface="Arial"/>
             </a:endParaRPr>
           </a:p>
         </p:txBody>
       </p:sp>
       <p:sp>
         <p:nvSpPr>
-          <p:cNvPr id="23" name="PlaceHolder 3"/>
+          <p:cNvPr id="40" name="PlaceHolder 3"/>
           <p:cNvSpPr>
             <a:spLocks noGrp="1"/>
           </p:cNvSpPr>
           <p:nvPr>
-            <p:ph type="dt" idx="13"/>
+            <p:ph type="dt" idx="22"/>
           </p:nvPr>
         </p:nvSpPr>
         <p:spPr>
           <a:xfrm>
             <a:off x="457200" y="6356520"/>
-            <a:ext cx="2133360" cy="364680"/>
+            <a:ext cx="2133000" cy="364320"/>
           </a:xfrm>
           <a:prstGeom prst="rect">
             <a:avLst/>
@@ -3186,6 +5157,9 @@
                 <a:spcPct val="100000"/>
               </a:lnSpc>
               <a:buNone/>
+              <a:tabLst>
+                <a:tab algn="l" pos="0"/>
+              </a:tabLst>
               <a:defRPr lang="en-US" sz="1200" b="0" u="none" strike="noStrike">
                 <a:solidFill>
                   <a:schemeClr val="dk1">
@@ -3204,6 +5178,9 @@
                 <a:spcPct val="100000"/>
               </a:lnSpc>
               <a:buNone/>
+              <a:tabLst>
+                <a:tab algn="l" pos="0"/>
+              </a:tabLst>
             </a:pPr>
             <a:r>
               <a:rPr lang="en-US" sz="1200" b="0" u="none" strike="noStrike">
@@ -3231,18 +5208,18 @@
       </p:sp>
       <p:sp>
         <p:nvSpPr>
-          <p:cNvPr id="24" name="PlaceHolder 4"/>
+          <p:cNvPr id="41" name="PlaceHolder 4"/>
           <p:cNvSpPr>
             <a:spLocks noGrp="1"/>
           </p:cNvSpPr>
           <p:nvPr>
-            <p:ph type="ftr" idx="14"/>
+            <p:ph type="ftr" idx="23"/>
           </p:nvPr>
         </p:nvSpPr>
         <p:spPr>
           <a:xfrm>
             <a:off x="3124080" y="6356520"/>
-            <a:ext cx="2895120" cy="364680"/>
+            <a:ext cx="2894760" cy="364320"/>
           </a:xfrm>
           <a:prstGeom prst="rect">
             <a:avLst/>
@@ -3258,7 +5235,13 @@
           </a:bodyPr>
           <a:lstStyle>
             <a:lvl1pPr indent="0" algn="ctr">
-              <a:buNone/>
+              <a:lnSpc>
+                <a:spcPct val="100000"/>
+              </a:lnSpc>
+              <a:buNone/>
+              <a:tabLst>
+                <a:tab algn="l" pos="0"/>
+              </a:tabLst>
               <a:defRPr lang="en-US" sz="1400" b="0" u="none" strike="noStrike">
                 <a:solidFill>
                   <a:srgbClr val="000000"/>
@@ -3271,7 +5254,13 @@
           </a:lstStyle>
           <a:p>
             <a:pPr indent="0" algn="ctr">
-              <a:buNone/>
+              <a:lnSpc>
+                <a:spcPct val="100000"/>
+              </a:lnSpc>
+              <a:buNone/>
+              <a:tabLst>
+                <a:tab algn="l" pos="0"/>
+              </a:tabLst>
             </a:pPr>
             <a:r>
               <a:rPr lang="en-US" sz="1400" b="0" u="none" strike="noStrike">
@@ -3297,18 +5286,18 @@
       </p:sp>
       <p:sp>
         <p:nvSpPr>
-          <p:cNvPr id="25" name="PlaceHolder 5"/>
+          <p:cNvPr id="42" name="PlaceHolder 5"/>
           <p:cNvSpPr>
             <a:spLocks noGrp="1"/>
           </p:cNvSpPr>
           <p:nvPr>
-            <p:ph type="sldNum" idx="15"/>
+            <p:ph type="sldNum" idx="24"/>
           </p:nvPr>
         </p:nvSpPr>
         <p:spPr>
           <a:xfrm>
             <a:off x="6553080" y="6356520"/>
-            <a:ext cx="2133360" cy="364680"/>
+            <a:ext cx="2133000" cy="364320"/>
           </a:xfrm>
           <a:prstGeom prst="rect">
             <a:avLst/>
@@ -3328,6 +5317,9 @@
                 <a:spcPct val="100000"/>
               </a:lnSpc>
               <a:buNone/>
+              <a:tabLst>
+                <a:tab algn="l" pos="0"/>
+              </a:tabLst>
               <a:defRPr lang="en-US" sz="1200" b="0" u="none" strike="noStrike">
                 <a:solidFill>
                   <a:schemeClr val="dk1">
@@ -3346,8 +5338,11 @@
                 <a:spcPct val="100000"/>
               </a:lnSpc>
               <a:buNone/>
-            </a:pPr>
-            <a:fld id="{E3C3698E-2761-4B03-9FDD-8BA84B5ABFBD}" type="slidenum">
+              <a:tabLst>
+                <a:tab algn="l" pos="0"/>
+              </a:tabLst>
+            </a:pPr>
+            <a:fld id="{E9925884-0C91-4169-B47A-902925844B7F}" type="slidenum">
               <a:rPr lang="en-US" sz="1200" b="0" u="none" strike="noStrike">
                 <a:solidFill>
                   <a:schemeClr val="dk1">
@@ -3376,7 +5371,7 @@
 </p:sldLayout>
 </file>
 
-<file path=ppt/slideLayouts/slideLayout6.xml><?xml version="1.0" encoding="utf-8"?>
+<file path=ppt/slideLayouts/slideLayout9.xml><?xml version="1.0" encoding="utf-8"?>
 <p:sldLayout xmlns:a="http://schemas.openxmlformats.org/drawingml/2006/main" xmlns:p="http://schemas.openxmlformats.org/presentationml/2006/main" xmlns:r="http://schemas.openxmlformats.org/officeDocument/2006/relationships" xmlns:p14="http://schemas.microsoft.com/office/powerpoint/2010/main" xmlns:p15="http://schemas.microsoft.com/office/powerpoint/2012/main" xmlns:mc="http://schemas.openxmlformats.org/markup-compatibility/2006" type="twoObj" preserve="1">
   <p:cSld name="Two Content">
     <p:bg>
@@ -3402,7 +5397,7 @@
       </p:grpSpPr>
       <p:sp>
         <p:nvSpPr>
-          <p:cNvPr id="26" name="PlaceHolder 1"/>
+          <p:cNvPr id="43" name="PlaceHolder 1"/>
           <p:cNvSpPr>
             <a:spLocks noGrp="1"/>
           </p:cNvSpPr>
@@ -3413,7 +5408,7 @@
         <p:spPr>
           <a:xfrm>
             <a:off x="457200" y="274680"/>
-            <a:ext cx="8229240" cy="1142640"/>
+            <a:ext cx="8228880" cy="1142280"/>
           </a:xfrm>
           <a:prstGeom prst="rect">
             <a:avLst/>
@@ -3433,6 +5428,9 @@
                 <a:spcPct val="100000"/>
               </a:lnSpc>
               <a:buNone/>
+              <a:tabLst>
+                <a:tab algn="l" pos="0"/>
+              </a:tabLst>
             </a:pPr>
             <a:r>
               <a:rPr lang="en-US" sz="4400" b="0" u="none" strike="noStrike">
@@ -3447,18 +5445,18 @@
             </a:r>
             <a:endParaRPr lang="en-US" sz="4400" b="0" u="none" strike="noStrike">
               <a:solidFill>
-                <a:schemeClr val="dk1"/>
-              </a:solidFill>
-              <a:effectLst/>
-              <a:uFillTx/>
-              <a:latin typeface="Calibri"/>
+                <a:srgbClr val="000000"/>
+              </a:solidFill>
+              <a:effectLst/>
+              <a:uFillTx/>
+              <a:latin typeface="Arial"/>
             </a:endParaRPr>
           </a:p>
         </p:txBody>
       </p:sp>
       <p:sp>
         <p:nvSpPr>
-          <p:cNvPr id="27" name="PlaceHolder 2"/>
+          <p:cNvPr id="44" name="PlaceHolder 2"/>
           <p:cNvSpPr>
             <a:spLocks noGrp="1"/>
           </p:cNvSpPr>
@@ -3469,7 +5467,7 @@
         <p:spPr>
           <a:xfrm>
             <a:off x="457200" y="1600200"/>
-            <a:ext cx="4038120" cy="4525560"/>
+            <a:ext cx="4037760" cy="4525200"/>
           </a:xfrm>
           <a:prstGeom prst="rect">
             <a:avLst/>
@@ -3510,11 +5508,11 @@
             </a:r>
             <a:endParaRPr lang="en-US" sz="2800" b="0" u="none" strike="noStrike">
               <a:solidFill>
-                <a:schemeClr val="dk1"/>
-              </a:solidFill>
-              <a:effectLst/>
-              <a:uFillTx/>
-              <a:latin typeface="Calibri"/>
+                <a:srgbClr val="000000"/>
+              </a:solidFill>
+              <a:effectLst/>
+              <a:uFillTx/>
+              <a:latin typeface="Arial"/>
             </a:endParaRPr>
           </a:p>
           <a:p>
@@ -3544,11 +5542,11 @@
             </a:r>
             <a:endParaRPr lang="en-US" sz="2400" b="0" u="none" strike="noStrike">
               <a:solidFill>
-                <a:schemeClr val="dk1"/>
-              </a:solidFill>
-              <a:effectLst/>
-              <a:uFillTx/>
-              <a:latin typeface="Calibri"/>
+                <a:srgbClr val="000000"/>
+              </a:solidFill>
+              <a:effectLst/>
+              <a:uFillTx/>
+              <a:latin typeface="Arial"/>
             </a:endParaRPr>
           </a:p>
           <a:p>
@@ -3578,11 +5576,11 @@
             </a:r>
             <a:endParaRPr lang="en-US" sz="2000" b="0" u="none" strike="noStrike">
               <a:solidFill>
-                <a:schemeClr val="dk1"/>
-              </a:solidFill>
-              <a:effectLst/>
-              <a:uFillTx/>
-              <a:latin typeface="Calibri"/>
+                <a:srgbClr val="000000"/>
+              </a:solidFill>
+              <a:effectLst/>
+              <a:uFillTx/>
+              <a:latin typeface="Arial"/>
             </a:endParaRPr>
           </a:p>
           <a:p>
@@ -3612,11 +5610,11 @@
             </a:r>
             <a:endParaRPr lang="en-US" sz="1800" b="0" u="none" strike="noStrike">
               <a:solidFill>
-                <a:schemeClr val="dk1"/>
-              </a:solidFill>
-              <a:effectLst/>
-              <a:uFillTx/>
-              <a:latin typeface="Calibri"/>
+                <a:srgbClr val="000000"/>
+              </a:solidFill>
+              <a:effectLst/>
+              <a:uFillTx/>
+              <a:latin typeface="Arial"/>
             </a:endParaRPr>
           </a:p>
           <a:p>
@@ -3646,18 +5644,18 @@
             </a:r>
             <a:endParaRPr lang="en-US" sz="1800" b="0" u="none" strike="noStrike">
               <a:solidFill>
-                <a:schemeClr val="dk1"/>
-              </a:solidFill>
-              <a:effectLst/>
-              <a:uFillTx/>
-              <a:latin typeface="Calibri"/>
+                <a:srgbClr val="000000"/>
+              </a:solidFill>
+              <a:effectLst/>
+              <a:uFillTx/>
+              <a:latin typeface="Arial"/>
             </a:endParaRPr>
           </a:p>
         </p:txBody>
       </p:sp>
       <p:sp>
         <p:nvSpPr>
-          <p:cNvPr id="28" name="PlaceHolder 3"/>
+          <p:cNvPr id="45" name="PlaceHolder 3"/>
           <p:cNvSpPr>
             <a:spLocks noGrp="1"/>
           </p:cNvSpPr>
@@ -3668,7 +5666,7 @@
         <p:spPr>
           <a:xfrm>
             <a:off x="4648320" y="1600200"/>
-            <a:ext cx="4038120" cy="4525560"/>
+            <a:ext cx="4037760" cy="4525200"/>
           </a:xfrm>
           <a:prstGeom prst="rect">
             <a:avLst/>
@@ -3709,11 +5707,11 @@
             </a:r>
             <a:endParaRPr lang="en-US" sz="2800" b="0" u="none" strike="noStrike">
               <a:solidFill>
-                <a:schemeClr val="dk1"/>
-              </a:solidFill>
-              <a:effectLst/>
-              <a:uFillTx/>
-              <a:latin typeface="Calibri"/>
+                <a:srgbClr val="000000"/>
+              </a:solidFill>
+              <a:effectLst/>
+              <a:uFillTx/>
+              <a:latin typeface="Arial"/>
             </a:endParaRPr>
           </a:p>
           <a:p>
@@ -3743,11 +5741,11 @@
             </a:r>
             <a:endParaRPr lang="en-US" sz="2400" b="0" u="none" strike="noStrike">
               <a:solidFill>
-                <a:schemeClr val="dk1"/>
-              </a:solidFill>
-              <a:effectLst/>
-              <a:uFillTx/>
-              <a:latin typeface="Calibri"/>
+                <a:srgbClr val="000000"/>
+              </a:solidFill>
+              <a:effectLst/>
+              <a:uFillTx/>
+              <a:latin typeface="Arial"/>
             </a:endParaRPr>
           </a:p>
           <a:p>
@@ -3777,11 +5775,11 @@
             </a:r>
             <a:endParaRPr lang="en-US" sz="2000" b="0" u="none" strike="noStrike">
               <a:solidFill>
-                <a:schemeClr val="dk1"/>
-              </a:solidFill>
-              <a:effectLst/>
-              <a:uFillTx/>
-              <a:latin typeface="Calibri"/>
+                <a:srgbClr val="000000"/>
+              </a:solidFill>
+              <a:effectLst/>
+              <a:uFillTx/>
+              <a:latin typeface="Arial"/>
             </a:endParaRPr>
           </a:p>
           <a:p>
@@ -3811,11 +5809,11 @@
             </a:r>
             <a:endParaRPr lang="en-US" sz="1800" b="0" u="none" strike="noStrike">
               <a:solidFill>
-                <a:schemeClr val="dk1"/>
-              </a:solidFill>
-              <a:effectLst/>
-              <a:uFillTx/>
-              <a:latin typeface="Calibri"/>
+                <a:srgbClr val="000000"/>
+              </a:solidFill>
+              <a:effectLst/>
+              <a:uFillTx/>
+              <a:latin typeface="Arial"/>
             </a:endParaRPr>
           </a:p>
           <a:p>
@@ -3845,29 +5843,29 @@
             </a:r>
             <a:endParaRPr lang="en-US" sz="1800" b="0" u="none" strike="noStrike">
               <a:solidFill>
-                <a:schemeClr val="dk1"/>
-              </a:solidFill>
-              <a:effectLst/>
-              <a:uFillTx/>
-              <a:latin typeface="Calibri"/>
+                <a:srgbClr val="000000"/>
+              </a:solidFill>
+              <a:effectLst/>
+              <a:uFillTx/>
+              <a:latin typeface="Arial"/>
             </a:endParaRPr>
           </a:p>
         </p:txBody>
       </p:sp>
       <p:sp>
         <p:nvSpPr>
-          <p:cNvPr id="29" name="PlaceHolder 4"/>
+          <p:cNvPr id="46" name="PlaceHolder 4"/>
           <p:cNvSpPr>
             <a:spLocks noGrp="1"/>
           </p:cNvSpPr>
           <p:nvPr>
-            <p:ph type="dt" idx="16"/>
+            <p:ph type="dt" idx="25"/>
           </p:nvPr>
         </p:nvSpPr>
         <p:spPr>
           <a:xfrm>
             <a:off x="457200" y="6356520"/>
-            <a:ext cx="2133360" cy="364680"/>
+            <a:ext cx="2133000" cy="364320"/>
           </a:xfrm>
           <a:prstGeom prst="rect">
             <a:avLst/>
@@ -3887,6 +5885,9 @@
                 <a:spcPct val="100000"/>
               </a:lnSpc>
               <a:buNone/>
+              <a:tabLst>
+                <a:tab algn="l" pos="0"/>
+              </a:tabLst>
               <a:defRPr lang="en-US" sz="1200" b="0" u="none" strike="noStrike">
                 <a:solidFill>
                   <a:schemeClr val="dk1">
@@ -3905,6 +5906,9 @@
                 <a:spcPct val="100000"/>
               </a:lnSpc>
               <a:buNone/>
+              <a:tabLst>
+                <a:tab algn="l" pos="0"/>
+              </a:tabLst>
             </a:pPr>
             <a:r>
               <a:rPr lang="en-US" sz="1200" b="0" u="none" strike="noStrike">
@@ -3932,18 +5936,18 @@
       </p:sp>
       <p:sp>
         <p:nvSpPr>
-          <p:cNvPr id="30" name="PlaceHolder 5"/>
+          <p:cNvPr id="47" name="PlaceHolder 5"/>
           <p:cNvSpPr>
             <a:spLocks noGrp="1"/>
           </p:cNvSpPr>
           <p:nvPr>
-            <p:ph type="ftr" idx="17"/>
+            <p:ph type="ftr" idx="26"/>
           </p:nvPr>
         </p:nvSpPr>
         <p:spPr>
           <a:xfrm>
             <a:off x="3124080" y="6356520"/>
-            <a:ext cx="2895120" cy="364680"/>
+            <a:ext cx="2894760" cy="364320"/>
           </a:xfrm>
           <a:prstGeom prst="rect">
             <a:avLst/>
@@ -3959,7 +5963,13 @@
           </a:bodyPr>
           <a:lstStyle>
             <a:lvl1pPr indent="0" algn="ctr">
-              <a:buNone/>
+              <a:lnSpc>
+                <a:spcPct val="100000"/>
+              </a:lnSpc>
+              <a:buNone/>
+              <a:tabLst>
+                <a:tab algn="l" pos="0"/>
+              </a:tabLst>
               <a:defRPr lang="en-US" sz="1400" b="0" u="none" strike="noStrike">
                 <a:solidFill>
                   <a:srgbClr val="000000"/>
@@ -3972,7 +5982,13 @@
           </a:lstStyle>
           <a:p>
             <a:pPr indent="0" algn="ctr">
-              <a:buNone/>
+              <a:lnSpc>
+                <a:spcPct val="100000"/>
+              </a:lnSpc>
+              <a:buNone/>
+              <a:tabLst>
+                <a:tab algn="l" pos="0"/>
+              </a:tabLst>
             </a:pPr>
             <a:r>
               <a:rPr lang="en-US" sz="1400" b="0" u="none" strike="noStrike">
@@ -3998,18 +6014,18 @@
       </p:sp>
       <p:sp>
         <p:nvSpPr>
-          <p:cNvPr id="31" name="PlaceHolder 6"/>
+          <p:cNvPr id="48" name="PlaceHolder 6"/>
           <p:cNvSpPr>
             <a:spLocks noGrp="1"/>
           </p:cNvSpPr>
           <p:nvPr>
-            <p:ph type="sldNum" idx="18"/>
+            <p:ph type="sldNum" idx="27"/>
           </p:nvPr>
         </p:nvSpPr>
         <p:spPr>
           <a:xfrm>
             <a:off x="6553080" y="6356520"/>
-            <a:ext cx="2133360" cy="364680"/>
+            <a:ext cx="2133000" cy="364320"/>
           </a:xfrm>
           <a:prstGeom prst="rect">
             <a:avLst/>
@@ -4029,6 +6045,9 @@
                 <a:spcPct val="100000"/>
               </a:lnSpc>
               <a:buNone/>
+              <a:tabLst>
+                <a:tab algn="l" pos="0"/>
+              </a:tabLst>
               <a:defRPr lang="en-US" sz="1200" b="0" u="none" strike="noStrike">
                 <a:solidFill>
                   <a:schemeClr val="dk1">
@@ -4047,8 +6066,11 @@
                 <a:spcPct val="100000"/>
               </a:lnSpc>
               <a:buNone/>
-            </a:pPr>
-            <a:fld id="{C66DDA4A-9165-4CCE-B044-A046A285FA6C}" type="slidenum">
+              <a:tabLst>
+                <a:tab algn="l" pos="0"/>
+              </a:tabLst>
+            </a:pPr>
+            <a:fld id="{E08626AD-EB31-481C-862C-1EE4DF0281DB}" type="slidenum">
               <a:rPr lang="en-US" sz="1200" b="0" u="none" strike="noStrike">
                 <a:solidFill>
                   <a:schemeClr val="dk1">
@@ -4068,1687 +6090,6 @@
               <a:effectLst/>
               <a:uFillTx/>
               <a:latin typeface="Times New Roman"/>
-            </a:endParaRPr>
-          </a:p>
-        </p:txBody>
-      </p:sp>
-    </p:spTree>
-  </p:cSld>
-</p:sldLayout>
-</file>
-
-<file path=ppt/slideLayouts/slideLayout7.xml><?xml version="1.0" encoding="utf-8"?>
-<p:sldLayout xmlns:a="http://schemas.openxmlformats.org/drawingml/2006/main" xmlns:p="http://schemas.openxmlformats.org/presentationml/2006/main" xmlns:r="http://schemas.openxmlformats.org/officeDocument/2006/relationships" xmlns:p14="http://schemas.microsoft.com/office/powerpoint/2010/main" xmlns:p15="http://schemas.microsoft.com/office/powerpoint/2012/main" xmlns:mc="http://schemas.openxmlformats.org/markup-compatibility/2006" type="blank" preserve="1">
-  <p:cSld name="Comparison">
-    <p:bg>
-      <p:bgPr>
-        <a:solidFill>
-          <a:srgbClr val="ffffff"/>
-        </a:solidFill>
-      </p:bgPr>
-    </p:bg>
-    <p:spTree>
-      <p:nvGrpSpPr>
-        <p:cNvPr id="1" name=""/>
-        <p:cNvGrpSpPr/>
-        <p:nvPr/>
-      </p:nvGrpSpPr>
-      <p:grpSpPr>
-        <a:xfrm>
-          <a:off x="0" y="0"/>
-          <a:ext cx="0" cy="0"/>
-          <a:chOff x="0" y="0"/>
-          <a:chExt cx="0" cy="0"/>
-        </a:xfrm>
-      </p:grpSpPr>
-      <p:sp>
-        <p:nvSpPr>
-          <p:cNvPr id="32" name="PlaceHolder 1"/>
-          <p:cNvSpPr>
-            <a:spLocks noGrp="1"/>
-          </p:cNvSpPr>
-          <p:nvPr>
-            <p:ph type="title"/>
-          </p:nvPr>
-        </p:nvSpPr>
-        <p:spPr>
-          <a:xfrm>
-            <a:off x="457200" y="274680"/>
-            <a:ext cx="8229240" cy="1142640"/>
-          </a:xfrm>
-          <a:prstGeom prst="rect">
-            <a:avLst/>
-          </a:prstGeom>
-          <a:noFill/>
-          <a:ln w="0">
-            <a:noFill/>
-          </a:ln>
-        </p:spPr>
-        <p:txBody>
-          <a:bodyPr lIns="91440" rIns="91440" tIns="45720" bIns="45720" anchor="ctr">
-            <a:noAutofit/>
-          </a:bodyPr>
-          <a:p>
-            <a:pPr indent="0" algn="ctr" defTabSz="457200">
-              <a:lnSpc>
-                <a:spcPct val="100000"/>
-              </a:lnSpc>
-              <a:buNone/>
-            </a:pPr>
-            <a:r>
-              <a:rPr lang="en-US" sz="4400" b="0" u="none" strike="noStrike">
-                <a:solidFill>
-                  <a:schemeClr val="dk1"/>
-                </a:solidFill>
-                <a:effectLst/>
-                <a:uFillTx/>
-                <a:latin typeface="Calibri"/>
-              </a:rPr>
-              <a:t>Click to edit Master title style</a:t>
-            </a:r>
-            <a:endParaRPr lang="en-US" sz="4400" b="0" u="none" strike="noStrike">
-              <a:solidFill>
-                <a:schemeClr val="dk1"/>
-              </a:solidFill>
-              <a:effectLst/>
-              <a:uFillTx/>
-              <a:latin typeface="Calibri"/>
-            </a:endParaRPr>
-          </a:p>
-        </p:txBody>
-      </p:sp>
-      <p:sp>
-        <p:nvSpPr>
-          <p:cNvPr id="33" name="PlaceHolder 2"/>
-          <p:cNvSpPr>
-            <a:spLocks noGrp="1"/>
-          </p:cNvSpPr>
-          <p:nvPr>
-            <p:ph type="body"/>
-          </p:nvPr>
-        </p:nvSpPr>
-        <p:spPr>
-          <a:xfrm>
-            <a:off x="457200" y="1535040"/>
-            <a:ext cx="4039920" cy="639360"/>
-          </a:xfrm>
-          <a:prstGeom prst="rect">
-            <a:avLst/>
-          </a:prstGeom>
-          <a:noFill/>
-          <a:ln w="0">
-            <a:noFill/>
-          </a:ln>
-        </p:spPr>
-        <p:txBody>
-          <a:bodyPr lIns="91440" rIns="91440" tIns="45720" bIns="45720" anchor="b">
-            <a:noAutofit/>
-          </a:bodyPr>
-          <a:p>
-            <a:pPr indent="0" defTabSz="457200">
-              <a:lnSpc>
-                <a:spcPct val="100000"/>
-              </a:lnSpc>
-              <a:spcBef>
-                <a:spcPts val="479"/>
-              </a:spcBef>
-              <a:buNone/>
-              <a:tabLst>
-                <a:tab algn="l" pos="0"/>
-              </a:tabLst>
-            </a:pPr>
-            <a:r>
-              <a:rPr lang="en-US" sz="2400" b="1" u="none" strike="noStrike">
-                <a:solidFill>
-                  <a:schemeClr val="dk1"/>
-                </a:solidFill>
-                <a:effectLst/>
-                <a:uFillTx/>
-                <a:latin typeface="Calibri"/>
-              </a:rPr>
-              <a:t>Click to edit Master text styles</a:t>
-            </a:r>
-            <a:endParaRPr lang="en-US" sz="2400" b="0" u="none" strike="noStrike">
-              <a:solidFill>
-                <a:schemeClr val="dk1"/>
-              </a:solidFill>
-              <a:effectLst/>
-              <a:uFillTx/>
-              <a:latin typeface="Calibri"/>
-            </a:endParaRPr>
-          </a:p>
-        </p:txBody>
-      </p:sp>
-      <p:sp>
-        <p:nvSpPr>
-          <p:cNvPr id="34" name="PlaceHolder 3"/>
-          <p:cNvSpPr>
-            <a:spLocks noGrp="1"/>
-          </p:cNvSpPr>
-          <p:nvPr>
-            <p:ph type="body"/>
-          </p:nvPr>
-        </p:nvSpPr>
-        <p:spPr>
-          <a:xfrm>
-            <a:off x="457200" y="2174760"/>
-            <a:ext cx="4039920" cy="3951000"/>
-          </a:xfrm>
-          <a:prstGeom prst="rect">
-            <a:avLst/>
-          </a:prstGeom>
-          <a:noFill/>
-          <a:ln w="0">
-            <a:noFill/>
-          </a:ln>
-        </p:spPr>
-        <p:txBody>
-          <a:bodyPr lIns="91440" rIns="91440" tIns="45720" bIns="45720" anchor="t">
-            <a:noAutofit/>
-          </a:bodyPr>
-          <a:p>
-            <a:pPr marL="343080" indent="-343080" defTabSz="457200">
-              <a:lnSpc>
-                <a:spcPct val="100000"/>
-              </a:lnSpc>
-              <a:spcBef>
-                <a:spcPts val="479"/>
-              </a:spcBef>
-              <a:buClr>
-                <a:srgbClr val="000000"/>
-              </a:buClr>
-              <a:buFont typeface="Arial"/>
-              <a:buChar char="•"/>
-            </a:pPr>
-            <a:r>
-              <a:rPr lang="en-US" sz="2400" b="0" u="none" strike="noStrike">
-                <a:solidFill>
-                  <a:schemeClr val="dk1"/>
-                </a:solidFill>
-                <a:effectLst/>
-                <a:uFillTx/>
-                <a:latin typeface="Calibri"/>
-              </a:rPr>
-              <a:t>Click to edit Master text styles</a:t>
-            </a:r>
-            <a:endParaRPr lang="en-US" sz="2400" b="0" u="none" strike="noStrike">
-              <a:solidFill>
-                <a:schemeClr val="dk1"/>
-              </a:solidFill>
-              <a:effectLst/>
-              <a:uFillTx/>
-              <a:latin typeface="Calibri"/>
-            </a:endParaRPr>
-          </a:p>
-          <a:p>
-            <a:pPr marL="743040" lvl="1" indent="-285840" defTabSz="457200">
-              <a:lnSpc>
-                <a:spcPct val="100000"/>
-              </a:lnSpc>
-              <a:spcBef>
-                <a:spcPts val="400"/>
-              </a:spcBef>
-              <a:buClr>
-                <a:srgbClr val="000000"/>
-              </a:buClr>
-              <a:buFont typeface="Arial"/>
-              <a:buChar char="–"/>
-            </a:pPr>
-            <a:r>
-              <a:rPr lang="en-US" sz="2000" b="0" u="none" strike="noStrike">
-                <a:solidFill>
-                  <a:schemeClr val="dk1"/>
-                </a:solidFill>
-                <a:effectLst/>
-                <a:uFillTx/>
-                <a:latin typeface="Calibri"/>
-              </a:rPr>
-              <a:t>Second level</a:t>
-            </a:r>
-            <a:endParaRPr lang="en-US" sz="2000" b="0" u="none" strike="noStrike">
-              <a:solidFill>
-                <a:schemeClr val="dk1"/>
-              </a:solidFill>
-              <a:effectLst/>
-              <a:uFillTx/>
-              <a:latin typeface="Calibri"/>
-            </a:endParaRPr>
-          </a:p>
-          <a:p>
-            <a:pPr marL="1143000" lvl="2" indent="-228600" defTabSz="457200">
-              <a:lnSpc>
-                <a:spcPct val="100000"/>
-              </a:lnSpc>
-              <a:spcBef>
-                <a:spcPts val="360"/>
-              </a:spcBef>
-              <a:buClr>
-                <a:srgbClr val="000000"/>
-              </a:buClr>
-              <a:buFont typeface="Arial"/>
-              <a:buChar char="•"/>
-            </a:pPr>
-            <a:r>
-              <a:rPr lang="en-US" sz="1800" b="0" u="none" strike="noStrike">
-                <a:solidFill>
-                  <a:schemeClr val="dk1"/>
-                </a:solidFill>
-                <a:effectLst/>
-                <a:uFillTx/>
-                <a:latin typeface="Calibri"/>
-              </a:rPr>
-              <a:t>Third level</a:t>
-            </a:r>
-            <a:endParaRPr lang="en-US" sz="1800" b="0" u="none" strike="noStrike">
-              <a:solidFill>
-                <a:schemeClr val="dk1"/>
-              </a:solidFill>
-              <a:effectLst/>
-              <a:uFillTx/>
-              <a:latin typeface="Calibri"/>
-            </a:endParaRPr>
-          </a:p>
-          <a:p>
-            <a:pPr marL="1600200" lvl="3" indent="-228600" defTabSz="457200">
-              <a:lnSpc>
-                <a:spcPct val="100000"/>
-              </a:lnSpc>
-              <a:spcBef>
-                <a:spcPts val="320"/>
-              </a:spcBef>
-              <a:buClr>
-                <a:srgbClr val="000000"/>
-              </a:buClr>
-              <a:buFont typeface="Arial"/>
-              <a:buChar char="–"/>
-            </a:pPr>
-            <a:r>
-              <a:rPr lang="en-US" sz="1600" b="0" u="none" strike="noStrike">
-                <a:solidFill>
-                  <a:schemeClr val="dk1"/>
-                </a:solidFill>
-                <a:effectLst/>
-                <a:uFillTx/>
-                <a:latin typeface="Calibri"/>
-              </a:rPr>
-              <a:t>Fourth level</a:t>
-            </a:r>
-            <a:endParaRPr lang="en-US" sz="1600" b="0" u="none" strike="noStrike">
-              <a:solidFill>
-                <a:schemeClr val="dk1"/>
-              </a:solidFill>
-              <a:effectLst/>
-              <a:uFillTx/>
-              <a:latin typeface="Calibri"/>
-            </a:endParaRPr>
-          </a:p>
-          <a:p>
-            <a:pPr marL="2057400" lvl="4" indent="-228600" defTabSz="457200">
-              <a:lnSpc>
-                <a:spcPct val="100000"/>
-              </a:lnSpc>
-              <a:spcBef>
-                <a:spcPts val="320"/>
-              </a:spcBef>
-              <a:buClr>
-                <a:srgbClr val="000000"/>
-              </a:buClr>
-              <a:buFont typeface="Arial"/>
-              <a:buChar char="»"/>
-            </a:pPr>
-            <a:r>
-              <a:rPr lang="en-US" sz="1600" b="0" u="none" strike="noStrike">
-                <a:solidFill>
-                  <a:schemeClr val="dk1"/>
-                </a:solidFill>
-                <a:effectLst/>
-                <a:uFillTx/>
-                <a:latin typeface="Calibri"/>
-              </a:rPr>
-              <a:t>Fifth level</a:t>
-            </a:r>
-            <a:endParaRPr lang="en-US" sz="1600" b="0" u="none" strike="noStrike">
-              <a:solidFill>
-                <a:schemeClr val="dk1"/>
-              </a:solidFill>
-              <a:effectLst/>
-              <a:uFillTx/>
-              <a:latin typeface="Calibri"/>
-            </a:endParaRPr>
-          </a:p>
-        </p:txBody>
-      </p:sp>
-      <p:sp>
-        <p:nvSpPr>
-          <p:cNvPr id="35" name="PlaceHolder 4"/>
-          <p:cNvSpPr>
-            <a:spLocks noGrp="1"/>
-          </p:cNvSpPr>
-          <p:nvPr>
-            <p:ph type="body"/>
-          </p:nvPr>
-        </p:nvSpPr>
-        <p:spPr>
-          <a:xfrm>
-            <a:off x="4645080" y="1535040"/>
-            <a:ext cx="4041360" cy="639360"/>
-          </a:xfrm>
-          <a:prstGeom prst="rect">
-            <a:avLst/>
-          </a:prstGeom>
-          <a:noFill/>
-          <a:ln w="0">
-            <a:noFill/>
-          </a:ln>
-        </p:spPr>
-        <p:txBody>
-          <a:bodyPr lIns="91440" rIns="91440" tIns="45720" bIns="45720" anchor="b">
-            <a:noAutofit/>
-          </a:bodyPr>
-          <a:p>
-            <a:pPr indent="0" defTabSz="457200">
-              <a:lnSpc>
-                <a:spcPct val="100000"/>
-              </a:lnSpc>
-              <a:spcBef>
-                <a:spcPts val="479"/>
-              </a:spcBef>
-              <a:buNone/>
-              <a:tabLst>
-                <a:tab algn="l" pos="0"/>
-              </a:tabLst>
-            </a:pPr>
-            <a:r>
-              <a:rPr lang="en-US" sz="2400" b="1" u="none" strike="noStrike">
-                <a:solidFill>
-                  <a:schemeClr val="dk1"/>
-                </a:solidFill>
-                <a:effectLst/>
-                <a:uFillTx/>
-                <a:latin typeface="Calibri"/>
-              </a:rPr>
-              <a:t>Click to edit Master text styles</a:t>
-            </a:r>
-            <a:endParaRPr lang="en-US" sz="2400" b="0" u="none" strike="noStrike">
-              <a:solidFill>
-                <a:schemeClr val="dk1"/>
-              </a:solidFill>
-              <a:effectLst/>
-              <a:uFillTx/>
-              <a:latin typeface="Calibri"/>
-            </a:endParaRPr>
-          </a:p>
-        </p:txBody>
-      </p:sp>
-      <p:sp>
-        <p:nvSpPr>
-          <p:cNvPr id="36" name="PlaceHolder 5"/>
-          <p:cNvSpPr>
-            <a:spLocks noGrp="1"/>
-          </p:cNvSpPr>
-          <p:nvPr>
-            <p:ph type="body"/>
-          </p:nvPr>
-        </p:nvSpPr>
-        <p:spPr>
-          <a:xfrm>
-            <a:off x="4645080" y="2174760"/>
-            <a:ext cx="4041360" cy="3951000"/>
-          </a:xfrm>
-          <a:prstGeom prst="rect">
-            <a:avLst/>
-          </a:prstGeom>
-          <a:noFill/>
-          <a:ln w="0">
-            <a:noFill/>
-          </a:ln>
-        </p:spPr>
-        <p:txBody>
-          <a:bodyPr lIns="91440" rIns="91440" tIns="45720" bIns="45720" anchor="t">
-            <a:noAutofit/>
-          </a:bodyPr>
-          <a:p>
-            <a:pPr marL="343080" indent="-343080" defTabSz="457200">
-              <a:lnSpc>
-                <a:spcPct val="100000"/>
-              </a:lnSpc>
-              <a:spcBef>
-                <a:spcPts val="479"/>
-              </a:spcBef>
-              <a:buClr>
-                <a:srgbClr val="000000"/>
-              </a:buClr>
-              <a:buFont typeface="Arial"/>
-              <a:buChar char="•"/>
-            </a:pPr>
-            <a:r>
-              <a:rPr lang="en-US" sz="2400" b="0" u="none" strike="noStrike">
-                <a:solidFill>
-                  <a:schemeClr val="dk1"/>
-                </a:solidFill>
-                <a:effectLst/>
-                <a:uFillTx/>
-                <a:latin typeface="Calibri"/>
-              </a:rPr>
-              <a:t>Click to edit Master text styles</a:t>
-            </a:r>
-            <a:endParaRPr lang="en-US" sz="2400" b="0" u="none" strike="noStrike">
-              <a:solidFill>
-                <a:schemeClr val="dk1"/>
-              </a:solidFill>
-              <a:effectLst/>
-              <a:uFillTx/>
-              <a:latin typeface="Calibri"/>
-            </a:endParaRPr>
-          </a:p>
-          <a:p>
-            <a:pPr marL="743040" lvl="1" indent="-285840" defTabSz="457200">
-              <a:lnSpc>
-                <a:spcPct val="100000"/>
-              </a:lnSpc>
-              <a:spcBef>
-                <a:spcPts val="400"/>
-              </a:spcBef>
-              <a:buClr>
-                <a:srgbClr val="000000"/>
-              </a:buClr>
-              <a:buFont typeface="Arial"/>
-              <a:buChar char="–"/>
-            </a:pPr>
-            <a:r>
-              <a:rPr lang="en-US" sz="2000" b="0" u="none" strike="noStrike">
-                <a:solidFill>
-                  <a:schemeClr val="dk1"/>
-                </a:solidFill>
-                <a:effectLst/>
-                <a:uFillTx/>
-                <a:latin typeface="Calibri"/>
-              </a:rPr>
-              <a:t>Second level</a:t>
-            </a:r>
-            <a:endParaRPr lang="en-US" sz="2000" b="0" u="none" strike="noStrike">
-              <a:solidFill>
-                <a:schemeClr val="dk1"/>
-              </a:solidFill>
-              <a:effectLst/>
-              <a:uFillTx/>
-              <a:latin typeface="Calibri"/>
-            </a:endParaRPr>
-          </a:p>
-          <a:p>
-            <a:pPr marL="1143000" lvl="2" indent="-228600" defTabSz="457200">
-              <a:lnSpc>
-                <a:spcPct val="100000"/>
-              </a:lnSpc>
-              <a:spcBef>
-                <a:spcPts val="360"/>
-              </a:spcBef>
-              <a:buClr>
-                <a:srgbClr val="000000"/>
-              </a:buClr>
-              <a:buFont typeface="Arial"/>
-              <a:buChar char="•"/>
-            </a:pPr>
-            <a:r>
-              <a:rPr lang="en-US" sz="1800" b="0" u="none" strike="noStrike">
-                <a:solidFill>
-                  <a:schemeClr val="dk1"/>
-                </a:solidFill>
-                <a:effectLst/>
-                <a:uFillTx/>
-                <a:latin typeface="Calibri"/>
-              </a:rPr>
-              <a:t>Third level</a:t>
-            </a:r>
-            <a:endParaRPr lang="en-US" sz="1800" b="0" u="none" strike="noStrike">
-              <a:solidFill>
-                <a:schemeClr val="dk1"/>
-              </a:solidFill>
-              <a:effectLst/>
-              <a:uFillTx/>
-              <a:latin typeface="Calibri"/>
-            </a:endParaRPr>
-          </a:p>
-          <a:p>
-            <a:pPr marL="1600200" lvl="3" indent="-228600" defTabSz="457200">
-              <a:lnSpc>
-                <a:spcPct val="100000"/>
-              </a:lnSpc>
-              <a:spcBef>
-                <a:spcPts val="320"/>
-              </a:spcBef>
-              <a:buClr>
-                <a:srgbClr val="000000"/>
-              </a:buClr>
-              <a:buFont typeface="Arial"/>
-              <a:buChar char="–"/>
-            </a:pPr>
-            <a:r>
-              <a:rPr lang="en-US" sz="1600" b="0" u="none" strike="noStrike">
-                <a:solidFill>
-                  <a:schemeClr val="dk1"/>
-                </a:solidFill>
-                <a:effectLst/>
-                <a:uFillTx/>
-                <a:latin typeface="Calibri"/>
-              </a:rPr>
-              <a:t>Fourth level</a:t>
-            </a:r>
-            <a:endParaRPr lang="en-US" sz="1600" b="0" u="none" strike="noStrike">
-              <a:solidFill>
-                <a:schemeClr val="dk1"/>
-              </a:solidFill>
-              <a:effectLst/>
-              <a:uFillTx/>
-              <a:latin typeface="Calibri"/>
-            </a:endParaRPr>
-          </a:p>
-          <a:p>
-            <a:pPr marL="2057400" lvl="4" indent="-228600" defTabSz="457200">
-              <a:lnSpc>
-                <a:spcPct val="100000"/>
-              </a:lnSpc>
-              <a:spcBef>
-                <a:spcPts val="320"/>
-              </a:spcBef>
-              <a:buClr>
-                <a:srgbClr val="000000"/>
-              </a:buClr>
-              <a:buFont typeface="Arial"/>
-              <a:buChar char="»"/>
-            </a:pPr>
-            <a:r>
-              <a:rPr lang="en-US" sz="1600" b="0" u="none" strike="noStrike">
-                <a:solidFill>
-                  <a:schemeClr val="dk1"/>
-                </a:solidFill>
-                <a:effectLst/>
-                <a:uFillTx/>
-                <a:latin typeface="Calibri"/>
-              </a:rPr>
-              <a:t>Fifth level</a:t>
-            </a:r>
-            <a:endParaRPr lang="en-US" sz="1600" b="0" u="none" strike="noStrike">
-              <a:solidFill>
-                <a:schemeClr val="dk1"/>
-              </a:solidFill>
-              <a:effectLst/>
-              <a:uFillTx/>
-              <a:latin typeface="Calibri"/>
-            </a:endParaRPr>
-          </a:p>
-        </p:txBody>
-      </p:sp>
-      <p:sp>
-        <p:nvSpPr>
-          <p:cNvPr id="37" name="PlaceHolder 6"/>
-          <p:cNvSpPr>
-            <a:spLocks noGrp="1"/>
-          </p:cNvSpPr>
-          <p:nvPr>
-            <p:ph type="dt" idx="19"/>
-          </p:nvPr>
-        </p:nvSpPr>
-        <p:spPr>
-          <a:xfrm>
-            <a:off x="457200" y="6356520"/>
-            <a:ext cx="2133360" cy="364680"/>
-          </a:xfrm>
-          <a:prstGeom prst="rect">
-            <a:avLst/>
-          </a:prstGeom>
-          <a:noFill/>
-          <a:ln w="0">
-            <a:noFill/>
-          </a:ln>
-        </p:spPr>
-        <p:txBody>
-          <a:bodyPr lIns="91440" rIns="91440" tIns="45720" bIns="45720" anchor="ctr">
-            <a:noAutofit/>
-          </a:bodyPr>
-          <a:lstStyle>
-            <a:lvl1pPr indent="0" defTabSz="457200">
-              <a:lnSpc>
-                <a:spcPct val="100000"/>
-              </a:lnSpc>
-              <a:buNone/>
-              <a:defRPr lang="en-US" sz="1200" b="0" u="none" strike="noStrike">
-                <a:solidFill>
-                  <a:schemeClr val="dk1">
-                    <a:tint val="75000"/>
-                  </a:schemeClr>
-                </a:solidFill>
-                <a:effectLst/>
-                <a:uFillTx/>
-                <a:latin typeface="Calibri"/>
-              </a:defRPr>
-            </a:lvl1pPr>
-          </a:lstStyle>
-          <a:p>
-            <a:pPr indent="0" defTabSz="457200">
-              <a:lnSpc>
-                <a:spcPct val="100000"/>
-              </a:lnSpc>
-              <a:buNone/>
-            </a:pPr>
-            <a:r>
-              <a:rPr lang="en-US" sz="1200" b="0" u="none" strike="noStrike">
-                <a:solidFill>
-                  <a:schemeClr val="dk1">
-                    <a:tint val="75000"/>
-                  </a:schemeClr>
-                </a:solidFill>
-                <a:effectLst/>
-                <a:uFillTx/>
-                <a:latin typeface="Calibri"/>
-              </a:rPr>
-              <a:t>&lt;date/time&gt;</a:t>
-            </a:r>
-            <a:endParaRPr lang="en-US" sz="1200" b="0" u="none" strike="noStrike">
-              <a:solidFill>
-                <a:srgbClr val="000000"/>
-              </a:solidFill>
-              <a:effectLst/>
-              <a:uFillTx/>
-              <a:latin typeface="Times New Roman"/>
-            </a:endParaRPr>
-          </a:p>
-        </p:txBody>
-      </p:sp>
-      <p:sp>
-        <p:nvSpPr>
-          <p:cNvPr id="38" name="PlaceHolder 7"/>
-          <p:cNvSpPr>
-            <a:spLocks noGrp="1"/>
-          </p:cNvSpPr>
-          <p:nvPr>
-            <p:ph type="ftr" idx="20"/>
-          </p:nvPr>
-        </p:nvSpPr>
-        <p:spPr>
-          <a:xfrm>
-            <a:off x="3124080" y="6356520"/>
-            <a:ext cx="2895120" cy="364680"/>
-          </a:xfrm>
-          <a:prstGeom prst="rect">
-            <a:avLst/>
-          </a:prstGeom>
-          <a:noFill/>
-          <a:ln w="0">
-            <a:noFill/>
-          </a:ln>
-        </p:spPr>
-        <p:txBody>
-          <a:bodyPr lIns="91440" rIns="91440" tIns="45720" bIns="45720" anchor="ctr">
-            <a:noAutofit/>
-          </a:bodyPr>
-          <a:lstStyle>
-            <a:lvl1pPr indent="0" algn="ctr">
-              <a:buNone/>
-              <a:defRPr lang="en-US" sz="1400" b="0" u="none" strike="noStrike">
-                <a:solidFill>
-                  <a:srgbClr val="000000"/>
-                </a:solidFill>
-                <a:effectLst/>
-                <a:uFillTx/>
-                <a:latin typeface="Times New Roman"/>
-              </a:defRPr>
-            </a:lvl1pPr>
-          </a:lstStyle>
-          <a:p>
-            <a:pPr indent="0" algn="ctr">
-              <a:buNone/>
-            </a:pPr>
-            <a:r>
-              <a:rPr lang="en-US" sz="1400" b="0" u="none" strike="noStrike">
-                <a:solidFill>
-                  <a:srgbClr val="000000"/>
-                </a:solidFill>
-                <a:effectLst/>
-                <a:uFillTx/>
-                <a:latin typeface="Times New Roman"/>
-              </a:rPr>
-              <a:t>&lt;footer&gt;</a:t>
-            </a:r>
-            <a:endParaRPr lang="en-US" sz="1400" b="0" u="none" strike="noStrike">
-              <a:solidFill>
-                <a:srgbClr val="000000"/>
-              </a:solidFill>
-              <a:effectLst/>
-              <a:uFillTx/>
-              <a:latin typeface="Times New Roman"/>
-            </a:endParaRPr>
-          </a:p>
-        </p:txBody>
-      </p:sp>
-      <p:sp>
-        <p:nvSpPr>
-          <p:cNvPr id="39" name="PlaceHolder 8"/>
-          <p:cNvSpPr>
-            <a:spLocks noGrp="1"/>
-          </p:cNvSpPr>
-          <p:nvPr>
-            <p:ph type="sldNum" idx="21"/>
-          </p:nvPr>
-        </p:nvSpPr>
-        <p:spPr>
-          <a:xfrm>
-            <a:off x="6553080" y="6356520"/>
-            <a:ext cx="2133360" cy="364680"/>
-          </a:xfrm>
-          <a:prstGeom prst="rect">
-            <a:avLst/>
-          </a:prstGeom>
-          <a:noFill/>
-          <a:ln w="0">
-            <a:noFill/>
-          </a:ln>
-        </p:spPr>
-        <p:txBody>
-          <a:bodyPr lIns="91440" rIns="91440" tIns="45720" bIns="45720" anchor="ctr">
-            <a:noAutofit/>
-          </a:bodyPr>
-          <a:lstStyle>
-            <a:lvl1pPr indent="0" algn="r" defTabSz="457200">
-              <a:lnSpc>
-                <a:spcPct val="100000"/>
-              </a:lnSpc>
-              <a:buNone/>
-              <a:defRPr lang="en-US" sz="1200" b="0" u="none" strike="noStrike">
-                <a:solidFill>
-                  <a:schemeClr val="dk1">
-                    <a:tint val="75000"/>
-                  </a:schemeClr>
-                </a:solidFill>
-                <a:effectLst/>
-                <a:uFillTx/>
-                <a:latin typeface="Calibri"/>
-              </a:defRPr>
-            </a:lvl1pPr>
-          </a:lstStyle>
-          <a:p>
-            <a:pPr indent="0" algn="r" defTabSz="457200">
-              <a:lnSpc>
-                <a:spcPct val="100000"/>
-              </a:lnSpc>
-              <a:buNone/>
-            </a:pPr>
-            <a:fld id="{8D260A3A-1316-4758-98FE-4896C872DE7F}" type="slidenum">
-              <a:rPr lang="en-US" sz="1200" b="0" u="none" strike="noStrike">
-                <a:solidFill>
-                  <a:schemeClr val="dk1">
-                    <a:tint val="75000"/>
-                  </a:schemeClr>
-                </a:solidFill>
-                <a:effectLst/>
-                <a:uFillTx/>
-                <a:latin typeface="Calibri"/>
-              </a:rPr>
-              <a:t>&lt;number&gt;</a:t>
-            </a:fld>
-            <a:endParaRPr lang="en-US" sz="1200" b="0" u="none" strike="noStrike">
-              <a:solidFill>
-                <a:srgbClr val="000000"/>
-              </a:solidFill>
-              <a:effectLst/>
-              <a:uFillTx/>
-              <a:latin typeface="Times New Roman"/>
-            </a:endParaRPr>
-          </a:p>
-        </p:txBody>
-      </p:sp>
-    </p:spTree>
-  </p:cSld>
-</p:sldLayout>
-</file>
-
-<file path=ppt/slideLayouts/slideLayout8.xml><?xml version="1.0" encoding="utf-8"?>
-<p:sldLayout xmlns:a="http://schemas.openxmlformats.org/drawingml/2006/main" xmlns:p="http://schemas.openxmlformats.org/presentationml/2006/main" xmlns:r="http://schemas.openxmlformats.org/officeDocument/2006/relationships" xmlns:p14="http://schemas.microsoft.com/office/powerpoint/2010/main" xmlns:p15="http://schemas.microsoft.com/office/powerpoint/2012/main" xmlns:mc="http://schemas.openxmlformats.org/markup-compatibility/2006" type="titleOnly" preserve="1">
-  <p:cSld name="Title Only">
-    <p:bg>
-      <p:bgPr>
-        <a:solidFill>
-          <a:srgbClr val="ffffff"/>
-        </a:solidFill>
-      </p:bgPr>
-    </p:bg>
-    <p:spTree>
-      <p:nvGrpSpPr>
-        <p:cNvPr id="1" name=""/>
-        <p:cNvGrpSpPr/>
-        <p:nvPr/>
-      </p:nvGrpSpPr>
-      <p:grpSpPr>
-        <a:xfrm>
-          <a:off x="0" y="0"/>
-          <a:ext cx="0" cy="0"/>
-          <a:chOff x="0" y="0"/>
-          <a:chExt cx="0" cy="0"/>
-        </a:xfrm>
-      </p:grpSpPr>
-      <p:sp>
-        <p:nvSpPr>
-          <p:cNvPr id="40" name="PlaceHolder 1"/>
-          <p:cNvSpPr>
-            <a:spLocks noGrp="1"/>
-          </p:cNvSpPr>
-          <p:nvPr>
-            <p:ph type="title"/>
-          </p:nvPr>
-        </p:nvSpPr>
-        <p:spPr>
-          <a:xfrm>
-            <a:off x="457200" y="274680"/>
-            <a:ext cx="8229240" cy="1142640"/>
-          </a:xfrm>
-          <a:prstGeom prst="rect">
-            <a:avLst/>
-          </a:prstGeom>
-          <a:noFill/>
-          <a:ln w="0">
-            <a:noFill/>
-          </a:ln>
-        </p:spPr>
-        <p:txBody>
-          <a:bodyPr lIns="91440" rIns="91440" tIns="45720" bIns="45720" anchor="ctr">
-            <a:noAutofit/>
-          </a:bodyPr>
-          <a:p>
-            <a:pPr indent="0" algn="ctr" defTabSz="457200">
-              <a:lnSpc>
-                <a:spcPct val="100000"/>
-              </a:lnSpc>
-              <a:buNone/>
-            </a:pPr>
-            <a:r>
-              <a:rPr lang="en-US" sz="4400" b="0" u="none" strike="noStrike">
-                <a:solidFill>
-                  <a:schemeClr val="dk1"/>
-                </a:solidFill>
-                <a:effectLst/>
-                <a:uFillTx/>
-                <a:latin typeface="Calibri"/>
-              </a:rPr>
-              <a:t>Click to edit Master title style</a:t>
-            </a:r>
-            <a:endParaRPr lang="en-US" sz="4400" b="0" u="none" strike="noStrike">
-              <a:solidFill>
-                <a:schemeClr val="dk1"/>
-              </a:solidFill>
-              <a:effectLst/>
-              <a:uFillTx/>
-              <a:latin typeface="Calibri"/>
-            </a:endParaRPr>
-          </a:p>
-        </p:txBody>
-      </p:sp>
-      <p:sp>
-        <p:nvSpPr>
-          <p:cNvPr id="41" name="PlaceHolder 2"/>
-          <p:cNvSpPr>
-            <a:spLocks noGrp="1"/>
-          </p:cNvSpPr>
-          <p:nvPr>
-            <p:ph type="dt" idx="22"/>
-          </p:nvPr>
-        </p:nvSpPr>
-        <p:spPr>
-          <a:xfrm>
-            <a:off x="457200" y="6356520"/>
-            <a:ext cx="2133360" cy="364680"/>
-          </a:xfrm>
-          <a:prstGeom prst="rect">
-            <a:avLst/>
-          </a:prstGeom>
-          <a:noFill/>
-          <a:ln w="0">
-            <a:noFill/>
-          </a:ln>
-        </p:spPr>
-        <p:txBody>
-          <a:bodyPr lIns="91440" rIns="91440" tIns="45720" bIns="45720" anchor="ctr">
-            <a:noAutofit/>
-          </a:bodyPr>
-          <a:lstStyle>
-            <a:lvl1pPr indent="0" defTabSz="457200">
-              <a:lnSpc>
-                <a:spcPct val="100000"/>
-              </a:lnSpc>
-              <a:buNone/>
-              <a:defRPr lang="en-US" sz="1200" b="0" u="none" strike="noStrike">
-                <a:solidFill>
-                  <a:schemeClr val="dk1">
-                    <a:tint val="75000"/>
-                  </a:schemeClr>
-                </a:solidFill>
-                <a:effectLst/>
-                <a:uFillTx/>
-                <a:latin typeface="Calibri"/>
-              </a:defRPr>
-            </a:lvl1pPr>
-          </a:lstStyle>
-          <a:p>
-            <a:pPr indent="0" defTabSz="457200">
-              <a:lnSpc>
-                <a:spcPct val="100000"/>
-              </a:lnSpc>
-              <a:buNone/>
-            </a:pPr>
-            <a:r>
-              <a:rPr lang="en-US" sz="1200" b="0" u="none" strike="noStrike">
-                <a:solidFill>
-                  <a:schemeClr val="dk1">
-                    <a:tint val="75000"/>
-                  </a:schemeClr>
-                </a:solidFill>
-                <a:effectLst/>
-                <a:uFillTx/>
-                <a:latin typeface="Calibri"/>
-              </a:rPr>
-              <a:t>&lt;date/time&gt;</a:t>
-            </a:r>
-            <a:endParaRPr lang="en-US" sz="1200" b="0" u="none" strike="noStrike">
-              <a:solidFill>
-                <a:srgbClr val="000000"/>
-              </a:solidFill>
-              <a:effectLst/>
-              <a:uFillTx/>
-              <a:latin typeface="Times New Roman"/>
-            </a:endParaRPr>
-          </a:p>
-        </p:txBody>
-      </p:sp>
-      <p:sp>
-        <p:nvSpPr>
-          <p:cNvPr id="42" name="PlaceHolder 3"/>
-          <p:cNvSpPr>
-            <a:spLocks noGrp="1"/>
-          </p:cNvSpPr>
-          <p:nvPr>
-            <p:ph type="ftr" idx="23"/>
-          </p:nvPr>
-        </p:nvSpPr>
-        <p:spPr>
-          <a:xfrm>
-            <a:off x="3124080" y="6356520"/>
-            <a:ext cx="2895120" cy="364680"/>
-          </a:xfrm>
-          <a:prstGeom prst="rect">
-            <a:avLst/>
-          </a:prstGeom>
-          <a:noFill/>
-          <a:ln w="0">
-            <a:noFill/>
-          </a:ln>
-        </p:spPr>
-        <p:txBody>
-          <a:bodyPr lIns="91440" rIns="91440" tIns="45720" bIns="45720" anchor="ctr">
-            <a:noAutofit/>
-          </a:bodyPr>
-          <a:lstStyle>
-            <a:lvl1pPr indent="0" algn="ctr">
-              <a:buNone/>
-              <a:defRPr lang="en-US" sz="1400" b="0" u="none" strike="noStrike">
-                <a:solidFill>
-                  <a:srgbClr val="000000"/>
-                </a:solidFill>
-                <a:effectLst/>
-                <a:uFillTx/>
-                <a:latin typeface="Times New Roman"/>
-              </a:defRPr>
-            </a:lvl1pPr>
-          </a:lstStyle>
-          <a:p>
-            <a:pPr indent="0" algn="ctr">
-              <a:buNone/>
-            </a:pPr>
-            <a:r>
-              <a:rPr lang="en-US" sz="1400" b="0" u="none" strike="noStrike">
-                <a:solidFill>
-                  <a:srgbClr val="000000"/>
-                </a:solidFill>
-                <a:effectLst/>
-                <a:uFillTx/>
-                <a:latin typeface="Times New Roman"/>
-              </a:rPr>
-              <a:t>&lt;footer&gt;</a:t>
-            </a:r>
-            <a:endParaRPr lang="en-US" sz="1400" b="0" u="none" strike="noStrike">
-              <a:solidFill>
-                <a:srgbClr val="000000"/>
-              </a:solidFill>
-              <a:effectLst/>
-              <a:uFillTx/>
-              <a:latin typeface="Times New Roman"/>
-            </a:endParaRPr>
-          </a:p>
-        </p:txBody>
-      </p:sp>
-      <p:sp>
-        <p:nvSpPr>
-          <p:cNvPr id="43" name="PlaceHolder 4"/>
-          <p:cNvSpPr>
-            <a:spLocks noGrp="1"/>
-          </p:cNvSpPr>
-          <p:nvPr>
-            <p:ph type="sldNum" idx="24"/>
-          </p:nvPr>
-        </p:nvSpPr>
-        <p:spPr>
-          <a:xfrm>
-            <a:off x="6553080" y="6356520"/>
-            <a:ext cx="2133360" cy="364680"/>
-          </a:xfrm>
-          <a:prstGeom prst="rect">
-            <a:avLst/>
-          </a:prstGeom>
-          <a:noFill/>
-          <a:ln w="0">
-            <a:noFill/>
-          </a:ln>
-        </p:spPr>
-        <p:txBody>
-          <a:bodyPr lIns="91440" rIns="91440" tIns="45720" bIns="45720" anchor="ctr">
-            <a:noAutofit/>
-          </a:bodyPr>
-          <a:lstStyle>
-            <a:lvl1pPr indent="0" algn="r" defTabSz="457200">
-              <a:lnSpc>
-                <a:spcPct val="100000"/>
-              </a:lnSpc>
-              <a:buNone/>
-              <a:defRPr lang="en-US" sz="1200" b="0" u="none" strike="noStrike">
-                <a:solidFill>
-                  <a:schemeClr val="dk1">
-                    <a:tint val="75000"/>
-                  </a:schemeClr>
-                </a:solidFill>
-                <a:effectLst/>
-                <a:uFillTx/>
-                <a:latin typeface="Calibri"/>
-              </a:defRPr>
-            </a:lvl1pPr>
-          </a:lstStyle>
-          <a:p>
-            <a:pPr indent="0" algn="r" defTabSz="457200">
-              <a:lnSpc>
-                <a:spcPct val="100000"/>
-              </a:lnSpc>
-              <a:buNone/>
-            </a:pPr>
-            <a:fld id="{4ABA8490-449C-40D4-8B17-67CA74520522}" type="slidenum">
-              <a:rPr lang="en-US" sz="1200" b="0" u="none" strike="noStrike">
-                <a:solidFill>
-                  <a:schemeClr val="dk1">
-                    <a:tint val="75000"/>
-                  </a:schemeClr>
-                </a:solidFill>
-                <a:effectLst/>
-                <a:uFillTx/>
-                <a:latin typeface="Calibri"/>
-              </a:rPr>
-              <a:t>&lt;number&gt;</a:t>
-            </a:fld>
-            <a:endParaRPr lang="en-US" sz="1200" b="0" u="none" strike="noStrike">
-              <a:solidFill>
-                <a:srgbClr val="000000"/>
-              </a:solidFill>
-              <a:effectLst/>
-              <a:uFillTx/>
-              <a:latin typeface="Times New Roman"/>
-            </a:endParaRPr>
-          </a:p>
-        </p:txBody>
-      </p:sp>
-    </p:spTree>
-  </p:cSld>
-</p:sldLayout>
-</file>
-
-<file path=ppt/slideLayouts/slideLayout9.xml><?xml version="1.0" encoding="utf-8"?>
-<p:sldLayout xmlns:a="http://schemas.openxmlformats.org/drawingml/2006/main" xmlns:p="http://schemas.openxmlformats.org/presentationml/2006/main" xmlns:r="http://schemas.openxmlformats.org/officeDocument/2006/relationships" xmlns:p14="http://schemas.microsoft.com/office/powerpoint/2010/main" xmlns:p15="http://schemas.microsoft.com/office/powerpoint/2012/main" xmlns:mc="http://schemas.openxmlformats.org/markup-compatibility/2006" type="blank" preserve="1">
-  <p:cSld name="Blank">
-    <p:bg>
-      <p:bgPr>
-        <a:solidFill>
-          <a:srgbClr val="ffffff"/>
-        </a:solidFill>
-      </p:bgPr>
-    </p:bg>
-    <p:spTree>
-      <p:nvGrpSpPr>
-        <p:cNvPr id="1" name=""/>
-        <p:cNvGrpSpPr/>
-        <p:nvPr/>
-      </p:nvGrpSpPr>
-      <p:grpSpPr>
-        <a:xfrm>
-          <a:off x="0" y="0"/>
-          <a:ext cx="0" cy="0"/>
-          <a:chOff x="0" y="0"/>
-          <a:chExt cx="0" cy="0"/>
-        </a:xfrm>
-      </p:grpSpPr>
-      <p:sp>
-        <p:nvSpPr>
-          <p:cNvPr id="44" name="PlaceHolder 1"/>
-          <p:cNvSpPr>
-            <a:spLocks noGrp="1"/>
-          </p:cNvSpPr>
-          <p:nvPr>
-            <p:ph type="dt" idx="25"/>
-          </p:nvPr>
-        </p:nvSpPr>
-        <p:spPr>
-          <a:xfrm>
-            <a:off x="457200" y="6356520"/>
-            <a:ext cx="2133360" cy="364680"/>
-          </a:xfrm>
-          <a:prstGeom prst="rect">
-            <a:avLst/>
-          </a:prstGeom>
-          <a:noFill/>
-          <a:ln w="0">
-            <a:noFill/>
-          </a:ln>
-        </p:spPr>
-        <p:txBody>
-          <a:bodyPr lIns="91440" rIns="91440" tIns="45720" bIns="45720" anchor="ctr">
-            <a:noAutofit/>
-          </a:bodyPr>
-          <a:lstStyle>
-            <a:lvl1pPr indent="0" defTabSz="457200">
-              <a:lnSpc>
-                <a:spcPct val="100000"/>
-              </a:lnSpc>
-              <a:buNone/>
-              <a:defRPr lang="en-US" sz="1200" b="0" u="none" strike="noStrike">
-                <a:solidFill>
-                  <a:schemeClr val="dk1">
-                    <a:tint val="75000"/>
-                  </a:schemeClr>
-                </a:solidFill>
-                <a:effectLst/>
-                <a:uFillTx/>
-                <a:latin typeface="Calibri"/>
-              </a:defRPr>
-            </a:lvl1pPr>
-          </a:lstStyle>
-          <a:p>
-            <a:pPr indent="0" defTabSz="457200">
-              <a:lnSpc>
-                <a:spcPct val="100000"/>
-              </a:lnSpc>
-              <a:buNone/>
-            </a:pPr>
-            <a:r>
-              <a:rPr lang="en-US" sz="1200" b="0" u="none" strike="noStrike">
-                <a:solidFill>
-                  <a:schemeClr val="dk1">
-                    <a:tint val="75000"/>
-                  </a:schemeClr>
-                </a:solidFill>
-                <a:effectLst/>
-                <a:uFillTx/>
-                <a:latin typeface="Calibri"/>
-              </a:rPr>
-              <a:t>&lt;date/time&gt;</a:t>
-            </a:r>
-            <a:endParaRPr lang="en-US" sz="1200" b="0" u="none" strike="noStrike">
-              <a:solidFill>
-                <a:srgbClr val="000000"/>
-              </a:solidFill>
-              <a:effectLst/>
-              <a:uFillTx/>
-              <a:latin typeface="Times New Roman"/>
-            </a:endParaRPr>
-          </a:p>
-        </p:txBody>
-      </p:sp>
-      <p:sp>
-        <p:nvSpPr>
-          <p:cNvPr id="45" name="PlaceHolder 2"/>
-          <p:cNvSpPr>
-            <a:spLocks noGrp="1"/>
-          </p:cNvSpPr>
-          <p:nvPr>
-            <p:ph type="ftr" idx="26"/>
-          </p:nvPr>
-        </p:nvSpPr>
-        <p:spPr>
-          <a:xfrm>
-            <a:off x="3124080" y="6356520"/>
-            <a:ext cx="2895120" cy="364680"/>
-          </a:xfrm>
-          <a:prstGeom prst="rect">
-            <a:avLst/>
-          </a:prstGeom>
-          <a:noFill/>
-          <a:ln w="0">
-            <a:noFill/>
-          </a:ln>
-        </p:spPr>
-        <p:txBody>
-          <a:bodyPr lIns="91440" rIns="91440" tIns="45720" bIns="45720" anchor="ctr">
-            <a:noAutofit/>
-          </a:bodyPr>
-          <a:lstStyle>
-            <a:lvl1pPr indent="0" algn="ctr">
-              <a:buNone/>
-              <a:defRPr lang="en-US" sz="1400" b="0" u="none" strike="noStrike">
-                <a:solidFill>
-                  <a:srgbClr val="000000"/>
-                </a:solidFill>
-                <a:effectLst/>
-                <a:uFillTx/>
-                <a:latin typeface="Times New Roman"/>
-              </a:defRPr>
-            </a:lvl1pPr>
-          </a:lstStyle>
-          <a:p>
-            <a:pPr indent="0" algn="ctr">
-              <a:buNone/>
-            </a:pPr>
-            <a:r>
-              <a:rPr lang="en-US" sz="1400" b="0" u="none" strike="noStrike">
-                <a:solidFill>
-                  <a:srgbClr val="000000"/>
-                </a:solidFill>
-                <a:effectLst/>
-                <a:uFillTx/>
-                <a:latin typeface="Times New Roman"/>
-              </a:rPr>
-              <a:t>&lt;footer&gt;</a:t>
-            </a:r>
-            <a:endParaRPr lang="en-US" sz="1400" b="0" u="none" strike="noStrike">
-              <a:solidFill>
-                <a:srgbClr val="000000"/>
-              </a:solidFill>
-              <a:effectLst/>
-              <a:uFillTx/>
-              <a:latin typeface="Times New Roman"/>
-            </a:endParaRPr>
-          </a:p>
-        </p:txBody>
-      </p:sp>
-      <p:sp>
-        <p:nvSpPr>
-          <p:cNvPr id="46" name="PlaceHolder 3"/>
-          <p:cNvSpPr>
-            <a:spLocks noGrp="1"/>
-          </p:cNvSpPr>
-          <p:nvPr>
-            <p:ph type="sldNum" idx="27"/>
-          </p:nvPr>
-        </p:nvSpPr>
-        <p:spPr>
-          <a:xfrm>
-            <a:off x="6553080" y="6356520"/>
-            <a:ext cx="2133360" cy="364680"/>
-          </a:xfrm>
-          <a:prstGeom prst="rect">
-            <a:avLst/>
-          </a:prstGeom>
-          <a:noFill/>
-          <a:ln w="0">
-            <a:noFill/>
-          </a:ln>
-        </p:spPr>
-        <p:txBody>
-          <a:bodyPr lIns="91440" rIns="91440" tIns="45720" bIns="45720" anchor="ctr">
-            <a:noAutofit/>
-          </a:bodyPr>
-          <a:lstStyle>
-            <a:lvl1pPr indent="0" algn="r" defTabSz="457200">
-              <a:lnSpc>
-                <a:spcPct val="100000"/>
-              </a:lnSpc>
-              <a:buNone/>
-              <a:defRPr lang="en-US" sz="1200" b="0" u="none" strike="noStrike">
-                <a:solidFill>
-                  <a:schemeClr val="dk1">
-                    <a:tint val="75000"/>
-                  </a:schemeClr>
-                </a:solidFill>
-                <a:effectLst/>
-                <a:uFillTx/>
-                <a:latin typeface="Calibri"/>
-              </a:defRPr>
-            </a:lvl1pPr>
-          </a:lstStyle>
-          <a:p>
-            <a:pPr indent="0" algn="r" defTabSz="457200">
-              <a:lnSpc>
-                <a:spcPct val="100000"/>
-              </a:lnSpc>
-              <a:buNone/>
-            </a:pPr>
-            <a:fld id="{0BD711DA-474F-4DBB-B55E-F2D55C54C81C}" type="slidenum">
-              <a:rPr lang="en-US" sz="1200" b="0" u="none" strike="noStrike">
-                <a:solidFill>
-                  <a:schemeClr val="dk1">
-                    <a:tint val="75000"/>
-                  </a:schemeClr>
-                </a:solidFill>
-                <a:effectLst/>
-                <a:uFillTx/>
-                <a:latin typeface="Calibri"/>
-              </a:rPr>
-              <a:t>&lt;number&gt;</a:t>
-            </a:fld>
-            <a:endParaRPr lang="en-US" sz="1200" b="0" u="none" strike="noStrike">
-              <a:solidFill>
-                <a:srgbClr val="000000"/>
-              </a:solidFill>
-              <a:effectLst/>
-              <a:uFillTx/>
-              <a:latin typeface="Times New Roman"/>
-            </a:endParaRPr>
-          </a:p>
-        </p:txBody>
-      </p:sp>
-      <p:sp>
-        <p:nvSpPr>
-          <p:cNvPr id="47" name="PlaceHolder 4"/>
-          <p:cNvSpPr>
-            <a:spLocks noGrp="1"/>
-          </p:cNvSpPr>
-          <p:nvPr>
-            <p:ph type="title"/>
-          </p:nvPr>
-        </p:nvSpPr>
-        <p:spPr>
-          <a:xfrm>
-            <a:off x="609480" y="273600"/>
-            <a:ext cx="10972080" cy="1144800"/>
-          </a:xfrm>
-          <a:prstGeom prst="rect">
-            <a:avLst/>
-          </a:prstGeom>
-          <a:noFill/>
-          <a:ln w="0">
-            <a:noFill/>
-          </a:ln>
-        </p:spPr>
-        <p:txBody>
-          <a:bodyPr lIns="0" rIns="0" tIns="0" bIns="0" anchor="ctr">
-            <a:noAutofit/>
-          </a:bodyPr>
-          <a:p>
-            <a:pPr indent="0">
-              <a:buNone/>
-            </a:pPr>
-            <a:r>
-              <a:rPr lang="en-US" sz="1800" b="0" u="none" strike="noStrike">
-                <a:solidFill>
-                  <a:schemeClr val="dk1"/>
-                </a:solidFill>
-                <a:effectLst/>
-                <a:uFillTx/>
-                <a:latin typeface="Calibri"/>
-              </a:rPr>
-              <a:t>Click to edit the title text format</a:t>
-            </a:r>
-            <a:endParaRPr lang="en-US" sz="1800" b="0" u="none" strike="noStrike">
-              <a:solidFill>
-                <a:schemeClr val="dk1"/>
-              </a:solidFill>
-              <a:effectLst/>
-              <a:uFillTx/>
-              <a:latin typeface="Calibri"/>
-            </a:endParaRPr>
-          </a:p>
-        </p:txBody>
-      </p:sp>
-      <p:sp>
-        <p:nvSpPr>
-          <p:cNvPr id="48" name="PlaceHolder 5"/>
-          <p:cNvSpPr>
-            <a:spLocks noGrp="1"/>
-          </p:cNvSpPr>
-          <p:nvPr>
-            <p:ph type="body"/>
-          </p:nvPr>
-        </p:nvSpPr>
-        <p:spPr>
-          <a:xfrm>
-            <a:off x="609480" y="1604520"/>
-            <a:ext cx="10972080" cy="3977280"/>
-          </a:xfrm>
-          <a:prstGeom prst="rect">
-            <a:avLst/>
-          </a:prstGeom>
-          <a:noFill/>
-          <a:ln w="0">
-            <a:noFill/>
-          </a:ln>
-        </p:spPr>
-        <p:txBody>
-          <a:bodyPr lIns="0" rIns="0" tIns="0" bIns="0" anchor="t">
-            <a:normAutofit/>
-          </a:bodyPr>
-          <a:p>
-            <a:pPr marL="432000" indent="-324000">
-              <a:spcBef>
-                <a:spcPts val="1417"/>
-              </a:spcBef>
-              <a:buClr>
-                <a:srgbClr val="000000"/>
-              </a:buClr>
-              <a:buSzPct val="45000"/>
-              <a:buFont typeface="Wingdings" charset="2"/>
-              <a:buChar char=""/>
-            </a:pPr>
-            <a:r>
-              <a:rPr lang="en-US" sz="3200" b="0" u="none" strike="noStrike">
-                <a:solidFill>
-                  <a:schemeClr val="dk1"/>
-                </a:solidFill>
-                <a:effectLst/>
-                <a:uFillTx/>
-                <a:latin typeface="Calibri"/>
-              </a:rPr>
-              <a:t>Click to edit the outline text format</a:t>
-            </a:r>
-            <a:endParaRPr lang="en-US" sz="3200" b="0" u="none" strike="noStrike">
-              <a:solidFill>
-                <a:schemeClr val="dk1"/>
-              </a:solidFill>
-              <a:effectLst/>
-              <a:uFillTx/>
-              <a:latin typeface="Calibri"/>
-            </a:endParaRPr>
-          </a:p>
-          <a:p>
-            <a:pPr marL="864000" lvl="1" indent="-324000">
-              <a:spcBef>
-                <a:spcPts val="1134"/>
-              </a:spcBef>
-              <a:buClr>
-                <a:srgbClr val="000000"/>
-              </a:buClr>
-              <a:buSzPct val="75000"/>
-              <a:buFont typeface="Symbol" charset="2"/>
-              <a:buChar char=""/>
-            </a:pPr>
-            <a:r>
-              <a:rPr lang="en-US" sz="2400" b="0" u="none" strike="noStrike">
-                <a:solidFill>
-                  <a:schemeClr val="dk1"/>
-                </a:solidFill>
-                <a:effectLst/>
-                <a:uFillTx/>
-                <a:latin typeface="Calibri"/>
-              </a:rPr>
-              <a:t>Second Outline Level</a:t>
-            </a:r>
-            <a:endParaRPr lang="en-US" sz="2400" b="0" u="none" strike="noStrike">
-              <a:solidFill>
-                <a:schemeClr val="dk1"/>
-              </a:solidFill>
-              <a:effectLst/>
-              <a:uFillTx/>
-              <a:latin typeface="Calibri"/>
-            </a:endParaRPr>
-          </a:p>
-          <a:p>
-            <a:pPr marL="1296000" lvl="2" indent="-288000">
-              <a:spcBef>
-                <a:spcPts val="850"/>
-              </a:spcBef>
-              <a:buClr>
-                <a:srgbClr val="000000"/>
-              </a:buClr>
-              <a:buSzPct val="45000"/>
-              <a:buFont typeface="Wingdings" charset="2"/>
-              <a:buChar char=""/>
-            </a:pPr>
-            <a:r>
-              <a:rPr lang="en-US" sz="2000" b="0" u="none" strike="noStrike">
-                <a:solidFill>
-                  <a:schemeClr val="dk1"/>
-                </a:solidFill>
-                <a:effectLst/>
-                <a:uFillTx/>
-                <a:latin typeface="Calibri"/>
-              </a:rPr>
-              <a:t>Third Outline Level</a:t>
-            </a:r>
-            <a:endParaRPr lang="en-US" sz="2000" b="0" u="none" strike="noStrike">
-              <a:solidFill>
-                <a:schemeClr val="dk1"/>
-              </a:solidFill>
-              <a:effectLst/>
-              <a:uFillTx/>
-              <a:latin typeface="Calibri"/>
-            </a:endParaRPr>
-          </a:p>
-          <a:p>
-            <a:pPr marL="1728000" lvl="3" indent="-216000">
-              <a:spcBef>
-                <a:spcPts val="567"/>
-              </a:spcBef>
-              <a:buClr>
-                <a:srgbClr val="000000"/>
-              </a:buClr>
-              <a:buSzPct val="75000"/>
-              <a:buFont typeface="Symbol" charset="2"/>
-              <a:buChar char=""/>
-            </a:pPr>
-            <a:r>
-              <a:rPr lang="en-US" sz="2000" b="0" u="none" strike="noStrike">
-                <a:solidFill>
-                  <a:schemeClr val="dk1"/>
-                </a:solidFill>
-                <a:effectLst/>
-                <a:uFillTx/>
-                <a:latin typeface="Calibri"/>
-              </a:rPr>
-              <a:t>Fourth Outline Level</a:t>
-            </a:r>
-            <a:endParaRPr lang="en-US" sz="2000" b="0" u="none" strike="noStrike">
-              <a:solidFill>
-                <a:schemeClr val="dk1"/>
-              </a:solidFill>
-              <a:effectLst/>
-              <a:uFillTx/>
-              <a:latin typeface="Calibri"/>
-            </a:endParaRPr>
-          </a:p>
-          <a:p>
-            <a:pPr marL="2160000" lvl="4" indent="-216000">
-              <a:spcBef>
-                <a:spcPts val="283"/>
-              </a:spcBef>
-              <a:buClr>
-                <a:srgbClr val="000000"/>
-              </a:buClr>
-              <a:buSzPct val="45000"/>
-              <a:buFont typeface="Wingdings" charset="2"/>
-              <a:buChar char=""/>
-            </a:pPr>
-            <a:r>
-              <a:rPr lang="en-US" sz="2000" b="0" u="none" strike="noStrike">
-                <a:solidFill>
-                  <a:schemeClr val="dk1"/>
-                </a:solidFill>
-                <a:effectLst/>
-                <a:uFillTx/>
-                <a:latin typeface="Calibri"/>
-              </a:rPr>
-              <a:t>Fifth Outline Level</a:t>
-            </a:r>
-            <a:endParaRPr lang="en-US" sz="2000" b="0" u="none" strike="noStrike">
-              <a:solidFill>
-                <a:schemeClr val="dk1"/>
-              </a:solidFill>
-              <a:effectLst/>
-              <a:uFillTx/>
-              <a:latin typeface="Calibri"/>
-            </a:endParaRPr>
-          </a:p>
-          <a:p>
-            <a:pPr marL="2592000" lvl="5" indent="-216000">
-              <a:spcBef>
-                <a:spcPts val="283"/>
-              </a:spcBef>
-              <a:buClr>
-                <a:srgbClr val="000000"/>
-              </a:buClr>
-              <a:buSzPct val="45000"/>
-              <a:buFont typeface="Wingdings" charset="2"/>
-              <a:buChar char=""/>
-            </a:pPr>
-            <a:r>
-              <a:rPr lang="en-US" sz="2000" b="0" u="none" strike="noStrike">
-                <a:solidFill>
-                  <a:schemeClr val="dk1"/>
-                </a:solidFill>
-                <a:effectLst/>
-                <a:uFillTx/>
-                <a:latin typeface="Calibri"/>
-              </a:rPr>
-              <a:t>Sixth Outline Level</a:t>
-            </a:r>
-            <a:endParaRPr lang="en-US" sz="2000" b="0" u="none" strike="noStrike">
-              <a:solidFill>
-                <a:schemeClr val="dk1"/>
-              </a:solidFill>
-              <a:effectLst/>
-              <a:uFillTx/>
-              <a:latin typeface="Calibri"/>
-            </a:endParaRPr>
-          </a:p>
-          <a:p>
-            <a:pPr marL="3024000" lvl="6" indent="-216000">
-              <a:spcBef>
-                <a:spcPts val="283"/>
-              </a:spcBef>
-              <a:buClr>
-                <a:srgbClr val="000000"/>
-              </a:buClr>
-              <a:buSzPct val="45000"/>
-              <a:buFont typeface="Wingdings" charset="2"/>
-              <a:buChar char=""/>
-            </a:pPr>
-            <a:r>
-              <a:rPr lang="en-US" sz="2000" b="0" u="none" strike="noStrike">
-                <a:solidFill>
-                  <a:schemeClr val="dk1"/>
-                </a:solidFill>
-                <a:effectLst/>
-                <a:uFillTx/>
-                <a:latin typeface="Calibri"/>
-              </a:rPr>
-              <a:t>Seventh Outline Level</a:t>
-            </a:r>
-            <a:endParaRPr lang="en-US" sz="2000" b="0" u="none" strike="noStrike">
-              <a:solidFill>
-                <a:schemeClr val="dk1"/>
-              </a:solidFill>
-              <a:effectLst/>
-              <a:uFillTx/>
-              <a:latin typeface="Calibri"/>
             </a:endParaRPr>
           </a:p>
         </p:txBody>
@@ -5827,7 +6168,7 @@
         <p:spPr>
           <a:xfrm>
             <a:off x="822960" y="1828800"/>
-            <a:ext cx="10515240" cy="2377080"/>
+            <a:ext cx="10514880" cy="2376720"/>
           </a:xfrm>
           <a:prstGeom prst="rect">
             <a:avLst/>
@@ -5916,7 +6257,7 @@
         <p:spPr>
           <a:xfrm>
             <a:off x="822960" y="4572000"/>
-            <a:ext cx="10515240" cy="1462680"/>
+            <a:ext cx="10514880" cy="1462320"/>
           </a:xfrm>
           <a:prstGeom prst="rect">
             <a:avLst/>
@@ -6071,7 +6412,7 @@
         <p:spPr>
           <a:xfrm>
             <a:off x="640080" y="411480"/>
-            <a:ext cx="10972440" cy="1005480"/>
+            <a:ext cx="10972080" cy="1005120"/>
           </a:xfrm>
           <a:prstGeom prst="rect">
             <a:avLst/>
@@ -6131,7 +6472,7 @@
         <p:spPr>
           <a:xfrm>
             <a:off x="685800" y="1554480"/>
-            <a:ext cx="10972440" cy="1263240"/>
+            <a:ext cx="10972080" cy="1262520"/>
           </a:xfrm>
           <a:prstGeom prst="rect">
             <a:avLst/>
@@ -6286,7 +6627,7 @@
         <p:spPr>
           <a:xfrm>
             <a:off x="640080" y="411480"/>
-            <a:ext cx="10972440" cy="1005480"/>
+            <a:ext cx="10972080" cy="1005120"/>
           </a:xfrm>
           <a:prstGeom prst="rect">
             <a:avLst/>
@@ -6346,7 +6687,7 @@
         <p:spPr>
           <a:xfrm>
             <a:off x="685800" y="1554480"/>
-            <a:ext cx="6400440" cy="2315160"/>
+            <a:ext cx="6400080" cy="2314440"/>
           </a:xfrm>
           <a:prstGeom prst="rect">
             <a:avLst/>
@@ -6468,7 +6809,7 @@
         <p:spPr>
           <a:xfrm>
             <a:off x="7452360" y="1600200"/>
-            <a:ext cx="4068720" cy="4068720"/>
+            <a:ext cx="4068360" cy="4068360"/>
           </a:xfrm>
           <a:prstGeom prst="rect">
             <a:avLst/>
@@ -6488,7 +6829,7 @@
         <p:spPr>
           <a:xfrm>
             <a:off x="7452360" y="5806440"/>
-            <a:ext cx="4068720" cy="456840"/>
+            <a:ext cx="4068360" cy="456480"/>
           </a:xfrm>
           <a:prstGeom prst="rect">
             <a:avLst/>
@@ -6585,7 +6926,7 @@
         <p:spPr>
           <a:xfrm>
             <a:off x="640080" y="411480"/>
-            <a:ext cx="10972440" cy="1005480"/>
+            <a:ext cx="10972080" cy="1005120"/>
           </a:xfrm>
           <a:prstGeom prst="rect">
             <a:avLst/>
@@ -6645,7 +6986,7 @@
         <p:spPr>
           <a:xfrm>
             <a:off x="685800" y="1554480"/>
-            <a:ext cx="6400440" cy="2040840"/>
+            <a:ext cx="6400080" cy="2040120"/>
           </a:xfrm>
           <a:prstGeom prst="rect">
             <a:avLst/>
@@ -6767,7 +7108,7 @@
         <p:spPr>
           <a:xfrm>
             <a:off x="7452360" y="1600200"/>
-            <a:ext cx="4068720" cy="4068720"/>
+            <a:ext cx="4068360" cy="4068360"/>
           </a:xfrm>
           <a:prstGeom prst="rect">
             <a:avLst/>
@@ -6787,7 +7128,7 @@
         <p:spPr>
           <a:xfrm>
             <a:off x="7452360" y="5806440"/>
-            <a:ext cx="4068720" cy="456840"/>
+            <a:ext cx="4068360" cy="456480"/>
           </a:xfrm>
           <a:prstGeom prst="rect">
             <a:avLst/>
@@ -6884,7 +7225,7 @@
         <p:spPr>
           <a:xfrm>
             <a:off x="640080" y="411480"/>
-            <a:ext cx="10972440" cy="1005480"/>
+            <a:ext cx="10972080" cy="1005120"/>
           </a:xfrm>
           <a:prstGeom prst="rect">
             <a:avLst/>
@@ -6922,7 +7263,7 @@
                 <a:uFillTx/>
                 <a:latin typeface="Calibri"/>
               </a:rPr>
-              <a:t>The data behind it</a:t>
+              <a:t>What we checked, where things stand, what is next</a:t>
             </a:r>
             <a:endParaRPr lang="en-US" sz="3000" b="0" u="none" strike="noStrike">
               <a:solidFill>
@@ -6944,7 +7285,7 @@
         <p:spPr>
           <a:xfrm>
             <a:off x="685800" y="1554480"/>
-            <a:ext cx="10972440" cy="3015000"/>
+            <a:ext cx="10972080" cy="3594240"/>
           </a:xfrm>
           <a:prstGeom prst="rect">
             <a:avLst/>
@@ -6974,7 +7315,7 @@
               </a:spcAft>
             </a:pPr>
             <a:r>
-              <a:rPr lang="en-US" sz="1900" b="0" u="none" strike="noStrike">
+              <a:rPr lang="en-US" sz="1800" b="0" u="none" strike="noStrike">
                 <a:solidFill>
                   <a:srgbClr val="ececec"/>
                 </a:solidFill>
@@ -6982,9 +7323,9 @@
                 <a:uFillTx/>
                 <a:latin typeface="Calibri"/>
               </a:rPr>
-              <a:t>•  The batch collector now varies the food setup across runs, how many sources, how far boids can sense them, and how strong the pull is.</a:t>
-            </a:r>
-            <a:endParaRPr lang="en-US" sz="1900" b="0" u="none" strike="noStrike">
+              <a:t>•  With the food pull enabled the flock visibly converges on sources and stays near them, with it disabled boids drift past food as if it were not there</a:t>
+            </a:r>
+            <a:endParaRPr lang="en-US" sz="1800" b="0" u="none" strike="noStrike">
               <a:solidFill>
                 <a:srgbClr val="ffffff"/>
               </a:solidFill>
@@ -7003,7 +7344,7 @@
               </a:spcAft>
             </a:pPr>
             <a:r>
-              <a:rPr lang="en-US" sz="1900" b="0" u="none" strike="noStrike">
+              <a:rPr lang="en-US" sz="1800" b="0" u="none" strike="noStrike">
                 <a:solidFill>
                   <a:srgbClr val="ececec"/>
                 </a:solidFill>
@@ -7011,9 +7352,9 @@
                 <a:uFillTx/>
                 <a:latin typeface="Calibri"/>
               </a:rPr>
-              <a:t>•  Every run stores the food state frame by frame in the binary files, beside positions and velocities</a:t>
-            </a:r>
-            <a:endParaRPr lang="en-US" sz="1900" b="0" u="none" strike="noStrike">
+              <a:t>•  Running the same configuration twice produces identical data, which is what makes the dataset trustworthy.</a:t>
+            </a:r>
+            <a:endParaRPr lang="en-US" sz="1800" b="0" u="none" strike="noStrike">
               <a:solidFill>
                 <a:srgbClr val="ffffff"/>
               </a:solidFill>
@@ -7031,18 +7372,7 @@
                 <a:spcPts val="1199"/>
               </a:spcAft>
             </a:pPr>
-            <a:r>
-              <a:rPr lang="en-US" sz="1900" b="0" u="none" strike="noStrike">
-                <a:solidFill>
-                  <a:srgbClr val="ececec"/>
-                </a:solidFill>
-                <a:effectLst/>
-                <a:uFillTx/>
-                <a:latin typeface="Calibri"/>
-              </a:rPr>
-              <a:t>•  Every stored relationship is computed from the same positions stored beside it, so the recorded graphs always match the recorded state</a:t>
-            </a:r>
-            <a:endParaRPr lang="en-US" sz="1900" b="0" u="none" strike="noStrike">
+            <a:endParaRPr lang="en-US" sz="1800" b="0" u="none" strike="noStrike">
               <a:solidFill>
                 <a:srgbClr val="ffffff"/>
               </a:solidFill>
@@ -7060,18 +7390,7 @@
                 <a:spcPts val="1199"/>
               </a:spcAft>
             </a:pPr>
-            <a:r>
-              <a:rPr lang="en-US" sz="1900" b="0" u="none" strike="noStrike">
-                <a:solidFill>
-                  <a:srgbClr val="ececec"/>
-                </a:solidFill>
-                <a:effectLst/>
-                <a:uFillTx/>
-                <a:latin typeface="Calibri"/>
-              </a:rPr>
-              <a:t>•  The same seed still reproduces a run exactly, food and all.</a:t>
-            </a:r>
-            <a:endParaRPr lang="en-US" sz="1900" b="0" u="none" strike="noStrike">
+            <a:endParaRPr lang="en-US" sz="1800" b="0" u="none" strike="noStrike">
               <a:solidFill>
                 <a:srgbClr val="ffffff"/>
               </a:solidFill>
@@ -7090,7 +7409,7 @@
               </a:spcAft>
             </a:pPr>
             <a:r>
-              <a:rPr lang="en-US" sz="1900" b="0" u="none" strike="noStrike">
+              <a:rPr lang="en-US" sz="1800" b="0" u="none" strike="noStrike">
                 <a:solidFill>
                   <a:srgbClr val="ececec"/>
                 </a:solidFill>
@@ -7098,9 +7417,38 @@
                 <a:uFillTx/>
                 <a:latin typeface="Calibri"/>
               </a:rPr>
-              <a:t>•  The simulations also look alike now, both of our implementations draw the same dark world with the same agent triangles, so figures from either one read as one project.</a:t>
-            </a:r>
-            <a:endParaRPr lang="en-US" sz="1900" b="0" u="none" strike="noStrike">
+              <a:t>•  Status: cluster access is secured. Dr. Cesar Torres has not replied to our funding email, nor to the follow up Joel sent.</a:t>
+            </a:r>
+            <a:endParaRPr lang="en-US" sz="1800" b="0" u="none" strike="noStrike">
+              <a:solidFill>
+                <a:srgbClr val="ffffff"/>
+              </a:solidFill>
+              <a:effectLst/>
+              <a:uFillTx/>
+              <a:latin typeface="Arial"/>
+            </a:endParaRPr>
+          </a:p>
+          <a:p>
+            <a:pPr defTabSz="457200">
+              <a:lnSpc>
+                <a:spcPct val="100000"/>
+              </a:lnSpc>
+              <a:spcAft>
+                <a:spcPts val="1199"/>
+              </a:spcAft>
+            </a:pPr>
+            <a:r>
+              <a:rPr lang="en-US" sz="1800" b="0" u="none" strike="noStrike">
+                <a:solidFill>
+                  <a:srgbClr val="ececec"/>
+                </a:solidFill>
+                <a:effectLst/>
+                <a:uFillTx/>
+                <a:latin typeface="Calibri"/>
+              </a:rPr>
+              <a:t>•  Real data: we surveyed public datasets. None label which agents are actually interacting, so our simulation stays the same and real data becomes the test of whether a model transfers. Some datasets: zebrafish with video, pigeon flocks attacked by a robotic falcon, and pedestrian crowds.</a:t>
+            </a:r>
+            <a:endParaRPr lang="en-US" sz="1800" b="0" u="none" strike="noStrike">
               <a:solidFill>
                 <a:srgbClr val="ffffff"/>
               </a:solidFill>
@@ -7157,7 +7505,7 @@
         <p:spPr>
           <a:xfrm>
             <a:off x="640080" y="411480"/>
-            <a:ext cx="10972440" cy="1005480"/>
+            <a:ext cx="10972080" cy="1005120"/>
           </a:xfrm>
           <a:prstGeom prst="rect">
             <a:avLst/>
@@ -7195,7 +7543,7 @@
                 <a:uFillTx/>
                 <a:latin typeface="Calibri"/>
               </a:rPr>
-              <a:t>What we checked, where things stand, what is next</a:t>
+              <a:t>Questions for you</a:t>
             </a:r>
             <a:endParaRPr lang="en-US" sz="3000" b="0" u="none" strike="noStrike">
               <a:solidFill>
@@ -7217,287 +7565,7 @@
         <p:spPr>
           <a:xfrm>
             <a:off x="685800" y="1554480"/>
-            <a:ext cx="10972440" cy="3594960"/>
-          </a:xfrm>
-          <a:prstGeom prst="rect">
-            <a:avLst/>
-          </a:prstGeom>
-          <a:noFill/>
-          <a:ln w="0">
-            <a:noFill/>
-          </a:ln>
-        </p:spPr>
-        <p:style>
-          <a:lnRef idx="0"/>
-          <a:fillRef idx="0"/>
-          <a:effectRef idx="0"/>
-          <a:fontRef idx="minor"/>
-        </p:style>
-        <p:txBody>
-          <a:bodyPr lIns="90000" rIns="90000" tIns="45000" bIns="45000" anchor="t">
-            <a:spAutoFit/>
-          </a:bodyPr>
-          <a:p>
-            <a:pPr defTabSz="457200">
-              <a:lnSpc>
-                <a:spcPct val="100000"/>
-              </a:lnSpc>
-              <a:spcAft>
-                <a:spcPts val="1199"/>
-              </a:spcAft>
-            </a:pPr>
-            <a:r>
-              <a:rPr lang="en-US" sz="1800" b="0" u="none" strike="noStrike">
-                <a:solidFill>
-                  <a:srgbClr val="ececec"/>
-                </a:solidFill>
-                <a:effectLst/>
-                <a:uFillTx/>
-                <a:latin typeface="Calibri"/>
-              </a:rPr>
-              <a:t>•  With the food pull enabled the flock visibly converges on sources and stays near them, with it disabled boids drift past food as if it were not there</a:t>
-            </a:r>
-            <a:endParaRPr lang="en-US" sz="1800" b="0" u="none" strike="noStrike">
-              <a:solidFill>
-                <a:srgbClr val="ffffff"/>
-              </a:solidFill>
-              <a:effectLst/>
-              <a:uFillTx/>
-              <a:latin typeface="Arial"/>
-            </a:endParaRPr>
-          </a:p>
-          <a:p>
-            <a:pPr defTabSz="457200">
-              <a:lnSpc>
-                <a:spcPct val="100000"/>
-              </a:lnSpc>
-              <a:spcAft>
-                <a:spcPts val="1199"/>
-              </a:spcAft>
-            </a:pPr>
-            <a:r>
-              <a:rPr lang="en-US" sz="1800" b="0" u="none" strike="noStrike">
-                <a:solidFill>
-                  <a:srgbClr val="ececec"/>
-                </a:solidFill>
-                <a:effectLst/>
-                <a:uFillTx/>
-                <a:latin typeface="Calibri"/>
-              </a:rPr>
-              <a:t>•  Running the same configuration twice produces identical data, which is what makes the dataset trustworthy.</a:t>
-            </a:r>
-            <a:endParaRPr lang="en-US" sz="1800" b="0" u="none" strike="noStrike">
-              <a:solidFill>
-                <a:srgbClr val="ffffff"/>
-              </a:solidFill>
-              <a:effectLst/>
-              <a:uFillTx/>
-              <a:latin typeface="Arial"/>
-            </a:endParaRPr>
-          </a:p>
-          <a:p>
-            <a:pPr defTabSz="457200">
-              <a:lnSpc>
-                <a:spcPct val="100000"/>
-              </a:lnSpc>
-              <a:spcAft>
-                <a:spcPts val="1199"/>
-              </a:spcAft>
-            </a:pPr>
-            <a:endParaRPr lang="en-US" sz="1800" b="0" u="none" strike="noStrike">
-              <a:solidFill>
-                <a:srgbClr val="ffffff"/>
-              </a:solidFill>
-              <a:effectLst/>
-              <a:uFillTx/>
-              <a:latin typeface="Arial"/>
-            </a:endParaRPr>
-          </a:p>
-          <a:p>
-            <a:pPr defTabSz="457200">
-              <a:lnSpc>
-                <a:spcPct val="100000"/>
-              </a:lnSpc>
-              <a:spcAft>
-                <a:spcPts val="1199"/>
-              </a:spcAft>
-            </a:pPr>
-            <a:endParaRPr lang="en-US" sz="1800" b="0" u="none" strike="noStrike">
-              <a:solidFill>
-                <a:srgbClr val="ffffff"/>
-              </a:solidFill>
-              <a:effectLst/>
-              <a:uFillTx/>
-              <a:latin typeface="Arial"/>
-            </a:endParaRPr>
-          </a:p>
-          <a:p>
-            <a:pPr defTabSz="457200">
-              <a:lnSpc>
-                <a:spcPct val="100000"/>
-              </a:lnSpc>
-              <a:spcAft>
-                <a:spcPts val="1199"/>
-              </a:spcAft>
-            </a:pPr>
-            <a:r>
-              <a:rPr lang="en-US" sz="1800" b="0" u="none" strike="noStrike">
-                <a:solidFill>
-                  <a:srgbClr val="ececec"/>
-                </a:solidFill>
-                <a:effectLst/>
-                <a:uFillTx/>
-                <a:latin typeface="Calibri"/>
-              </a:rPr>
-              <a:t>•  Status: cluster access is secured. Dr. Cesar Torres has not replied to our funding email, nor to the follow up Joel sent.</a:t>
-            </a:r>
-            <a:endParaRPr lang="en-US" sz="1800" b="0" u="none" strike="noStrike">
-              <a:solidFill>
-                <a:srgbClr val="ffffff"/>
-              </a:solidFill>
-              <a:effectLst/>
-              <a:uFillTx/>
-              <a:latin typeface="Arial"/>
-            </a:endParaRPr>
-          </a:p>
-          <a:p>
-            <a:pPr defTabSz="457200">
-              <a:lnSpc>
-                <a:spcPct val="100000"/>
-              </a:lnSpc>
-              <a:spcAft>
-                <a:spcPts val="1199"/>
-              </a:spcAft>
-            </a:pPr>
-            <a:r>
-              <a:rPr lang="en-US" sz="1800" b="0" u="none" strike="noStrike">
-                <a:solidFill>
-                  <a:srgbClr val="ececec"/>
-                </a:solidFill>
-                <a:effectLst/>
-                <a:uFillTx/>
-                <a:latin typeface="Calibri"/>
-              </a:rPr>
-              <a:t>•  Real data: we surveyed public datasets. None label which agents are actually interacting, so our simulation stays the same and real data becomes the test of whether a model transfers. Some datasets: zebrafish with video, pigeon flocks attacked by a robotic falcon, and pedestrian crowds.</a:t>
-            </a:r>
-            <a:endParaRPr lang="en-US" sz="1800" b="0" u="none" strike="noStrike">
-              <a:solidFill>
-                <a:srgbClr val="ffffff"/>
-              </a:solidFill>
-              <a:effectLst/>
-              <a:uFillTx/>
-              <a:latin typeface="Arial"/>
-            </a:endParaRPr>
-          </a:p>
-        </p:txBody>
-      </p:sp>
-    </p:spTree>
-  </p:cSld>
-  <mc:AlternateContent>
-    <mc:Choice Requires="p14">
-      <p:transition spd="slow" p14:dur="2000"/>
-    </mc:Choice>
-    <mc:Fallback>
-      <p:transition spd="slow"/>
-    </mc:Fallback>
-  </mc:AlternateContent>
-</p:sld>
-</file>
-
-<file path=ppt/slides/slide7.xml><?xml version="1.0" encoding="utf-8"?>
-<p:sld xmlns:a="http://schemas.openxmlformats.org/drawingml/2006/main" xmlns:p="http://schemas.openxmlformats.org/presentationml/2006/main" xmlns:r="http://schemas.openxmlformats.org/officeDocument/2006/relationships" xmlns:p14="http://schemas.microsoft.com/office/powerpoint/2010/main" xmlns:p15="http://schemas.microsoft.com/office/powerpoint/2012/main" xmlns:mc="http://schemas.openxmlformats.org/markup-compatibility/2006">
-  <p:cSld>
-    <p:bg>
-      <p:bgPr>
-        <a:solidFill>
-          <a:srgbClr val="1e1e26"/>
-        </a:solidFill>
-      </p:bgPr>
-    </p:bg>
-    <p:spTree>
-      <p:nvGrpSpPr>
-        <p:cNvPr id="1" name=""/>
-        <p:cNvGrpSpPr/>
-        <p:nvPr/>
-      </p:nvGrpSpPr>
-      <p:grpSpPr>
-        <a:xfrm>
-          <a:off x="0" y="0"/>
-          <a:ext cx="0" cy="0"/>
-          <a:chOff x="0" y="0"/>
-          <a:chExt cx="0" cy="0"/>
-        </a:xfrm>
-      </p:grpSpPr>
-      <p:sp>
-        <p:nvSpPr>
-          <p:cNvPr id="77" name="TextBox 1"/>
-          <p:cNvSpPr/>
-          <p:nvPr/>
-        </p:nvSpPr>
-        <p:spPr>
-          <a:xfrm>
-            <a:off x="640080" y="411480"/>
-            <a:ext cx="10972440" cy="1005480"/>
-          </a:xfrm>
-          <a:prstGeom prst="rect">
-            <a:avLst/>
-          </a:prstGeom>
-          <a:noFill/>
-          <a:ln w="0">
-            <a:noFill/>
-          </a:ln>
-        </p:spPr>
-        <p:style>
-          <a:lnRef idx="0"/>
-          <a:fillRef idx="0"/>
-          <a:effectRef idx="0"/>
-          <a:fontRef idx="minor"/>
-        </p:style>
-        <p:txBody>
-          <a:bodyPr lIns="90000" rIns="90000" tIns="45000" bIns="45000" anchor="t">
-            <a:spAutoFit/>
-          </a:bodyPr>
-          <a:p>
-            <a:pPr defTabSz="457200">
-              <a:lnSpc>
-                <a:spcPct val="100000"/>
-              </a:lnSpc>
-              <a:spcAft>
-                <a:spcPts val="799"/>
-              </a:spcAft>
-            </a:pPr>
-            <a:r>
-              <a:rPr lang="en-US" sz="3000" b="1" u="none" strike="noStrike">
-                <a:solidFill>
-                  <a:srgbClr val="e03a3c"/>
-                </a:solidFill>
-                <a:effectLst/>
-                <a:uFillTx/>
-                <a:latin typeface="Calibri"/>
-              </a:rPr>
-              <a:t>Questions for you</a:t>
-            </a:r>
-            <a:endParaRPr lang="en-US" sz="3000" b="0" u="none" strike="noStrike">
-              <a:solidFill>
-                <a:srgbClr val="ffffff"/>
-              </a:solidFill>
-              <a:effectLst/>
-              <a:uFillTx/>
-              <a:latin typeface="Arial"/>
-            </a:endParaRPr>
-          </a:p>
-        </p:txBody>
-      </p:sp>
-      <p:sp>
-        <p:nvSpPr>
-          <p:cNvPr id="78" name="TextBox 2"/>
-          <p:cNvSpPr/>
-          <p:nvPr/>
-        </p:nvSpPr>
-        <p:spPr>
-          <a:xfrm>
-            <a:off x="685800" y="1554480"/>
-            <a:ext cx="10972440" cy="1110960"/>
+            <a:ext cx="10972080" cy="1110240"/>
           </a:xfrm>
           <a:prstGeom prst="rect">
             <a:avLst/>
